--- a/SABRE_CRANE_SIG_2026.pptx
+++ b/SABRE_CRANE_SIG_2026.pptx
@@ -6,6 +6,7 @@
   </p:sldMasterIdLst>
   <p:sldIdLst>
     <p:sldId id="256" r:id="rId2"/>
+    <p:sldId id="264" r:id="rId15"/>
     <p:sldId id="257" r:id="rId3"/>
     <p:sldId id="258" r:id="rId4"/>
     <p:sldId id="259" r:id="rId5"/>
@@ -6093,7 +6094,7 @@
                 </a:solidFill>
                 <a:latin typeface="Aptos Display"/>
               </a:rPr>
-              <a:t>Since This Abstract: SABRE-II — Learned Fusion &amp; Policy</a:t>
+              <a:t>SABRE-II: Learned Fusion &amp; Bayesian Policy</a:t>
             </a:r>
             <a:endParaRPr lang="en-GB" sz="4200"/>
           </a:p>
@@ -7796,6 +7797,324 @@
         <p14:creationId xmlns:p14="http://schemas.microsoft.com/office/powerpoint/2010/main" val="1970056675"/>
       </p:ext>
     </p:extLst>
+  </p:cSld>
+  <p:clrMapOvr>
+    <a:masterClrMapping/>
+  </p:clrMapOvr>
+</p:sld>
+</file>
+
+<file path=ppt/slides/slide9.xml><?xml version="1.0" encoding="utf-8"?>
+<p:sld xmlns:a="http://schemas.openxmlformats.org/drawingml/2006/main" xmlns:p="http://schemas.openxmlformats.org/presentationml/2006/main" xmlns:r="http://schemas.openxmlformats.org/officeDocument/2006/relationships">
+  <p:cSld>
+    <p:spTree>
+      <p:nvGrpSpPr>
+        <p:cNvPr id="1" name=""/>
+        <p:cNvGrpSpPr/>
+        <p:nvPr/>
+      </p:nvGrpSpPr>
+      <p:grpSpPr/>
+      <p:cxnSp>
+        <p:nvCxnSpPr>
+          <p:cNvPr id="4" name="Straight Connector 3">
+            <a:extLst>
+              <a:ext uri="{FF2B5EF4-FFF2-40B4-BE49-F238E27FC236}">
+                <a16:creationId xmlns:a16="http://schemas.microsoft.com/office/drawing/2014/main" id="{F04E40D7-BE15-03B3-6F32-D4894228A3A0}"/>
+              </a:ext>
+            </a:extLst>
+          </p:cNvPr>
+          <p:cNvCxnSpPr/>
+          <p:nvPr/>
+        </p:nvCxnSpPr>
+        <p:spPr>
+          <a:xfrm>
+            <a:off x="196788" y="1364942"/>
+            <a:ext cx="11798423" cy="0"/>
+          </a:xfrm>
+          <a:prstGeom prst="line">
+            <a:avLst/>
+          </a:prstGeom>
+        </p:spPr>
+        <p:style>
+          <a:lnRef idx="2">
+            <a:schemeClr val="accent1"/>
+          </a:lnRef>
+          <a:fillRef idx="0">
+            <a:schemeClr val="accent1"/>
+          </a:fillRef>
+          <a:effectRef idx="1">
+            <a:schemeClr val="accent1"/>
+          </a:effectRef>
+          <a:fontRef idx="minor">
+            <a:schemeClr val="tx1"/>
+          </a:fontRef>
+        </p:style>
+      </p:cxnSp>
+      <p:sp>
+        <p:nvSpPr>
+          <p:cNvPr id="3" name="Content Placeholder 2">
+            <a:extLst>
+              <a:ext uri="{FF2B5EF4-FFF2-40B4-BE49-F238E27FC236}">
+                <a16:creationId xmlns:a16="http://schemas.microsoft.com/office/drawing/2014/main" id="{BA919012-1158-CC85-7281-8334EED33B59}"/>
+              </a:ext>
+            </a:extLst>
+          </p:cNvPr>
+          <p:cNvSpPr>
+            <a:spLocks noGrp="1"/>
+          </p:cNvSpPr>
+          <p:nvPr>
+            <p:ph idx="1"/>
+          </p:nvPr>
+        </p:nvSpPr>
+        <p:spPr/>
+        <p:txBody>
+          <a:bodyPr vert="horz" lIns="91440" tIns="45720" rIns="91440" bIns="45720" rtlCol="0" anchor="t">
+            <a:normAutofit/>
+          </a:bodyPr>
+          <a:lstStyle/>
+          <a:p>
+            <a:pPr lvl="1">
+              <a:spcBef>
+                <a:spcPts val="400"/>
+              </a:spcBef>
+              <a:buClr>
+                <a:srgbClr val="E97132"/>
+              </a:buClr>
+              <a:buFont typeface="Arial"/>
+              <a:buChar char="▸"/>
+            </a:pPr>
+            <a:r>
+              <a:rPr lang="en-GB" sz="1800" b="0" dirty="0">
+                <a:latin typeface="Aptos"/>
+                <a:solidFill>
+                  <a:srgbClr val="0E2841"/>
+                </a:solidFill>
+              </a:rPr>
+              <a:t>The Problem — why binary detection fails in practice</a:t>
+            </a:r>
+          </a:p>
+          <a:p>
+            <a:pPr lvl="1">
+              <a:spcBef>
+                <a:spcPts val="400"/>
+              </a:spcBef>
+              <a:buClr>
+                <a:srgbClr val="E97132"/>
+              </a:buClr>
+              <a:buFont typeface="Arial"/>
+              <a:buChar char="▸"/>
+            </a:pPr>
+            <a:r>
+              <a:rPr lang="en-GB" sz="1800" b="0" dirty="0">
+                <a:latin typeface="Aptos"/>
+                <a:solidFill>
+                  <a:srgbClr val="0E2841"/>
+                </a:solidFill>
+              </a:rPr>
+              <a:t>SABRE Architecture — two complementary detection agents</a:t>
+            </a:r>
+          </a:p>
+          <a:p>
+            <a:pPr lvl="1">
+              <a:spcBef>
+                <a:spcPts val="400"/>
+              </a:spcBef>
+              <a:buClr>
+                <a:srgbClr val="E97132"/>
+              </a:buClr>
+              <a:buFont typeface="Arial"/>
+              <a:buChar char="▸"/>
+            </a:pPr>
+            <a:r>
+              <a:rPr lang="en-GB" sz="1800" b="0" dirty="0">
+                <a:latin typeface="Aptos"/>
+                <a:solidFill>
+                  <a:srgbClr val="0E2841"/>
+                </a:solidFill>
+              </a:rPr>
+              <a:t>Triage Policy — operationalising uncertainty as a control variable</a:t>
+            </a:r>
+          </a:p>
+          <a:p>
+            <a:pPr lvl="1">
+              <a:spcBef>
+                <a:spcPts val="400"/>
+              </a:spcBef>
+              <a:buClr>
+                <a:srgbClr val="E97132"/>
+              </a:buClr>
+              <a:buFont typeface="Arial"/>
+              <a:buChar char="▸"/>
+            </a:pPr>
+            <a:r>
+              <a:rPr lang="en-GB" sz="1800" b="0" dirty="0">
+                <a:latin typeface="Aptos"/>
+                <a:solidFill>
+                  <a:srgbClr val="0E2841"/>
+                </a:solidFill>
+              </a:rPr>
+              <a:t>Results — where SABRE works and where it struggles</a:t>
+            </a:r>
+          </a:p>
+          <a:p>
+            <a:pPr lvl="1">
+              <a:spcBef>
+                <a:spcPts val="400"/>
+              </a:spcBef>
+              <a:buClr>
+                <a:srgbClr val="E97132"/>
+              </a:buClr>
+              <a:buFont typeface="Arial"/>
+              <a:buChar char="▸"/>
+            </a:pPr>
+            <a:r>
+              <a:rPr lang="en-GB" sz="1800" b="0" dirty="0">
+                <a:latin typeface="Aptos"/>
+                <a:solidFill>
+                  <a:srgbClr val="0E2841"/>
+                </a:solidFill>
+              </a:rPr>
+              <a:t>Explainability — making decisions auditable</a:t>
+            </a:r>
+          </a:p>
+          <a:p>
+            <a:pPr lvl="1">
+              <a:spcBef>
+                <a:spcPts val="400"/>
+              </a:spcBef>
+              <a:buClr>
+                <a:srgbClr val="E97132"/>
+              </a:buClr>
+              <a:buFont typeface="Arial"/>
+              <a:buChar char="▸"/>
+            </a:pPr>
+            <a:r>
+              <a:rPr lang="en-GB" sz="1800" b="0" dirty="0">
+                <a:latin typeface="Aptos"/>
+                <a:solidFill>
+                  <a:srgbClr val="0E2841"/>
+                </a:solidFill>
+              </a:rPr>
+              <a:t>SABRE-II — learned fusion and Bayesian policy optimisation</a:t>
+            </a:r>
+          </a:p>
+          <a:p>
+            <a:pPr lvl="1">
+              <a:spcBef>
+                <a:spcPts val="400"/>
+              </a:spcBef>
+              <a:buClr>
+                <a:srgbClr val="E97132"/>
+              </a:buClr>
+              <a:buFont typeface="Arial"/>
+              <a:buChar char="▸"/>
+            </a:pPr>
+            <a:r>
+              <a:rPr lang="en-GB" sz="1800" b="0" dirty="0">
+                <a:latin typeface="Aptos"/>
+                <a:solidFill>
+                  <a:srgbClr val="0E2841"/>
+                </a:solidFill>
+              </a:rPr>
+              <a:t>Conclusions &amp; Discussion</a:t>
+            </a:r>
+          </a:p>
+          <a:p>
+            <a:pPr>
+              <a:buNone/>
+            </a:pPr>
+            <a:r>
+              <a:rPr lang="en-GB" sz="600" b="0" dirty="0">
+                <a:latin typeface="Aptos"/>
+              </a:rPr>
+              <a:t/>
+            </a:r>
+          </a:p>
+          <a:p>
+            <a:pPr algn="ctr">
+              <a:buNone/>
+            </a:pPr>
+            <a:r>
+              <a:rPr lang="en-GB" sz="1500" b="0" dirty="0">
+                <a:latin typeface="Aptos"/>
+                <a:solidFill>
+                  <a:srgbClr val="156082"/>
+                </a:solidFill>
+              </a:rPr>
+              <a:t>15 min talk · 5 min Q&amp;A</a:t>
+            </a:r>
+          </a:p>
+        </p:txBody>
+      </p:sp>
+      <p:sp>
+        <p:nvSpPr>
+          <p:cNvPr id="2" name="Title 1">
+            <a:extLst>
+              <a:ext uri="{FF2B5EF4-FFF2-40B4-BE49-F238E27FC236}">
+                <a16:creationId xmlns:a16="http://schemas.microsoft.com/office/drawing/2014/main" id="{8C7BA404-C596-C471-3B59-87E69A4BB8A7}"/>
+              </a:ext>
+            </a:extLst>
+          </p:cNvPr>
+          <p:cNvSpPr>
+            <a:spLocks noGrp="1"/>
+          </p:cNvSpPr>
+          <p:nvPr>
+            <p:ph type="title"/>
+          </p:nvPr>
+        </p:nvSpPr>
+        <p:spPr/>
+        <p:txBody>
+          <a:bodyPr/>
+          <a:lstStyle/>
+          <a:p>
+            <a:r>
+              <a:rPr sz="2800" b="1">
+                <a:solidFill>
+                  <a:srgbClr val="0E2841"/>
+                </a:solidFill>
+                <a:latin typeface="Aptos Display"/>
+              </a:rPr>
+              <a:t>Agenda</a:t>
+            </a:r>
+            <a:endParaRPr lang="en-GB" err="1"/>
+          </a:p>
+        </p:txBody>
+      </p:sp>
+      <p:sp>
+        <p:nvSpPr>
+          <p:cNvPr id="2" name="Title 1"/>
+          <p:cNvSpPr>
+            <a:spLocks noGrp="1"/>
+          </p:cNvSpPr>
+          <p:nvPr>
+            <p:ph type="title"/>
+          </p:nvPr>
+        </p:nvSpPr>
+        <p:spPr/>
+        <p:txBody>
+          <a:bodyPr/>
+          <a:lstStyle/>
+          <a:p/>
+        </p:txBody>
+      </p:sp>
+      <p:sp>
+        <p:nvSpPr>
+          <p:cNvPr id="3" name="Content Placeholder 2"/>
+          <p:cNvSpPr>
+            <a:spLocks noGrp="1"/>
+          </p:cNvSpPr>
+          <p:nvPr>
+            <p:ph idx="1"/>
+          </p:nvPr>
+        </p:nvSpPr>
+        <p:spPr/>
+        <p:txBody>
+          <a:bodyPr/>
+          <a:lstStyle/>
+          <a:p/>
+        </p:txBody>
+      </p:sp>
+    </p:spTree>
   </p:cSld>
   <p:clrMapOvr>
     <a:masterClrMapping/>

--- a/SABRE_CRANE_SIG_2026.pptx
+++ b/SABRE_CRANE_SIG_2026.pptx
@@ -5783,9 +5783,146 @@
           </a:p>
         </p:txBody>
       </p:sp>
+      <p:sp>
+        <p:nvSpPr>
+          <p:cNvPr id="7" name="TextBox 6"/>
+          <p:cNvSpPr txBox="1"/>
+          <p:nvPr/>
+        </p:nvSpPr>
+        <p:spPr>
+          <a:xfrm>
+            <a:off x="457200" y="1188720"/>
+            <a:ext cx="5303520" cy="2286000"/>
+          </a:xfrm>
+          <a:prstGeom prst="rect">
+            <a:avLst/>
+          </a:prstGeom>
+          <a:noFill/>
+        </p:spPr>
+        <p:txBody>
+          <a:bodyPr wrap="square">
+            <a:spAutoFit/>
+          </a:bodyPr>
+          <a:lstStyle/>
+          <a:p>
+            <a:pPr>
+              <a:buNone/>
+            </a:pPr>
+            <a:r>
+              <a:rPr lang="en-GB" sz="1500" b="1" dirty="0">
+                <a:latin typeface="Aptos"/>
+                <a:solidFill>
+                  <a:srgbClr val="0E2841"/>
+                </a:solidFill>
+              </a:rPr>
+              <a:t>Feature Importance (Behavioural):</a:t>
+            </a:r>
+          </a:p>
+          <a:p>
+            <a:pPr lvl="1">
+              <a:buClr>
+                <a:srgbClr val="E97132"/>
+              </a:buClr>
+              <a:buFont typeface="Arial"/>
+              <a:buChar char="▸"/>
+            </a:pPr>
+            <a:r>
+              <a:rPr lang="en-GB" sz="1400" b="0" dirty="0">
+                <a:latin typeface="Aptos"/>
+              </a:rPr>
+              <a:t>write_entropy_mean: encryption → max entropy</a:t>
+            </a:r>
+          </a:p>
+          <a:p>
+            <a:pPr lvl="1">
+              <a:buClr>
+                <a:srgbClr val="E97132"/>
+              </a:buClr>
+              <a:buFont typeface="Arial"/>
+              <a:buChar char="▸"/>
+            </a:pPr>
+            <a:r>
+              <a:rPr lang="en-GB" sz="1400" b="0" dirty="0">
+                <a:latin typeface="Aptos"/>
+              </a:rPr>
+              <a:t>write_LBA_variance: sequential full-disk writes</a:t>
+            </a:r>
+          </a:p>
+          <a:p>
+            <a:pPr lvl="1">
+              <a:buClr>
+                <a:srgbClr val="E97132"/>
+              </a:buClr>
+              <a:buFont typeface="Arial"/>
+              <a:buChar char="▸"/>
+            </a:pPr>
+            <a:r>
+              <a:rPr lang="en-GB" sz="1400" b="0" dirty="0">
+                <a:latin typeface="Aptos"/>
+              </a:rPr>
+              <a:t>mem_write_GPA_variance: uniform memory spread</a:t>
+            </a:r>
+          </a:p>
+          <a:p>
+            <a:pPr>
+              <a:buNone/>
+            </a:pPr>
+            <a:r>
+              <a:rPr lang="en-GB" sz="400" b="0" dirty="0">
+                <a:latin typeface="Aptos"/>
+              </a:rPr>
+              <a:t/>
+            </a:r>
+          </a:p>
+          <a:p>
+            <a:pPr>
+              <a:buNone/>
+            </a:pPr>
+            <a:r>
+              <a:rPr lang="en-GB" sz="1500" b="1" dirty="0">
+                <a:latin typeface="Aptos"/>
+                <a:solidFill>
+                  <a:srgbClr val="0E2841"/>
+                </a:solidFill>
+              </a:rPr>
+              <a:t>Counterfactual Explanations:</a:t>
+            </a:r>
+          </a:p>
+          <a:p>
+            <a:pPr lvl="1">
+              <a:buClr>
+                <a:srgbClr val="E97132"/>
+              </a:buClr>
+              <a:buFont typeface="Arial"/>
+              <a:buChar char="▸"/>
+            </a:pPr>
+            <a:r>
+              <a:rPr lang="en-GB" sz="1400" b="0" dirty="0">
+                <a:latin typeface="Aptos"/>
+              </a:rPr>
+              <a:t>Minimal L₂ shift flips verdict → analyst sees exactly WHY</a:t>
+            </a:r>
+          </a:p>
+          <a:p>
+            <a:pPr lvl="1">
+              <a:buClr>
+                <a:srgbClr val="E97132"/>
+              </a:buClr>
+              <a:buFont typeface="Arial"/>
+              <a:buChar char="▸"/>
+            </a:pPr>
+            <a:r>
+              <a:rPr lang="en-GB" sz="1400" b="0" dirty="0">
+                <a:latin typeface="Aptos"/>
+              </a:rPr>
+              <a:t>Short distance → near decision boundary → ESCALATE</a:t>
+            </a:r>
+          </a:p>
+        </p:txBody>
+      </p:sp>
       <p:pic>
         <p:nvPicPr>
-          <p:cNvPr id="7" name="Picture 6" descr="Behaviour_feature_importance.png"/>
+          <p:cNvPr id="8" name="Picture 7" descr="Behaviour_feature_importance.png"/>
           <p:cNvPicPr>
             <a:picLocks noChangeAspect="1"/>
           </p:cNvPicPr>
@@ -5799,236 +5936,62 @@
         </p:blipFill>
         <p:spPr>
           <a:xfrm>
-            <a:off x="6217920" y="1188720"/>
-            <a:ext cx="5486400" cy="2743200"/>
+            <a:off x="5852160" y="1143000"/>
+            <a:ext cx="6126480" cy="2377440"/>
           </a:xfrm>
           <a:prstGeom prst="rect">
             <a:avLst/>
           </a:prstGeom>
         </p:spPr>
       </p:pic>
-      <p:sp>
-        <p:nvSpPr>
-          <p:cNvPr id="8" name="TextBox 7"/>
-          <p:cNvSpPr txBox="1"/>
+      <p:pic>
+        <p:nvPicPr>
+          <p:cNvPr id="9" name="Picture 8" descr="Rep_Beh_CFs.png"/>
+          <p:cNvPicPr>
+            <a:picLocks noChangeAspect="1"/>
+          </p:cNvPicPr>
           <p:nvPr/>
-        </p:nvSpPr>
+        </p:nvPicPr>
+        <p:blipFill>
+          <a:blip r:embed="rId3"/>
+          <a:stretch>
+            <a:fillRect/>
+          </a:stretch>
+        </p:blipFill>
         <p:spPr>
           <a:xfrm>
-            <a:off x="548640" y="1188720"/>
-            <a:ext cx="5486400" cy="5303520"/>
+            <a:off x="457200" y="3749039"/>
+            <a:ext cx="5394960" cy="2834640"/>
           </a:xfrm>
           <a:prstGeom prst="rect">
             <a:avLst/>
           </a:prstGeom>
-          <a:noFill/>
         </p:spPr>
-        <p:txBody>
-          <a:bodyPr wrap="square">
-            <a:spAutoFit/>
-          </a:bodyPr>
-          <a:lstStyle/>
-          <a:p>
-            <a:pPr>
-              <a:buNone/>
-            </a:pPr>
-            <a:r>
-              <a:rPr lang="en-GB" sz="1700" b="1" dirty="0">
-                <a:latin typeface="Aptos"/>
-                <a:solidFill>
-                  <a:srgbClr val="0E2841"/>
-                </a:solidFill>
-              </a:rPr>
-              <a:t>Behavioural — Permutation Feature Importance:</a:t>
-            </a:r>
-          </a:p>
-          <a:p>
-            <a:pPr lvl="1">
-              <a:buClr>
-                <a:srgbClr val="E97132"/>
-              </a:buClr>
-              <a:buFont typeface="Arial"/>
-              <a:buChar char="▸"/>
-            </a:pPr>
-            <a:r>
-              <a:rPr lang="en-GB" sz="1600" b="0" dirty="0">
-                <a:latin typeface="Aptos"/>
-              </a:rPr>
-              <a:t>write_entropy_mean: top driver — ransomware encrypts → max entropy</a:t>
-            </a:r>
-          </a:p>
-          <a:p>
-            <a:pPr lvl="1">
-              <a:buClr>
-                <a:srgbClr val="E97132"/>
-              </a:buClr>
-              <a:buFont typeface="Arial"/>
-              <a:buChar char="▸"/>
-            </a:pPr>
-            <a:r>
-              <a:rPr lang="en-GB" sz="1600" b="0" dirty="0">
-                <a:latin typeface="Aptos"/>
-              </a:rPr>
-              <a:t>write_LBA_variance: sequential writes across entire disk</a:t>
-            </a:r>
-          </a:p>
-          <a:p>
-            <a:pPr lvl="1">
-              <a:buClr>
-                <a:srgbClr val="E97132"/>
-              </a:buClr>
-              <a:buFont typeface="Arial"/>
-              <a:buChar char="▸"/>
-            </a:pPr>
-            <a:r>
-              <a:rPr lang="en-GB" sz="1600" b="0" dirty="0">
-                <a:latin typeface="Aptos"/>
-              </a:rPr>
-              <a:t>mem_write_GPA_variance: broad memory pages written uniformly</a:t>
-            </a:r>
-          </a:p>
-          <a:p>
-            <a:pPr>
-              <a:buNone/>
-            </a:pPr>
-            <a:r>
-              <a:rPr lang="en-GB" sz="600" b="0" dirty="0">
-                <a:latin typeface="Aptos"/>
-              </a:rPr>
-              <a:t/>
-            </a:r>
-          </a:p>
-          <a:p>
-            <a:pPr>
-              <a:buNone/>
-            </a:pPr>
-            <a:r>
-              <a:rPr lang="en-GB" sz="1700" b="1" dirty="0">
-                <a:latin typeface="Aptos"/>
-                <a:solidFill>
-                  <a:srgbClr val="0E2841"/>
-                </a:solidFill>
-              </a:rPr>
-              <a:t>Semantic — Counterfactual Diagnostics:</a:t>
-            </a:r>
-          </a:p>
-          <a:p>
-            <a:pPr lvl="1">
-              <a:buClr>
-                <a:srgbClr val="E97132"/>
-              </a:buClr>
-              <a:buFont typeface="Arial"/>
-              <a:buChar char="▸"/>
-            </a:pPr>
-            <a:r>
-              <a:rPr lang="en-GB" sz="1600" b="0" dirty="0">
-                <a:latin typeface="Aptos"/>
-              </a:rPr>
-              <a:t>For borderline PE files: minimal embedding shift to flip verdict</a:t>
-            </a:r>
-          </a:p>
-          <a:p>
-            <a:pPr lvl="1">
-              <a:buClr>
-                <a:srgbClr val="E97132"/>
-              </a:buClr>
-              <a:buFont typeface="Arial"/>
-              <a:buChar char="▸"/>
-            </a:pPr>
-            <a:r>
-              <a:rPr lang="en-GB" sz="1600" b="0" dirty="0">
-                <a:latin typeface="Aptos"/>
-              </a:rPr>
-              <a:t>Short L₂ distance → closer to decision boundary → escalate</a:t>
-            </a:r>
-          </a:p>
-          <a:p>
-            <a:pPr lvl="1">
-              <a:buClr>
-                <a:srgbClr val="E97132"/>
-              </a:buClr>
-              <a:buFont typeface="Arial"/>
-              <a:buChar char="▸"/>
-            </a:pPr>
-            <a:r>
-              <a:rPr lang="en-GB" sz="1600" b="0" dirty="0">
-                <a:latin typeface="Aptos"/>
-              </a:rPr>
-              <a:t>Supports audit: 'why was this file flagged?'</a:t>
-            </a:r>
-          </a:p>
-          <a:p>
-            <a:pPr>
-              <a:buNone/>
-            </a:pPr>
-            <a:r>
-              <a:rPr lang="en-GB" sz="600" b="0" dirty="0">
-                <a:latin typeface="Aptos"/>
-              </a:rPr>
-              <a:t/>
-            </a:r>
-          </a:p>
-          <a:p>
-            <a:pPr>
-              <a:buNone/>
-            </a:pPr>
-            <a:r>
-              <a:rPr lang="en-GB" sz="1700" b="1" dirty="0">
-                <a:latin typeface="Aptos"/>
-                <a:solidFill>
-                  <a:srgbClr val="E97132"/>
-                </a:solidFill>
-              </a:rPr>
-              <a:t>On Reviewer 3's question — current operational practice:</a:t>
-            </a:r>
-          </a:p>
-          <a:p>
-            <a:pPr lvl="1">
-              <a:buClr>
-                <a:srgbClr val="E97132"/>
-              </a:buClr>
-              <a:buFont typeface="Arial"/>
-              <a:buChar char="▸"/>
-            </a:pPr>
-            <a:r>
-              <a:rPr lang="en-GB" sz="1600" b="0" dirty="0">
-                <a:latin typeface="Aptos"/>
-              </a:rPr>
-              <a:t>Antivirus/EDR: threshold-based scores, no principled uncertainty</a:t>
-            </a:r>
-          </a:p>
-          <a:p>
-            <a:pPr lvl="1">
-              <a:buClr>
-                <a:srgbClr val="E97132"/>
-              </a:buClr>
-              <a:buFont typeface="Arial"/>
-              <a:buChar char="▸"/>
-            </a:pPr>
-            <a:r>
-              <a:rPr lang="en-GB" sz="1600" b="0" dirty="0">
-                <a:latin typeface="Aptos"/>
-              </a:rPr>
-              <a:t>SABRE adds: σ as a first-class decision variable + XAI audit trail</a:t>
-            </a:r>
-          </a:p>
-          <a:p>
-            <a:pPr lvl="1">
-              <a:buClr>
-                <a:srgbClr val="E97132"/>
-              </a:buClr>
-              <a:buFont typeface="Arial"/>
-              <a:buChar char="▸"/>
-            </a:pPr>
-            <a:r>
-              <a:rPr lang="en-GB" sz="1600" b="0" dirty="0">
-                <a:latin typeface="Aptos"/>
-              </a:rPr>
-              <a:t>Analyst can see WHY a sample was escalated, not just THAT it was</a:t>
-            </a:r>
-          </a:p>
-        </p:txBody>
-      </p:sp>
+      </p:pic>
+      <p:pic>
+        <p:nvPicPr>
+          <p:cNvPr id="10" name="Picture 9" descr="fig_semantic_cf_p0_vs_l2.png"/>
+          <p:cNvPicPr>
+            <a:picLocks noChangeAspect="1"/>
+          </p:cNvPicPr>
+          <p:nvPr/>
+        </p:nvPicPr>
+        <p:blipFill>
+          <a:blip r:embed="rId4"/>
+          <a:stretch>
+            <a:fillRect/>
+          </a:stretch>
+        </p:blipFill>
+        <p:spPr>
+          <a:xfrm>
+            <a:off x="5852160" y="3749039"/>
+            <a:ext cx="6126480" cy="2834640"/>
+          </a:xfrm>
+          <a:prstGeom prst="rect">
+            <a:avLst/>
+          </a:prstGeom>
+        </p:spPr>
+      </p:pic>
     </p:spTree>
     <p:extLst>
       <p:ext uri="{BB962C8B-B14F-4D97-AF65-F5344CB8AC3E}">

--- a/SABRE_CRANE_SIG_2026.pptx
+++ b/SABRE_CRANE_SIG_2026.pptx
@@ -6,14 +6,16 @@
   </p:sldMasterIdLst>
   <p:sldIdLst>
     <p:sldId id="256" r:id="rId2"/>
-    <p:sldId id="264" r:id="rId15"/>
-    <p:sldId id="257" r:id="rId3"/>
-    <p:sldId id="258" r:id="rId4"/>
-    <p:sldId id="259" r:id="rId5"/>
-    <p:sldId id="260" r:id="rId6"/>
-    <p:sldId id="261" r:id="rId7"/>
-    <p:sldId id="262" r:id="rId8"/>
-    <p:sldId id="263" r:id="rId9"/>
+    <p:sldId id="264" r:id="rId3"/>
+    <p:sldId id="257" r:id="rId4"/>
+    <p:sldId id="258" r:id="rId5"/>
+    <p:sldId id="266" r:id="rId6"/>
+    <p:sldId id="259" r:id="rId7"/>
+    <p:sldId id="260" r:id="rId8"/>
+    <p:sldId id="261" r:id="rId9"/>
+    <p:sldId id="262" r:id="rId10"/>
+    <p:sldId id="265" r:id="rId11"/>
+    <p:sldId id="263" r:id="rId12"/>
   </p:sldIdLst>
   <p:sldSz cx="12192000" cy="6858000"/>
   <p:notesSz cx="6858000" cy="9144000"/>
@@ -118,10 +120,162 @@
 <file path=ppt/revisionInfo.xml><?xml version="1.0" encoding="utf-8"?>
 <p1510:revInfo xmlns:a="http://schemas.openxmlformats.org/drawingml/2006/main" xmlns:r="http://schemas.openxmlformats.org/officeDocument/2006/relationships" xmlns:p1510="http://schemas.microsoft.com/office/powerpoint/2015/10/main">
   <p1510:revLst>
-    <p1510:client id="{7A8633FD-829E-6EE6-348D-BC558A7969B3}" v="94" dt="2026-04-20T19:51:00.457"/>
-    <p1510:client id="{FA1C6F24-4DB0-E024-3A5F-BA8572546F72}" v="515" dt="2026-04-20T19:46:37.535"/>
+    <p1510:client id="{D0AD6F8F-6A21-4643-B76F-46C021B71931}" v="3" dt="2026-06-22T15:36:35.144"/>
   </p1510:revLst>
 </p1510:revInfo>
+</file>
+
+<file path=ppt/changesInfos/changesInfo1.xml><?xml version="1.0" encoding="utf-8"?>
+<pc:chgInfo xmlns:a="http://schemas.openxmlformats.org/drawingml/2006/main" xmlns:r="http://schemas.openxmlformats.org/officeDocument/2006/relationships" xmlns:ac="http://schemas.microsoft.com/office/drawing/2013/main/command" xmlns:pc="http://schemas.microsoft.com/office/powerpoint/2013/main/command">
+  <pc:docChgLst>
+    <pc:chgData name="henry.kabuye" userId="eb11684c-b2f7-47c6-a059-9031b708ef9b" providerId="ADAL" clId="{1DFA72CE-DF62-41DC-8B30-16B405C245CA}"/>
+    <pc:docChg chg="custSel modSld">
+      <pc:chgData name="henry.kabuye" userId="eb11684c-b2f7-47c6-a059-9031b708ef9b" providerId="ADAL" clId="{1DFA72CE-DF62-41DC-8B30-16B405C245CA}" dt="2026-06-22T15:39:15.702" v="170" actId="1038"/>
+      <pc:docMkLst>
+        <pc:docMk/>
+      </pc:docMkLst>
+      <pc:sldChg chg="addSp delSp modSp mod">
+        <pc:chgData name="henry.kabuye" userId="eb11684c-b2f7-47c6-a059-9031b708ef9b" providerId="ADAL" clId="{1DFA72CE-DF62-41DC-8B30-16B405C245CA}" dt="2026-06-22T15:38:02.767" v="159" actId="478"/>
+        <pc:sldMkLst>
+          <pc:docMk/>
+          <pc:sldMk cId="4130658143" sldId="259"/>
+        </pc:sldMkLst>
+        <pc:spChg chg="del">
+          <ac:chgData name="henry.kabuye" userId="eb11684c-b2f7-47c6-a059-9031b708ef9b" providerId="ADAL" clId="{1DFA72CE-DF62-41DC-8B30-16B405C245CA}" dt="2026-06-22T15:37:57.894" v="158" actId="478"/>
+          <ac:spMkLst>
+            <pc:docMk/>
+            <pc:sldMk cId="4130658143" sldId="259"/>
+            <ac:spMk id="3" creationId="{E25347FC-8A5F-8549-D393-1CA94B47F145}"/>
+          </ac:spMkLst>
+        </pc:spChg>
+        <pc:spChg chg="add del mod">
+          <ac:chgData name="henry.kabuye" userId="eb11684c-b2f7-47c6-a059-9031b708ef9b" providerId="ADAL" clId="{1DFA72CE-DF62-41DC-8B30-16B405C245CA}" dt="2026-06-22T15:38:02.767" v="159" actId="478"/>
+          <ac:spMkLst>
+            <pc:docMk/>
+            <pc:sldMk cId="4130658143" sldId="259"/>
+            <ac:spMk id="5" creationId="{BBBB8D72-8974-8C91-23C7-3ABAE9E8CC03}"/>
+          </ac:spMkLst>
+        </pc:spChg>
+        <pc:picChg chg="mod">
+          <ac:chgData name="henry.kabuye" userId="eb11684c-b2f7-47c6-a059-9031b708ef9b" providerId="ADAL" clId="{1DFA72CE-DF62-41DC-8B30-16B405C245CA}" dt="2026-06-22T15:37:48.996" v="157" actId="14100"/>
+          <ac:picMkLst>
+            <pc:docMk/>
+            <pc:sldMk cId="4130658143" sldId="259"/>
+            <ac:picMk id="7" creationId="{00000000-0000-0000-0000-000000000000}"/>
+          </ac:picMkLst>
+        </pc:picChg>
+      </pc:sldChg>
+      <pc:sldChg chg="delSp mod">
+        <pc:chgData name="henry.kabuye" userId="eb11684c-b2f7-47c6-a059-9031b708ef9b" providerId="ADAL" clId="{1DFA72CE-DF62-41DC-8B30-16B405C245CA}" dt="2026-06-22T13:44:32.999" v="0" actId="21"/>
+        <pc:sldMkLst>
+          <pc:docMk/>
+          <pc:sldMk cId="1357055969" sldId="260"/>
+        </pc:sldMkLst>
+        <pc:picChg chg="del">
+          <ac:chgData name="henry.kabuye" userId="eb11684c-b2f7-47c6-a059-9031b708ef9b" providerId="ADAL" clId="{1DFA72CE-DF62-41DC-8B30-16B405C245CA}" dt="2026-06-22T13:44:32.999" v="0" actId="21"/>
+          <ac:picMkLst>
+            <pc:docMk/>
+            <pc:sldMk cId="1357055969" sldId="260"/>
+            <ac:picMk id="6" creationId="{00000000-0000-0000-0000-000000000000}"/>
+          </ac:picMkLst>
+        </pc:picChg>
+      </pc:sldChg>
+      <pc:sldChg chg="addSp modSp mod">
+        <pc:chgData name="henry.kabuye" userId="eb11684c-b2f7-47c6-a059-9031b708ef9b" providerId="ADAL" clId="{1DFA72CE-DF62-41DC-8B30-16B405C245CA}" dt="2026-06-22T15:37:03.537" v="154" actId="1037"/>
+        <pc:sldMkLst>
+          <pc:docMk/>
+          <pc:sldMk cId="3311130298" sldId="261"/>
+        </pc:sldMkLst>
+        <pc:spChg chg="mod">
+          <ac:chgData name="henry.kabuye" userId="eb11684c-b2f7-47c6-a059-9031b708ef9b" providerId="ADAL" clId="{1DFA72CE-DF62-41DC-8B30-16B405C245CA}" dt="2026-06-22T15:35:48.842" v="59" actId="1035"/>
+          <ac:spMkLst>
+            <pc:docMk/>
+            <pc:sldMk cId="3311130298" sldId="261"/>
+            <ac:spMk id="2" creationId="{B3E49C1F-66CE-A3C2-A7FB-A02095B3A1D1}"/>
+          </ac:spMkLst>
+        </pc:spChg>
+        <pc:spChg chg="mod">
+          <ac:chgData name="henry.kabuye" userId="eb11684c-b2f7-47c6-a059-9031b708ef9b" providerId="ADAL" clId="{1DFA72CE-DF62-41DC-8B30-16B405C245CA}" dt="2026-06-22T15:36:11.945" v="123" actId="1038"/>
+          <ac:spMkLst>
+            <pc:docMk/>
+            <pc:sldMk cId="3311130298" sldId="261"/>
+            <ac:spMk id="8" creationId="{00000000-0000-0000-0000-000000000000}"/>
+          </ac:spMkLst>
+        </pc:spChg>
+        <pc:picChg chg="mod">
+          <ac:chgData name="henry.kabuye" userId="eb11684c-b2f7-47c6-a059-9031b708ef9b" providerId="ADAL" clId="{1DFA72CE-DF62-41DC-8B30-16B405C245CA}" dt="2026-06-22T15:35:14.073" v="39" actId="1076"/>
+          <ac:picMkLst>
+            <pc:docMk/>
+            <pc:sldMk cId="3311130298" sldId="261"/>
+            <ac:picMk id="7" creationId="{00000000-0000-0000-0000-000000000000}"/>
+          </ac:picMkLst>
+        </pc:picChg>
+        <pc:picChg chg="add mod">
+          <ac:chgData name="henry.kabuye" userId="eb11684c-b2f7-47c6-a059-9031b708ef9b" providerId="ADAL" clId="{1DFA72CE-DF62-41DC-8B30-16B405C245CA}" dt="2026-06-22T15:35:28.996" v="42" actId="1076"/>
+          <ac:picMkLst>
+            <pc:docMk/>
+            <pc:sldMk cId="3311130298" sldId="261"/>
+            <ac:picMk id="9" creationId="{64BEBB3D-83C1-4FFF-D060-202B242DDA07}"/>
+          </ac:picMkLst>
+        </pc:picChg>
+        <pc:picChg chg="add mod">
+          <ac:chgData name="henry.kabuye" userId="eb11684c-b2f7-47c6-a059-9031b708ef9b" providerId="ADAL" clId="{1DFA72CE-DF62-41DC-8B30-16B405C245CA}" dt="2026-06-22T15:37:03.537" v="154" actId="1037"/>
+          <ac:picMkLst>
+            <pc:docMk/>
+            <pc:sldMk cId="3311130298" sldId="261"/>
+            <ac:picMk id="10" creationId="{482E88EB-45C9-3B74-A55B-9EF69082CF2B}"/>
+          </ac:picMkLst>
+        </pc:picChg>
+        <pc:cxnChg chg="mod">
+          <ac:chgData name="henry.kabuye" userId="eb11684c-b2f7-47c6-a059-9031b708ef9b" providerId="ADAL" clId="{1DFA72CE-DF62-41DC-8B30-16B405C245CA}" dt="2026-06-22T15:35:58.704" v="91" actId="1035"/>
+          <ac:cxnSpMkLst>
+            <pc:docMk/>
+            <pc:sldMk cId="3311130298" sldId="261"/>
+            <ac:cxnSpMk id="4" creationId="{5B64D6CC-6420-9E00-377D-AFF39E392739}"/>
+          </ac:cxnSpMkLst>
+        </pc:cxnChg>
+      </pc:sldChg>
+      <pc:sldChg chg="addSp modSp mod">
+        <pc:chgData name="henry.kabuye" userId="eb11684c-b2f7-47c6-a059-9031b708ef9b" providerId="ADAL" clId="{1DFA72CE-DF62-41DC-8B30-16B405C245CA}" dt="2026-06-22T13:45:44.682" v="8" actId="1076"/>
+        <pc:sldMkLst>
+          <pc:docMk/>
+          <pc:sldMk cId="3182898238" sldId="265"/>
+        </pc:sldMkLst>
+        <pc:picChg chg="mod">
+          <ac:chgData name="henry.kabuye" userId="eb11684c-b2f7-47c6-a059-9031b708ef9b" providerId="ADAL" clId="{1DFA72CE-DF62-41DC-8B30-16B405C245CA}" dt="2026-06-22T13:45:08.762" v="7" actId="1076"/>
+          <ac:picMkLst>
+            <pc:docMk/>
+            <pc:sldMk cId="3182898238" sldId="265"/>
+            <ac:picMk id="5" creationId="{00000000-0000-0000-0000-000000000000}"/>
+          </ac:picMkLst>
+        </pc:picChg>
+        <pc:picChg chg="add mod">
+          <ac:chgData name="henry.kabuye" userId="eb11684c-b2f7-47c6-a059-9031b708ef9b" providerId="ADAL" clId="{1DFA72CE-DF62-41DC-8B30-16B405C245CA}" dt="2026-06-22T13:45:44.682" v="8" actId="1076"/>
+          <ac:picMkLst>
+            <pc:docMk/>
+            <pc:sldMk cId="3182898238" sldId="265"/>
+            <ac:picMk id="6" creationId="{00000000-0000-0000-0000-000000000000}"/>
+          </ac:picMkLst>
+        </pc:picChg>
+      </pc:sldChg>
+      <pc:sldChg chg="modSp mod">
+        <pc:chgData name="henry.kabuye" userId="eb11684c-b2f7-47c6-a059-9031b708ef9b" providerId="ADAL" clId="{1DFA72CE-DF62-41DC-8B30-16B405C245CA}" dt="2026-06-22T15:39:15.702" v="170" actId="1038"/>
+        <pc:sldMkLst>
+          <pc:docMk/>
+          <pc:sldMk cId="1921626863" sldId="266"/>
+        </pc:sldMkLst>
+        <pc:picChg chg="mod">
+          <ac:chgData name="henry.kabuye" userId="eb11684c-b2f7-47c6-a059-9031b708ef9b" providerId="ADAL" clId="{1DFA72CE-DF62-41DC-8B30-16B405C245CA}" dt="2026-06-22T15:39:15.702" v="170" actId="1038"/>
+          <ac:picMkLst>
+            <pc:docMk/>
+            <pc:sldMk cId="1921626863" sldId="266"/>
+            <ac:picMk id="4" creationId="{75DE178C-5A83-9353-F1AF-81CA57AB3D4A}"/>
+          </ac:picMkLst>
+        </pc:picChg>
+      </pc:sldChg>
+    </pc:docChg>
+  </pc:docChgLst>
+</pc:chgInfo>
 </file>
 
 <file path=ppt/slideLayouts/slideLayout1.xml><?xml version="1.0" encoding="utf-8"?>
@@ -271,7 +425,7 @@
           <a:p>
             <a:fld id="{25A91AEE-1648-4863-A003-0E0E8F40C7AE}" type="datetimeFigureOut">
               <a:rPr lang="en-GB" smtClean="0"/>
-              <a:t>21/04/2026</a:t>
+              <a:t>22/06/2026</a:t>
             </a:fld>
             <a:endParaRPr lang="en-GB"/>
           </a:p>
@@ -469,7 +623,7 @@
           <a:p>
             <a:fld id="{25A91AEE-1648-4863-A003-0E0E8F40C7AE}" type="datetimeFigureOut">
               <a:rPr lang="en-GB" smtClean="0"/>
-              <a:t>21/04/2026</a:t>
+              <a:t>22/06/2026</a:t>
             </a:fld>
             <a:endParaRPr lang="en-GB"/>
           </a:p>
@@ -677,7 +831,7 @@
           <a:p>
             <a:fld id="{25A91AEE-1648-4863-A003-0E0E8F40C7AE}" type="datetimeFigureOut">
               <a:rPr lang="en-GB" smtClean="0"/>
-              <a:t>21/04/2026</a:t>
+              <a:t>22/06/2026</a:t>
             </a:fld>
             <a:endParaRPr lang="en-GB"/>
           </a:p>
@@ -875,7 +1029,7 @@
           <a:p>
             <a:fld id="{25A91AEE-1648-4863-A003-0E0E8F40C7AE}" type="datetimeFigureOut">
               <a:rPr lang="en-GB" smtClean="0"/>
-              <a:t>21/04/2026</a:t>
+              <a:t>22/06/2026</a:t>
             </a:fld>
             <a:endParaRPr lang="en-GB"/>
           </a:p>
@@ -1150,7 +1304,7 @@
           <a:p>
             <a:fld id="{25A91AEE-1648-4863-A003-0E0E8F40C7AE}" type="datetimeFigureOut">
               <a:rPr lang="en-GB" smtClean="0"/>
-              <a:t>21/04/2026</a:t>
+              <a:t>22/06/2026</a:t>
             </a:fld>
             <a:endParaRPr lang="en-GB"/>
           </a:p>
@@ -1415,7 +1569,7 @@
           <a:p>
             <a:fld id="{25A91AEE-1648-4863-A003-0E0E8F40C7AE}" type="datetimeFigureOut">
               <a:rPr lang="en-GB" smtClean="0"/>
-              <a:t>21/04/2026</a:t>
+              <a:t>22/06/2026</a:t>
             </a:fld>
             <a:endParaRPr lang="en-GB"/>
           </a:p>
@@ -1827,7 +1981,7 @@
           <a:p>
             <a:fld id="{25A91AEE-1648-4863-A003-0E0E8F40C7AE}" type="datetimeFigureOut">
               <a:rPr lang="en-GB" smtClean="0"/>
-              <a:t>21/04/2026</a:t>
+              <a:t>22/06/2026</a:t>
             </a:fld>
             <a:endParaRPr lang="en-GB"/>
           </a:p>
@@ -1968,7 +2122,7 @@
           <a:p>
             <a:fld id="{25A91AEE-1648-4863-A003-0E0E8F40C7AE}" type="datetimeFigureOut">
               <a:rPr lang="en-GB" smtClean="0"/>
-              <a:t>21/04/2026</a:t>
+              <a:t>22/06/2026</a:t>
             </a:fld>
             <a:endParaRPr lang="en-GB"/>
           </a:p>
@@ -2081,7 +2235,7 @@
           <a:p>
             <a:fld id="{25A91AEE-1648-4863-A003-0E0E8F40C7AE}" type="datetimeFigureOut">
               <a:rPr lang="en-GB" smtClean="0"/>
-              <a:t>21/04/2026</a:t>
+              <a:t>22/06/2026</a:t>
             </a:fld>
             <a:endParaRPr lang="en-GB"/>
           </a:p>
@@ -2392,7 +2546,7 @@
           <a:p>
             <a:fld id="{25A91AEE-1648-4863-A003-0E0E8F40C7AE}" type="datetimeFigureOut">
               <a:rPr lang="en-GB" smtClean="0"/>
-              <a:t>21/04/2026</a:t>
+              <a:t>22/06/2026</a:t>
             </a:fld>
             <a:endParaRPr lang="en-GB"/>
           </a:p>
@@ -2680,7 +2834,7 @@
           <a:p>
             <a:fld id="{25A91AEE-1648-4863-A003-0E0E8F40C7AE}" type="datetimeFigureOut">
               <a:rPr lang="en-GB" smtClean="0"/>
-              <a:t>21/04/2026</a:t>
+              <a:t>22/06/2026</a:t>
             </a:fld>
             <a:endParaRPr lang="en-GB"/>
           </a:p>
@@ -2921,7 +3075,7 @@
           <a:p>
             <a:fld id="{25A91AEE-1648-4863-A003-0E0E8F40C7AE}" type="datetimeFigureOut">
               <a:rPr lang="en-GB" smtClean="0"/>
-              <a:t>21/04/2026</a:t>
+              <a:t>22/06/2026</a:t>
             </a:fld>
             <a:endParaRPr lang="en-GB"/>
           </a:p>
@@ -3533,6 +3687,619 @@
 </p:sld>
 </file>
 
+<file path=ppt/slides/slide10.xml><?xml version="1.0" encoding="utf-8"?>
+<p:sld xmlns:a="http://schemas.openxmlformats.org/drawingml/2006/main" xmlns:r="http://schemas.openxmlformats.org/officeDocument/2006/relationships" xmlns:p="http://schemas.openxmlformats.org/presentationml/2006/main">
+  <p:cSld>
+    <p:spTree>
+      <p:nvGrpSpPr>
+        <p:cNvPr id="1" name=""/>
+        <p:cNvGrpSpPr/>
+        <p:nvPr/>
+      </p:nvGrpSpPr>
+      <p:grpSpPr>
+        <a:xfrm>
+          <a:off x="0" y="0"/>
+          <a:ext cx="0" cy="0"/>
+          <a:chOff x="0" y="0"/>
+          <a:chExt cx="0" cy="0"/>
+        </a:xfrm>
+      </p:grpSpPr>
+      <p:pic>
+        <p:nvPicPr>
+          <p:cNvPr id="5" name="Picture 4" descr="Prop_Agentic_Sabre_27_04_2026_3Agents_Fullpipeline.png"/>
+          <p:cNvPicPr>
+            <a:picLocks noChangeAspect="1"/>
+          </p:cNvPicPr>
+          <p:nvPr/>
+        </p:nvPicPr>
+        <p:blipFill>
+          <a:blip r:embed="rId2"/>
+          <a:stretch>
+            <a:fillRect/>
+          </a:stretch>
+        </p:blipFill>
+        <p:spPr>
+          <a:xfrm>
+            <a:off x="1285195" y="144043"/>
+            <a:ext cx="9992405" cy="4014806"/>
+          </a:xfrm>
+          <a:prstGeom prst="rect">
+            <a:avLst/>
+          </a:prstGeom>
+        </p:spPr>
+      </p:pic>
+      <p:pic>
+        <p:nvPicPr>
+          <p:cNvPr id="6" name="Picture 5" descr="ROC_all_agents.png"/>
+          <p:cNvPicPr>
+            <a:picLocks noChangeAspect="1"/>
+          </p:cNvPicPr>
+          <p:nvPr/>
+        </p:nvPicPr>
+        <p:blipFill>
+          <a:blip r:embed="rId3"/>
+          <a:stretch>
+            <a:fillRect/>
+          </a:stretch>
+        </p:blipFill>
+        <p:spPr>
+          <a:xfrm>
+            <a:off x="4307840" y="4261171"/>
+            <a:ext cx="3029633" cy="2596829"/>
+          </a:xfrm>
+          <a:prstGeom prst="rect">
+            <a:avLst/>
+          </a:prstGeom>
+        </p:spPr>
+      </p:pic>
+    </p:spTree>
+    <p:extLst>
+      <p:ext uri="{BB962C8B-B14F-4D97-AF65-F5344CB8AC3E}">
+        <p14:creationId xmlns:p14="http://schemas.microsoft.com/office/powerpoint/2010/main" val="3182898238"/>
+      </p:ext>
+    </p:extLst>
+  </p:cSld>
+  <p:clrMapOvr>
+    <a:masterClrMapping/>
+  </p:clrMapOvr>
+</p:sld>
+</file>
+
+<file path=ppt/slides/slide11.xml><?xml version="1.0" encoding="utf-8"?>
+<p:sld xmlns:a="http://schemas.openxmlformats.org/drawingml/2006/main" xmlns:r="http://schemas.openxmlformats.org/officeDocument/2006/relationships" xmlns:p="http://schemas.openxmlformats.org/presentationml/2006/main">
+  <p:cSld>
+    <p:spTree>
+      <p:nvGrpSpPr>
+        <p:cNvPr id="1" name=""/>
+        <p:cNvGrpSpPr/>
+        <p:nvPr/>
+      </p:nvGrpSpPr>
+      <p:grpSpPr>
+        <a:xfrm>
+          <a:off x="0" y="0"/>
+          <a:ext cx="0" cy="0"/>
+          <a:chOff x="0" y="0"/>
+          <a:chExt cx="0" cy="0"/>
+        </a:xfrm>
+      </p:grpSpPr>
+      <p:sp>
+        <p:nvSpPr>
+          <p:cNvPr id="2" name="Title 1">
+            <a:extLst>
+              <a:ext uri="{FF2B5EF4-FFF2-40B4-BE49-F238E27FC236}">
+                <a16:creationId xmlns:a16="http://schemas.microsoft.com/office/drawing/2014/main" id="{8678956E-CFF4-0DC3-78D1-CCFA8FD13376}"/>
+              </a:ext>
+            </a:extLst>
+          </p:cNvPr>
+          <p:cNvSpPr>
+            <a:spLocks noGrp="1"/>
+          </p:cNvSpPr>
+          <p:nvPr>
+            <p:ph type="title"/>
+          </p:nvPr>
+        </p:nvSpPr>
+        <p:spPr/>
+        <p:txBody>
+          <a:bodyPr>
+            <a:normAutofit/>
+          </a:bodyPr>
+          <a:lstStyle/>
+          <a:p>
+            <a:r>
+              <a:rPr sz="2800" b="1">
+                <a:solidFill>
+                  <a:srgbClr val="0E2841"/>
+                </a:solidFill>
+                <a:latin typeface="Aptos Display"/>
+              </a:rPr>
+              <a:t>Conclusions</a:t>
+            </a:r>
+            <a:endParaRPr lang="en-GB"/>
+          </a:p>
+        </p:txBody>
+      </p:sp>
+      <p:sp>
+        <p:nvSpPr>
+          <p:cNvPr id="3" name="Content Placeholder 2">
+            <a:extLst>
+              <a:ext uri="{FF2B5EF4-FFF2-40B4-BE49-F238E27FC236}">
+                <a16:creationId xmlns:a16="http://schemas.microsoft.com/office/drawing/2014/main" id="{26D07290-1A10-9B48-B272-9FBE0AD24910}"/>
+              </a:ext>
+            </a:extLst>
+          </p:cNvPr>
+          <p:cNvSpPr>
+            <a:spLocks noGrp="1"/>
+          </p:cNvSpPr>
+          <p:nvPr>
+            <p:ph idx="1"/>
+          </p:nvPr>
+        </p:nvSpPr>
+        <p:spPr/>
+        <p:txBody>
+          <a:bodyPr vert="horz" lIns="91440" tIns="45720" rIns="91440" bIns="45720" rtlCol="0" anchor="t">
+            <a:normAutofit fontScale="92500" lnSpcReduction="10000"/>
+          </a:bodyPr>
+          <a:lstStyle/>
+          <a:p>
+            <a:pPr>
+              <a:spcAft>
+                <a:spcPts val="200"/>
+              </a:spcAft>
+              <a:buNone/>
+            </a:pPr>
+            <a:r>
+              <a:rPr lang="en-GB" sz="1900" b="1" dirty="0">
+                <a:latin typeface="Aptos"/>
+              </a:rPr>
+              <a:t>SABRE makes uncertainty operational — not merely descriptive</a:t>
+            </a:r>
+          </a:p>
+          <a:p>
+            <a:pPr>
+              <a:buNone/>
+            </a:pPr>
+            <a:endParaRPr lang="en-GB" sz="1900" b="1" dirty="0">
+              <a:latin typeface="Aptos"/>
+            </a:endParaRPr>
+          </a:p>
+          <a:p>
+            <a:pPr lvl="1">
+              <a:buClr>
+                <a:srgbClr val="E97132"/>
+              </a:buClr>
+              <a:buFont typeface="Arial"/>
+              <a:buChar char="▸"/>
+            </a:pPr>
+            <a:r>
+              <a:rPr lang="en-GB" sz="1700" b="0" dirty="0">
+                <a:latin typeface="Aptos"/>
+              </a:rPr>
+              <a:t>Triage converts (p̂, σ) → actionable decision: automate vs escalate vs allow</a:t>
+            </a:r>
+          </a:p>
+          <a:p>
+            <a:pPr lvl="1">
+              <a:buClr>
+                <a:srgbClr val="E97132"/>
+              </a:buClr>
+              <a:buFont typeface="Arial"/>
+              <a:buChar char="▸"/>
+            </a:pPr>
+            <a:r>
+              <a:rPr lang="en-GB" sz="1700" b="0" dirty="0">
+                <a:latin typeface="Aptos"/>
+              </a:rPr>
+              <a:t>Uncertainty correctly identifies hardest cases: novel families, concurrent execution</a:t>
+            </a:r>
+          </a:p>
+          <a:p>
+            <a:pPr lvl="1">
+              <a:buClr>
+                <a:srgbClr val="E97132"/>
+              </a:buClr>
+              <a:buFont typeface="Arial"/>
+              <a:buChar char="▸"/>
+            </a:pPr>
+            <a:r>
+              <a:rPr lang="en-GB" sz="1700" b="0" dirty="0">
+                <a:latin typeface="Aptos"/>
+              </a:rPr>
+              <a:t>XAI (feature importance, counterfactuals) supports analyst audit</a:t>
+            </a:r>
+          </a:p>
+          <a:p>
+            <a:pPr lvl="1">
+              <a:buClr>
+                <a:srgbClr val="E97132"/>
+              </a:buClr>
+              <a:buFont typeface="Arial"/>
+              <a:buChar char="▸"/>
+            </a:pPr>
+            <a:r>
+              <a:rPr lang="en-GB" sz="1700" b="0" dirty="0">
+                <a:latin typeface="Aptos"/>
+              </a:rPr>
+              <a:t>SABRE-II: learned fusion + Bayesian policy reduces unnecessary escalation by 70%</a:t>
+            </a:r>
+          </a:p>
+          <a:p>
+            <a:pPr>
+              <a:buNone/>
+            </a:pPr>
+            <a:endParaRPr lang="en-GB" sz="1700" b="0" dirty="0">
+              <a:latin typeface="Aptos"/>
+            </a:endParaRPr>
+          </a:p>
+          <a:p>
+            <a:pPr>
+              <a:buNone/>
+            </a:pPr>
+            <a:r>
+              <a:rPr lang="en-GB" sz="1700" b="1" dirty="0">
+                <a:latin typeface="Aptos"/>
+              </a:rPr>
+              <a:t>Publications:</a:t>
+            </a:r>
+          </a:p>
+          <a:p>
+            <a:pPr lvl="1">
+              <a:buClr>
+                <a:srgbClr val="E97132"/>
+              </a:buClr>
+              <a:buFont typeface="Arial"/>
+              <a:buChar char="▸"/>
+            </a:pPr>
+            <a:r>
+              <a:rPr lang="en-GB" sz="1600" b="0" dirty="0">
+                <a:latin typeface="Aptos"/>
+              </a:rPr>
+              <a:t>ESWA (Expert Systems With Applications) — under review, 2nd revision</a:t>
+            </a:r>
+          </a:p>
+          <a:p>
+            <a:pPr lvl="1">
+              <a:buClr>
+                <a:srgbClr val="E97132"/>
+              </a:buClr>
+              <a:buFont typeface="Arial"/>
+              <a:buChar char="▸"/>
+            </a:pPr>
+            <a:r>
+              <a:rPr lang="en-GB" sz="1600" b="0" dirty="0">
+                <a:latin typeface="Aptos"/>
+              </a:rPr>
+              <a:t>IEEE TIFS — SABRE+ submitted; SABRE-II in preparation</a:t>
+            </a:r>
+          </a:p>
+          <a:p>
+            <a:pPr>
+              <a:buNone/>
+            </a:pPr>
+            <a:endParaRPr lang="en-GB" sz="1600" b="0" dirty="0">
+              <a:latin typeface="Aptos"/>
+            </a:endParaRPr>
+          </a:p>
+          <a:p>
+            <a:pPr>
+              <a:buNone/>
+            </a:pPr>
+            <a:r>
+              <a:rPr lang="en-GB" sz="1600" b="1" dirty="0">
+                <a:latin typeface="Aptos"/>
+              </a:rPr>
+              <a:t>Questions welcome on:</a:t>
+            </a:r>
+          </a:p>
+          <a:p>
+            <a:pPr lvl="1">
+              <a:buClr>
+                <a:srgbClr val="E97132"/>
+              </a:buClr>
+              <a:buFont typeface="Arial"/>
+              <a:buChar char="▸"/>
+            </a:pPr>
+            <a:r>
+              <a:rPr lang="en-GB" sz="1500" b="0" dirty="0">
+                <a:latin typeface="Aptos"/>
+              </a:rPr>
+              <a:t>Triage threshold design and cost-sensitivity</a:t>
+            </a:r>
+          </a:p>
+          <a:p>
+            <a:pPr lvl="1">
+              <a:buClr>
+                <a:srgbClr val="E97132"/>
+              </a:buClr>
+              <a:buFont typeface="Arial"/>
+              <a:buChar char="▸"/>
+            </a:pPr>
+            <a:r>
+              <a:rPr lang="en-GB" sz="1500" b="0" dirty="0">
+                <a:latin typeface="Aptos"/>
+              </a:rPr>
+              <a:t>Generalisation to unseen ransomware families (family holdout results)</a:t>
+            </a:r>
+          </a:p>
+          <a:p>
+            <a:pPr lvl="1">
+              <a:buClr>
+                <a:srgbClr val="E97132"/>
+              </a:buClr>
+              <a:buFont typeface="Arial"/>
+              <a:buChar char="▸"/>
+            </a:pPr>
+            <a:r>
+              <a:rPr lang="en-GB" sz="1500" b="0" dirty="0">
+                <a:latin typeface="Aptos"/>
+              </a:rPr>
+              <a:t>Comparison with operational EDR/AV uncertainty practices</a:t>
+            </a:r>
+          </a:p>
+        </p:txBody>
+      </p:sp>
+      <p:cxnSp>
+        <p:nvCxnSpPr>
+          <p:cNvPr id="4" name="Straight Connector 3">
+            <a:extLst>
+              <a:ext uri="{FF2B5EF4-FFF2-40B4-BE49-F238E27FC236}">
+                <a16:creationId xmlns:a16="http://schemas.microsoft.com/office/drawing/2014/main" id="{72342D31-2E0B-0EB4-FF9C-60730B50339B}"/>
+              </a:ext>
+            </a:extLst>
+          </p:cNvPr>
+          <p:cNvCxnSpPr/>
+          <p:nvPr/>
+        </p:nvCxnSpPr>
+        <p:spPr>
+          <a:xfrm>
+            <a:off x="196788" y="1364942"/>
+            <a:ext cx="11798423" cy="0"/>
+          </a:xfrm>
+          <a:prstGeom prst="line">
+            <a:avLst/>
+          </a:prstGeom>
+        </p:spPr>
+        <p:style>
+          <a:lnRef idx="2">
+            <a:schemeClr val="accent1"/>
+          </a:lnRef>
+          <a:fillRef idx="0">
+            <a:schemeClr val="accent1"/>
+          </a:fillRef>
+          <a:effectRef idx="1">
+            <a:schemeClr val="accent1"/>
+          </a:effectRef>
+          <a:fontRef idx="minor">
+            <a:schemeClr val="tx1"/>
+          </a:fontRef>
+        </p:style>
+      </p:cxnSp>
+      <p:sp>
+        <p:nvSpPr>
+          <p:cNvPr id="9" name="Text Placeholder 3">
+            <a:extLst>
+              <a:ext uri="{FF2B5EF4-FFF2-40B4-BE49-F238E27FC236}">
+                <a16:creationId xmlns:a16="http://schemas.microsoft.com/office/drawing/2014/main" id="{01978E70-3595-504B-8650-4404453B4ACB}"/>
+              </a:ext>
+            </a:extLst>
+          </p:cNvPr>
+          <p:cNvSpPr>
+            <a:spLocks noGrp="1"/>
+          </p:cNvSpPr>
+          <p:nvPr/>
+        </p:nvSpPr>
+        <p:spPr>
+          <a:xfrm>
+            <a:off x="383109" y="1577615"/>
+            <a:ext cx="11425462" cy="4857744"/>
+          </a:xfrm>
+          <a:prstGeom prst="rect">
+            <a:avLst/>
+          </a:prstGeom>
+        </p:spPr>
+        <p:txBody>
+          <a:bodyPr vert="horz" lIns="0" tIns="0" rIns="0" bIns="0" rtlCol="0" anchor="t">
+            <a:noAutofit/>
+          </a:bodyPr>
+          <a:lstStyle>
+            <a:lvl1pPr marL="0" indent="0" algn="l" defTabSz="914377" rtl="0" eaLnBrk="1" latinLnBrk="0" hangingPunct="1">
+              <a:lnSpc>
+                <a:spcPts val="2400"/>
+              </a:lnSpc>
+              <a:spcBef>
+                <a:spcPts val="0"/>
+              </a:spcBef>
+              <a:spcAft>
+                <a:spcPts val="1200"/>
+              </a:spcAft>
+              <a:buFont typeface="Arial" panose="020B0604020202020204" pitchFamily="34" charset="0"/>
+              <a:buNone/>
+              <a:defRPr sz="2000" kern="1200">
+                <a:solidFill>
+                  <a:srgbClr val="000000"/>
+                </a:solidFill>
+                <a:latin typeface="+mn-lt"/>
+                <a:ea typeface="+mn-ea"/>
+                <a:cs typeface="+mn-cs"/>
+              </a:defRPr>
+            </a:lvl1pPr>
+            <a:lvl2pPr marL="360000" indent="-180000" algn="l" defTabSz="914377" rtl="0" eaLnBrk="1" latinLnBrk="0" hangingPunct="1">
+              <a:lnSpc>
+                <a:spcPct val="100000"/>
+              </a:lnSpc>
+              <a:spcBef>
+                <a:spcPts val="0"/>
+              </a:spcBef>
+              <a:buFont typeface="Arial" panose="020B0604020202020204" pitchFamily="34" charset="0"/>
+              <a:buNone/>
+              <a:defRPr sz="1800" kern="1200">
+                <a:solidFill>
+                  <a:srgbClr val="000000"/>
+                </a:solidFill>
+                <a:latin typeface="+mn-lt"/>
+                <a:ea typeface="+mn-ea"/>
+                <a:cs typeface="+mn-cs"/>
+              </a:defRPr>
+            </a:lvl2pPr>
+            <a:lvl3pPr marL="540000" indent="-180000" algn="l" defTabSz="914377" rtl="0" eaLnBrk="1" latinLnBrk="0" hangingPunct="1">
+              <a:lnSpc>
+                <a:spcPct val="100000"/>
+              </a:lnSpc>
+              <a:spcBef>
+                <a:spcPts val="0"/>
+              </a:spcBef>
+              <a:buFont typeface="Arial" panose="020B0604020202020204" pitchFamily="34" charset="0"/>
+              <a:buChar char="•"/>
+              <a:defRPr sz="1600" kern="1200">
+                <a:solidFill>
+                  <a:srgbClr val="000000"/>
+                </a:solidFill>
+                <a:latin typeface="+mn-lt"/>
+                <a:ea typeface="+mn-ea"/>
+                <a:cs typeface="+mn-cs"/>
+              </a:defRPr>
+            </a:lvl3pPr>
+            <a:lvl4pPr marL="720000" indent="-180000" algn="l" defTabSz="914377" rtl="0" eaLnBrk="1" latinLnBrk="0" hangingPunct="1">
+              <a:lnSpc>
+                <a:spcPct val="100000"/>
+              </a:lnSpc>
+              <a:spcBef>
+                <a:spcPts val="0"/>
+              </a:spcBef>
+              <a:buFont typeface="Arial" panose="020B0604020202020204" pitchFamily="34" charset="0"/>
+              <a:buChar char="•"/>
+              <a:defRPr sz="1400" kern="1200">
+                <a:solidFill>
+                  <a:srgbClr val="000000"/>
+                </a:solidFill>
+                <a:latin typeface="+mn-lt"/>
+                <a:ea typeface="+mn-ea"/>
+                <a:cs typeface="+mn-cs"/>
+              </a:defRPr>
+            </a:lvl4pPr>
+            <a:lvl5pPr marL="900000" indent="-180000" algn="l" defTabSz="914377" rtl="0" eaLnBrk="1" latinLnBrk="0" hangingPunct="1">
+              <a:lnSpc>
+                <a:spcPct val="100000"/>
+              </a:lnSpc>
+              <a:spcBef>
+                <a:spcPts val="0"/>
+              </a:spcBef>
+              <a:buFont typeface="Arial" panose="020B0604020202020204" pitchFamily="34" charset="0"/>
+              <a:buChar char="•"/>
+              <a:defRPr sz="1400" kern="1200">
+                <a:solidFill>
+                  <a:srgbClr val="000000"/>
+                </a:solidFill>
+                <a:latin typeface="+mn-lt"/>
+                <a:ea typeface="+mn-ea"/>
+                <a:cs typeface="+mn-cs"/>
+              </a:defRPr>
+            </a:lvl5pPr>
+            <a:lvl6pPr marL="2514537" indent="-228594" algn="l" defTabSz="914377" rtl="0" eaLnBrk="1" latinLnBrk="0" hangingPunct="1">
+              <a:lnSpc>
+                <a:spcPct val="90000"/>
+              </a:lnSpc>
+              <a:spcBef>
+                <a:spcPts val="500"/>
+              </a:spcBef>
+              <a:buFont typeface="Arial" panose="020B0604020202020204" pitchFamily="34" charset="0"/>
+              <a:buChar char="•"/>
+              <a:defRPr sz="1800" kern="1200">
+                <a:solidFill>
+                  <a:schemeClr val="tx1"/>
+                </a:solidFill>
+                <a:latin typeface="+mn-lt"/>
+                <a:ea typeface="+mn-ea"/>
+                <a:cs typeface="+mn-cs"/>
+              </a:defRPr>
+            </a:lvl6pPr>
+            <a:lvl7pPr marL="2971726" indent="-228594" algn="l" defTabSz="914377" rtl="0" eaLnBrk="1" latinLnBrk="0" hangingPunct="1">
+              <a:lnSpc>
+                <a:spcPct val="90000"/>
+              </a:lnSpc>
+              <a:spcBef>
+                <a:spcPts val="500"/>
+              </a:spcBef>
+              <a:buFont typeface="Arial" panose="020B0604020202020204" pitchFamily="34" charset="0"/>
+              <a:buChar char="•"/>
+              <a:defRPr sz="1800" kern="1200">
+                <a:solidFill>
+                  <a:schemeClr val="tx1"/>
+                </a:solidFill>
+                <a:latin typeface="+mn-lt"/>
+                <a:ea typeface="+mn-ea"/>
+                <a:cs typeface="+mn-cs"/>
+              </a:defRPr>
+            </a:lvl7pPr>
+            <a:lvl8pPr marL="3428914" indent="-228594" algn="l" defTabSz="914377" rtl="0" eaLnBrk="1" latinLnBrk="0" hangingPunct="1">
+              <a:lnSpc>
+                <a:spcPct val="90000"/>
+              </a:lnSpc>
+              <a:spcBef>
+                <a:spcPts val="500"/>
+              </a:spcBef>
+              <a:buFont typeface="Arial" panose="020B0604020202020204" pitchFamily="34" charset="0"/>
+              <a:buChar char="•"/>
+              <a:defRPr sz="1800" kern="1200">
+                <a:solidFill>
+                  <a:schemeClr val="tx1"/>
+                </a:solidFill>
+                <a:latin typeface="+mn-lt"/>
+                <a:ea typeface="+mn-ea"/>
+                <a:cs typeface="+mn-cs"/>
+              </a:defRPr>
+            </a:lvl8pPr>
+            <a:lvl9pPr marL="3886103" indent="-228594" algn="l" defTabSz="914377" rtl="0" eaLnBrk="1" latinLnBrk="0" hangingPunct="1">
+              <a:lnSpc>
+                <a:spcPct val="90000"/>
+              </a:lnSpc>
+              <a:spcBef>
+                <a:spcPts val="500"/>
+              </a:spcBef>
+              <a:buFont typeface="Arial" panose="020B0604020202020204" pitchFamily="34" charset="0"/>
+              <a:buChar char="•"/>
+              <a:defRPr sz="1800" kern="1200">
+                <a:solidFill>
+                  <a:schemeClr val="tx1"/>
+                </a:solidFill>
+                <a:latin typeface="+mn-lt"/>
+                <a:ea typeface="+mn-ea"/>
+                <a:cs typeface="+mn-cs"/>
+              </a:defRPr>
+            </a:lvl9pPr>
+          </a:lstStyle>
+          <a:p>
+            <a:pPr marL="342900" indent="-342900">
+              <a:lnSpc>
+                <a:spcPct val="100000"/>
+              </a:lnSpc>
+              <a:spcBef>
+                <a:spcPts val="1200"/>
+              </a:spcBef>
+              <a:spcAft>
+                <a:spcPts val="600"/>
+              </a:spcAft>
+              <a:buFont typeface="Wingdings" panose="05000000000000000000" pitchFamily="2" charset="2"/>
+              <a:buChar char="q"/>
+            </a:pPr>
+            <a:endParaRPr lang="en-IN" sz="2800">
+              <a:latin typeface="Candara" panose="020E0502030303020204" pitchFamily="34" charset="0"/>
+            </a:endParaRPr>
+          </a:p>
+        </p:txBody>
+      </p:sp>
+    </p:spTree>
+    <p:extLst>
+      <p:ext uri="{BB962C8B-B14F-4D97-AF65-F5344CB8AC3E}">
+        <p14:creationId xmlns:p14="http://schemas.microsoft.com/office/powerpoint/2010/main" val="1970056675"/>
+      </p:ext>
+    </p:extLst>
+  </p:cSld>
+  <p:clrMapOvr>
+    <a:masterClrMapping/>
+  </p:clrMapOvr>
+</p:sld>
+</file>
+
 <file path=ppt/slides/slide2.xml><?xml version="1.0" encoding="utf-8"?>
 <p:sld xmlns:a="http://schemas.openxmlformats.org/drawingml/2006/main" xmlns:r="http://schemas.openxmlformats.org/officeDocument/2006/relationships" xmlns:p="http://schemas.openxmlformats.org/presentationml/2006/main">
   <p:cSld>
@@ -3550,40 +4317,42 @@
           <a:chExt cx="0" cy="0"/>
         </a:xfrm>
       </p:grpSpPr>
-      <p:sp>
-        <p:nvSpPr>
-          <p:cNvPr id="2" name="Title 1">
-            <a:extLst>
-              <a:ext uri="{FF2B5EF4-FFF2-40B4-BE49-F238E27FC236}">
-                <a16:creationId xmlns:a16="http://schemas.microsoft.com/office/drawing/2014/main" id="{8C7BA404-C596-C471-3B59-87E69A4BB8A7}"/>
-              </a:ext>
-            </a:extLst>
-          </p:cNvPr>
-          <p:cNvSpPr>
-            <a:spLocks noGrp="1"/>
-          </p:cNvSpPr>
-          <p:nvPr>
-            <p:ph type="title"/>
-          </p:nvPr>
-        </p:nvSpPr>
-        <p:spPr/>
-        <p:txBody>
-          <a:bodyPr/>
-          <a:lstStyle/>
-          <a:p>
-            <a:r>
-              <a:rPr sz="2800" b="1">
-                <a:solidFill>
-                  <a:srgbClr val="0E2841"/>
-                </a:solidFill>
-                <a:latin typeface="Aptos Display"/>
-              </a:rPr>
-              <a:t>Ransomware Defence Is a Decision Problem</a:t>
-            </a:r>
-            <a:endParaRPr lang="en-GB" err="1"/>
-          </a:p>
-        </p:txBody>
-      </p:sp>
+      <p:cxnSp>
+        <p:nvCxnSpPr>
+          <p:cNvPr id="4" name="Straight Connector 3">
+            <a:extLst>
+              <a:ext uri="{FF2B5EF4-FFF2-40B4-BE49-F238E27FC236}">
+                <a16:creationId xmlns:a16="http://schemas.microsoft.com/office/drawing/2014/main" id="{F04E40D7-BE15-03B3-6F32-D4894228A3A0}"/>
+              </a:ext>
+            </a:extLst>
+          </p:cNvPr>
+          <p:cNvCxnSpPr/>
+          <p:nvPr/>
+        </p:nvCxnSpPr>
+        <p:spPr>
+          <a:xfrm>
+            <a:off x="196788" y="1364942"/>
+            <a:ext cx="11798423" cy="0"/>
+          </a:xfrm>
+          <a:prstGeom prst="line">
+            <a:avLst/>
+          </a:prstGeom>
+        </p:spPr>
+        <p:style>
+          <a:lnRef idx="2">
+            <a:schemeClr val="accent1"/>
+          </a:lnRef>
+          <a:fillRef idx="0">
+            <a:schemeClr val="accent1"/>
+          </a:fillRef>
+          <a:effectRef idx="1">
+            <a:schemeClr val="accent1"/>
+          </a:effectRef>
+          <a:fontRef idx="minor">
+            <a:schemeClr val="tx1"/>
+          </a:fontRef>
+        </p:style>
+      </p:cxnSp>
       <p:sp>
         <p:nvSpPr>
           <p:cNvPr id="3" name="Content Placeholder 2">
@@ -3600,22 +4369,286 @@
             <p:ph idx="1"/>
           </p:nvPr>
         </p:nvSpPr>
-        <p:spPr/>
+        <p:spPr>
+          <a:xfrm>
+            <a:off x="838200" y="1825625"/>
+            <a:ext cx="10515600" cy="3434633"/>
+          </a:xfrm>
+        </p:spPr>
         <p:txBody>
           <a:bodyPr vert="horz" lIns="91440" tIns="45720" rIns="91440" bIns="45720" rtlCol="0" anchor="t">
             <a:normAutofit/>
           </a:bodyPr>
           <a:lstStyle/>
           <a:p>
+            <a:pPr lvl="1">
+              <a:spcBef>
+                <a:spcPts val="400"/>
+              </a:spcBef>
+              <a:buClr>
+                <a:srgbClr val="E97132"/>
+              </a:buClr>
+              <a:buFont typeface="Arial"/>
+              <a:buChar char="▸"/>
+            </a:pPr>
+            <a:r>
+              <a:rPr lang="en-GB" sz="1800" b="0" dirty="0">
+                <a:latin typeface="Aptos"/>
+              </a:rPr>
+              <a:t>The Problem — why binary detection fails in practice</a:t>
+            </a:r>
+          </a:p>
+          <a:p>
+            <a:pPr lvl="1">
+              <a:spcBef>
+                <a:spcPts val="400"/>
+              </a:spcBef>
+              <a:buClr>
+                <a:srgbClr val="E97132"/>
+              </a:buClr>
+              <a:buFont typeface="Arial"/>
+              <a:buChar char="▸"/>
+            </a:pPr>
+            <a:r>
+              <a:rPr lang="en-GB" sz="1800" b="0" dirty="0">
+                <a:latin typeface="Aptos"/>
+              </a:rPr>
+              <a:t>SABRE Architecture — two complementary detection agents</a:t>
+            </a:r>
+          </a:p>
+          <a:p>
+            <a:pPr lvl="1">
+              <a:spcBef>
+                <a:spcPts val="400"/>
+              </a:spcBef>
+              <a:buClr>
+                <a:srgbClr val="E97132"/>
+              </a:buClr>
+              <a:buFont typeface="Arial"/>
+              <a:buChar char="▸"/>
+            </a:pPr>
+            <a:r>
+              <a:rPr lang="en-GB" sz="1800" b="0" dirty="0">
+                <a:latin typeface="Aptos"/>
+              </a:rPr>
+              <a:t>Triage Policy — operationalising uncertainty as a control variable</a:t>
+            </a:r>
+          </a:p>
+          <a:p>
+            <a:pPr lvl="1">
+              <a:spcBef>
+                <a:spcPts val="400"/>
+              </a:spcBef>
+              <a:buClr>
+                <a:srgbClr val="E97132"/>
+              </a:buClr>
+              <a:buFont typeface="Arial"/>
+              <a:buChar char="▸"/>
+            </a:pPr>
+            <a:r>
+              <a:rPr lang="en-GB" sz="1800" b="0" dirty="0">
+                <a:latin typeface="Aptos"/>
+              </a:rPr>
+              <a:t>Results — where SABRE works and where it struggles</a:t>
+            </a:r>
+          </a:p>
+          <a:p>
+            <a:pPr lvl="1">
+              <a:spcBef>
+                <a:spcPts val="400"/>
+              </a:spcBef>
+              <a:buClr>
+                <a:srgbClr val="E97132"/>
+              </a:buClr>
+              <a:buFont typeface="Arial"/>
+              <a:buChar char="▸"/>
+            </a:pPr>
+            <a:r>
+              <a:rPr lang="en-GB" sz="1800" b="0" dirty="0">
+                <a:latin typeface="Aptos"/>
+              </a:rPr>
+              <a:t>Explainability — making decisions auditable</a:t>
+            </a:r>
+          </a:p>
+          <a:p>
+            <a:pPr lvl="1">
+              <a:spcBef>
+                <a:spcPts val="400"/>
+              </a:spcBef>
+              <a:buClr>
+                <a:srgbClr val="E97132"/>
+              </a:buClr>
+              <a:buFont typeface="Arial"/>
+              <a:buChar char="▸"/>
+            </a:pPr>
+            <a:r>
+              <a:rPr lang="en-GB" sz="1800" b="0" dirty="0">
+                <a:latin typeface="Aptos"/>
+              </a:rPr>
+              <a:t>SABRE-II — learned fusion and Bayesian policy optimisation</a:t>
+            </a:r>
+          </a:p>
+          <a:p>
+            <a:pPr lvl="1">
+              <a:spcBef>
+                <a:spcPts val="400"/>
+              </a:spcBef>
+              <a:buClr>
+                <a:srgbClr val="E97132"/>
+              </a:buClr>
+              <a:buFont typeface="Arial"/>
+              <a:buChar char="▸"/>
+            </a:pPr>
+            <a:r>
+              <a:rPr lang="en-GB" sz="1800" b="0" dirty="0">
+                <a:latin typeface="Aptos"/>
+              </a:rPr>
+              <a:t>Conclusions &amp; Discussion</a:t>
+            </a:r>
+          </a:p>
+          <a:p>
             <a:pPr>
               <a:buNone/>
             </a:pPr>
+            <a:endParaRPr lang="en-GB" sz="1800" b="0" dirty="0">
+              <a:latin typeface="Aptos"/>
+            </a:endParaRPr>
+          </a:p>
+          <a:p>
+            <a:pPr algn="ctr">
+              <a:buNone/>
+            </a:pPr>
+            <a:r>
+              <a:rPr lang="en-GB" sz="1500" b="0" dirty="0">
+                <a:latin typeface="Aptos"/>
+              </a:rPr>
+              <a:t>15 min talk · 5 min Q&amp;A</a:t>
+            </a:r>
+          </a:p>
+        </p:txBody>
+      </p:sp>
+      <p:sp>
+        <p:nvSpPr>
+          <p:cNvPr id="2" name="Title 1">
+            <a:extLst>
+              <a:ext uri="{FF2B5EF4-FFF2-40B4-BE49-F238E27FC236}">
+                <a16:creationId xmlns:a16="http://schemas.microsoft.com/office/drawing/2014/main" id="{8C7BA404-C596-C471-3B59-87E69A4BB8A7}"/>
+              </a:ext>
+            </a:extLst>
+          </p:cNvPr>
+          <p:cNvSpPr>
+            <a:spLocks noGrp="1"/>
+          </p:cNvSpPr>
+          <p:nvPr>
+            <p:ph type="title"/>
+          </p:nvPr>
+        </p:nvSpPr>
+        <p:spPr/>
+        <p:txBody>
+          <a:bodyPr/>
+          <a:lstStyle/>
+          <a:p>
+            <a:r>
+              <a:rPr sz="2800" b="1">
+                <a:solidFill>
+                  <a:srgbClr val="0E2841"/>
+                </a:solidFill>
+                <a:latin typeface="Aptos Display"/>
+              </a:rPr>
+              <a:t>Agenda</a:t>
+            </a:r>
+            <a:endParaRPr lang="en-GB" err="1"/>
+          </a:p>
+        </p:txBody>
+      </p:sp>
+    </p:spTree>
+  </p:cSld>
+  <p:clrMapOvr>
+    <a:masterClrMapping/>
+  </p:clrMapOvr>
+</p:sld>
+</file>
+
+<file path=ppt/slides/slide3.xml><?xml version="1.0" encoding="utf-8"?>
+<p:sld xmlns:a="http://schemas.openxmlformats.org/drawingml/2006/main" xmlns:r="http://schemas.openxmlformats.org/officeDocument/2006/relationships" xmlns:p="http://schemas.openxmlformats.org/presentationml/2006/main">
+  <p:cSld>
+    <p:spTree>
+      <p:nvGrpSpPr>
+        <p:cNvPr id="1" name=""/>
+        <p:cNvGrpSpPr/>
+        <p:nvPr/>
+      </p:nvGrpSpPr>
+      <p:grpSpPr>
+        <a:xfrm>
+          <a:off x="0" y="0"/>
+          <a:ext cx="0" cy="0"/>
+          <a:chOff x="0" y="0"/>
+          <a:chExt cx="0" cy="0"/>
+        </a:xfrm>
+      </p:grpSpPr>
+      <p:sp>
+        <p:nvSpPr>
+          <p:cNvPr id="2" name="Title 1">
+            <a:extLst>
+              <a:ext uri="{FF2B5EF4-FFF2-40B4-BE49-F238E27FC236}">
+                <a16:creationId xmlns:a16="http://schemas.microsoft.com/office/drawing/2014/main" id="{8C7BA404-C596-C471-3B59-87E69A4BB8A7}"/>
+              </a:ext>
+            </a:extLst>
+          </p:cNvPr>
+          <p:cNvSpPr>
+            <a:spLocks noGrp="1"/>
+          </p:cNvSpPr>
+          <p:nvPr>
+            <p:ph type="title"/>
+          </p:nvPr>
+        </p:nvSpPr>
+        <p:spPr/>
+        <p:txBody>
+          <a:bodyPr/>
+          <a:lstStyle/>
+          <a:p>
+            <a:r>
+              <a:rPr sz="2800" b="1">
+                <a:solidFill>
+                  <a:srgbClr val="0E2841"/>
+                </a:solidFill>
+                <a:latin typeface="Aptos Display"/>
+              </a:rPr>
+              <a:t>Ransomware Defence Is a Decision Problem</a:t>
+            </a:r>
+            <a:endParaRPr lang="en-GB" err="1"/>
+          </a:p>
+        </p:txBody>
+      </p:sp>
+      <p:sp>
+        <p:nvSpPr>
+          <p:cNvPr id="3" name="Content Placeholder 2">
+            <a:extLst>
+              <a:ext uri="{FF2B5EF4-FFF2-40B4-BE49-F238E27FC236}">
+                <a16:creationId xmlns:a16="http://schemas.microsoft.com/office/drawing/2014/main" id="{BA919012-1158-CC85-7281-8334EED33B59}"/>
+              </a:ext>
+            </a:extLst>
+          </p:cNvPr>
+          <p:cNvSpPr>
+            <a:spLocks noGrp="1"/>
+          </p:cNvSpPr>
+          <p:nvPr>
+            <p:ph idx="1"/>
+          </p:nvPr>
+        </p:nvSpPr>
+        <p:spPr/>
+        <p:txBody>
+          <a:bodyPr vert="horz" lIns="91440" tIns="45720" rIns="91440" bIns="45720" rtlCol="0" anchor="t">
+            <a:normAutofit/>
+          </a:bodyPr>
+          <a:lstStyle/>
+          <a:p>
+            <a:pPr>
+              <a:buNone/>
+            </a:pPr>
             <a:r>
               <a:rPr lang="en-GB" sz="1800" b="1" dirty="0">
                 <a:latin typeface="Aptos"/>
-                <a:solidFill>
-                  <a:srgbClr val="0E2841"/>
-                </a:solidFill>
               </a:rPr>
               <a:t>Current detectors give a binary answer — but deployment demands more</a:t>
             </a:r>
@@ -3624,12 +4657,9 @@
             <a:pPr>
               <a:buNone/>
             </a:pPr>
-            <a:r>
-              <a:rPr lang="en-GB" sz="800" b="0" dirty="0">
-                <a:latin typeface="Aptos"/>
-              </a:rPr>
-              <a:t/>
-            </a:r>
+            <a:endParaRPr lang="en-GB" sz="1800" b="1" dirty="0">
+              <a:latin typeface="Aptos"/>
+            </a:endParaRPr>
           </a:p>
           <a:p>
             <a:pPr lvl="1">
@@ -3695,12 +4725,9 @@
             <a:pPr>
               <a:buNone/>
             </a:pPr>
-            <a:r>
-              <a:rPr lang="en-GB" sz="800" b="0" dirty="0">
-                <a:latin typeface="Aptos"/>
-              </a:rPr>
-              <a:t/>
-            </a:r>
+            <a:endParaRPr lang="en-GB" sz="1700" b="0" dirty="0">
+              <a:latin typeface="Aptos"/>
+            </a:endParaRPr>
           </a:p>
           <a:p>
             <a:pPr>
@@ -3709,9 +4736,6 @@
             <a:r>
               <a:rPr lang="en-GB" sz="1700" b="1" dirty="0">
                 <a:latin typeface="Aptos"/>
-                <a:solidFill>
-                  <a:srgbClr val="156082"/>
-                </a:solidFill>
               </a:rPr>
               <a:t>What is missing from the state of practice:</a:t>
             </a:r>
@@ -3765,12 +4789,9 @@
             <a:pPr>
               <a:buNone/>
             </a:pPr>
-            <a:r>
-              <a:rPr lang="en-GB" sz="800" b="0" dirty="0">
-                <a:latin typeface="Aptos"/>
-              </a:rPr>
-              <a:t/>
-            </a:r>
+            <a:endParaRPr lang="en-GB" sz="1600" b="0" dirty="0">
+              <a:latin typeface="Aptos"/>
+            </a:endParaRPr>
           </a:p>
           <a:p>
             <a:pPr>
@@ -3779,9 +4800,6 @@
             <a:r>
               <a:rPr lang="en-GB" sz="1800" b="1" dirty="0">
                 <a:latin typeface="Aptos"/>
-                <a:solidFill>
-                  <a:srgbClr val="E97132"/>
-                </a:solidFill>
               </a:rPr>
               <a:t>SABRE operationalises uncertainty as a control variable for safer deployment</a:t>
             </a:r>
@@ -3837,7 +4855,7 @@
 </p:sld>
 </file>
 
-<file path=ppt/slides/slide3.xml><?xml version="1.0" encoding="utf-8"?>
+<file path=ppt/slides/slide4.xml><?xml version="1.0" encoding="utf-8"?>
 <p:sld xmlns:a="http://schemas.openxmlformats.org/drawingml/2006/main" xmlns:r="http://schemas.openxmlformats.org/officeDocument/2006/relationships" xmlns:p="http://schemas.openxmlformats.org/presentationml/2006/main">
   <p:cSld>
     <p:spTree>
@@ -3878,7 +4896,7 @@
         </p:spPr>
         <p:txBody>
           <a:bodyPr>
-            <a:normAutofit fontScale="90000"/>
+            <a:normAutofit/>
           </a:bodyPr>
           <a:lstStyle/>
           <a:p>
@@ -3918,13 +4936,13 @@
           </a:bodyPr>
           <a:lstStyle/>
           <a:p>
-            <a:endParaRPr lang="en-GB"/>
-          </a:p>
-          <a:p>
-            <a:endParaRPr lang="en-GB"/>
-          </a:p>
-          <a:p>
-            <a:endParaRPr lang="en-GB"/>
+            <a:endParaRPr lang="en-GB" dirty="0"/>
+          </a:p>
+          <a:p>
+            <a:endParaRPr lang="en-GB" dirty="0"/>
+          </a:p>
+          <a:p>
+            <a:endParaRPr lang="en-GB" dirty="0"/>
           </a:p>
         </p:txBody>
       </p:sp>
@@ -3964,30 +4982,6 @@
           </a:fontRef>
         </p:style>
       </p:cxnSp>
-      <p:pic>
-        <p:nvPicPr>
-          <p:cNvPr id="5" name="Picture 4" descr="Prop_Agentic_Sabre_27_04_2026_3Agents_Fullpipeline.png"/>
-          <p:cNvPicPr>
-            <a:picLocks noChangeAspect="1"/>
-          </p:cNvPicPr>
-          <p:nvPr/>
-        </p:nvPicPr>
-        <p:blipFill>
-          <a:blip r:embed="rId2"/>
-          <a:stretch>
-            <a:fillRect/>
-          </a:stretch>
-        </p:blipFill>
-        <p:spPr>
-          <a:xfrm>
-            <a:off x="5852160" y="1188720"/>
-            <a:ext cx="6035040" cy="2424793"/>
-          </a:xfrm>
-          <a:prstGeom prst="rect">
-            <a:avLst/>
-          </a:prstGeom>
-        </p:spPr>
-      </p:pic>
       <p:sp>
         <p:nvSpPr>
           <p:cNvPr id="6" name="TextBox 5"/>
@@ -3996,8 +4990,8 @@
         </p:nvSpPr>
         <p:spPr>
           <a:xfrm>
-            <a:off x="548640" y="1188720"/>
-            <a:ext cx="5120640" cy="5303520"/>
+            <a:off x="466221" y="1825625"/>
+            <a:ext cx="5950483" cy="3908762"/>
           </a:xfrm>
           <a:prstGeom prst="rect">
             <a:avLst/>
@@ -4020,9 +5014,6 @@
             <a:r>
               <a:rPr lang="en-GB" sz="1700" b="1" dirty="0">
                 <a:latin typeface="Aptos"/>
-                <a:solidFill>
-                  <a:srgbClr val="0E2841"/>
-                </a:solidFill>
               </a:rPr>
               <a:t>Semantic Agent</a:t>
             </a:r>
@@ -4061,12 +5052,9 @@
             <a:pPr>
               <a:buNone/>
             </a:pPr>
-            <a:r>
-              <a:rPr lang="en-GB" sz="600" b="0" dirty="0">
-                <a:latin typeface="Aptos"/>
-              </a:rPr>
-              <a:t/>
-            </a:r>
+            <a:endParaRPr lang="en-GB" sz="1500" b="0" dirty="0">
+              <a:latin typeface="Aptos"/>
+            </a:endParaRPr>
           </a:p>
           <a:p>
             <a:pPr lvl="1">
@@ -4079,9 +5067,6 @@
             <a:r>
               <a:rPr lang="en-GB" sz="1700" b="1" dirty="0">
                 <a:latin typeface="Aptos"/>
-                <a:solidFill>
-                  <a:srgbClr val="0E2841"/>
-                </a:solidFill>
               </a:rPr>
               <a:t>Behavioural Agent</a:t>
             </a:r>
@@ -4135,12 +5120,9 @@
             <a:pPr>
               <a:buNone/>
             </a:pPr>
-            <a:r>
-              <a:rPr lang="en-GB" sz="600" b="0" dirty="0">
-                <a:latin typeface="Aptos"/>
-              </a:rPr>
-              <a:t/>
-            </a:r>
+            <a:endParaRPr lang="en-GB" sz="1500" b="0" dirty="0">
+              <a:latin typeface="Aptos"/>
+            </a:endParaRPr>
           </a:p>
           <a:p>
             <a:pPr lvl="1">
@@ -4153,9 +5135,6 @@
             <a:r>
               <a:rPr lang="en-GB" sz="1700" b="1" dirty="0">
                 <a:latin typeface="Aptos"/>
-                <a:solidFill>
-                  <a:srgbClr val="0E2841"/>
-                </a:solidFill>
               </a:rPr>
               <a:t>Uncertainty Quantification</a:t>
             </a:r>
@@ -4194,12 +5173,9 @@
             <a:pPr>
               <a:buNone/>
             </a:pPr>
-            <a:r>
-              <a:rPr lang="en-GB" sz="600" b="0" dirty="0">
-                <a:latin typeface="Aptos"/>
-              </a:rPr>
-              <a:t/>
-            </a:r>
+            <a:endParaRPr lang="en-GB" sz="1500" b="0" dirty="0">
+              <a:latin typeface="Aptos"/>
+            </a:endParaRPr>
           </a:p>
           <a:p>
             <a:pPr lvl="1">
@@ -4212,9 +5188,6 @@
             <a:r>
               <a:rPr lang="en-GB" sz="1600" b="1" dirty="0">
                 <a:latin typeface="Aptos"/>
-                <a:solidFill>
-                  <a:srgbClr val="E97132"/>
-                </a:solidFill>
               </a:rPr>
               <a:t>Score fusion → triage policy → AUTO-CONTAIN / ESCALATE / ALLOW</a:t>
             </a:r>
@@ -4234,7 +5207,7 @@
 </p:sld>
 </file>
 
-<file path=ppt/slides/slide4.xml><?xml version="1.0" encoding="utf-8"?>
+<file path=ppt/slides/slide5.xml><?xml version="1.0" encoding="utf-8"?>
 <p:sld xmlns:a="http://schemas.openxmlformats.org/drawingml/2006/main" xmlns:r="http://schemas.openxmlformats.org/officeDocument/2006/relationships" xmlns:p="http://schemas.openxmlformats.org/presentationml/2006/main">
   <p:cSld>
     <p:spTree>
@@ -4251,6 +5224,66 @@
           <a:chExt cx="0" cy="0"/>
         </a:xfrm>
       </p:grpSpPr>
+      <p:pic>
+        <p:nvPicPr>
+          <p:cNvPr id="4" name="Picture 3">
+            <a:extLst>
+              <a:ext uri="{FF2B5EF4-FFF2-40B4-BE49-F238E27FC236}">
+                <a16:creationId xmlns:a16="http://schemas.microsoft.com/office/drawing/2014/main" id="{75DE178C-5A83-9353-F1AF-81CA57AB3D4A}"/>
+              </a:ext>
+            </a:extLst>
+          </p:cNvPr>
+          <p:cNvPicPr>
+            <a:picLocks noChangeAspect="1"/>
+          </p:cNvPicPr>
+          <p:nvPr/>
+        </p:nvPicPr>
+        <p:blipFill>
+          <a:blip r:embed="rId2"/>
+          <a:stretch>
+            <a:fillRect/>
+          </a:stretch>
+        </p:blipFill>
+        <p:spPr>
+          <a:xfrm>
+            <a:off x="453592" y="1329302"/>
+            <a:ext cx="11348720" cy="3664354"/>
+          </a:xfrm>
+          <a:prstGeom prst="rect">
+            <a:avLst/>
+          </a:prstGeom>
+        </p:spPr>
+      </p:pic>
+    </p:spTree>
+    <p:extLst>
+      <p:ext uri="{BB962C8B-B14F-4D97-AF65-F5344CB8AC3E}">
+        <p14:creationId xmlns:p14="http://schemas.microsoft.com/office/powerpoint/2010/main" val="1921626863"/>
+      </p:ext>
+    </p:extLst>
+  </p:cSld>
+  <p:clrMapOvr>
+    <a:masterClrMapping/>
+  </p:clrMapOvr>
+</p:sld>
+</file>
+
+<file path=ppt/slides/slide6.xml><?xml version="1.0" encoding="utf-8"?>
+<p:sld xmlns:a="http://schemas.openxmlformats.org/drawingml/2006/main" xmlns:r="http://schemas.openxmlformats.org/officeDocument/2006/relationships" xmlns:p="http://schemas.openxmlformats.org/presentationml/2006/main">
+  <p:cSld>
+    <p:spTree>
+      <p:nvGrpSpPr>
+        <p:cNvPr id="1" name=""/>
+        <p:cNvGrpSpPr/>
+        <p:nvPr/>
+      </p:nvGrpSpPr>
+      <p:grpSpPr>
+        <a:xfrm>
+          <a:off x="0" y="0"/>
+          <a:ext cx="0" cy="0"/>
+          <a:chOff x="0" y="0"/>
+          <a:chExt cx="0" cy="0"/>
+        </a:xfrm>
+      </p:grpSpPr>
       <p:sp>
         <p:nvSpPr>
           <p:cNvPr id="2" name="Title 1">
@@ -4275,53 +5308,20 @@
         </p:spPr>
         <p:txBody>
           <a:bodyPr>
-            <a:normAutofit fontScale="90000"/>
-          </a:bodyPr>
-          <a:lstStyle/>
-          <a:p>
-            <a:r>
-              <a:rPr sz="2800" b="1">
-                <a:solidFill>
-                  <a:srgbClr val="0E2841"/>
-                </a:solidFill>
-                <a:latin typeface="Aptos Display"/>
-              </a:rPr>
-              <a:t>Operationalising Uncertainty: The Triage Policy</a:t>
-            </a:r>
-            <a:endParaRPr lang="en-GB" sz="4200"/>
-          </a:p>
-        </p:txBody>
-      </p:sp>
-      <p:sp>
-        <p:nvSpPr>
-          <p:cNvPr id="3" name="Content Placeholder 2">
-            <a:extLst>
-              <a:ext uri="{FF2B5EF4-FFF2-40B4-BE49-F238E27FC236}">
-                <a16:creationId xmlns:a16="http://schemas.microsoft.com/office/drawing/2014/main" id="{E25347FC-8A5F-8549-D393-1CA94B47F145}"/>
-              </a:ext>
-            </a:extLst>
-          </p:cNvPr>
-          <p:cNvSpPr>
-            <a:spLocks noGrp="1"/>
-          </p:cNvSpPr>
-          <p:nvPr>
-            <p:ph idx="1"/>
-          </p:nvPr>
-        </p:nvSpPr>
-        <p:spPr/>
-        <p:txBody>
-          <a:bodyPr vert="horz" lIns="91440" tIns="45720" rIns="91440" bIns="45720" rtlCol="0" anchor="t">
             <a:normAutofit/>
           </a:bodyPr>
           <a:lstStyle/>
           <a:p>
-            <a:endParaRPr lang="en-GB"/>
-          </a:p>
-          <a:p>
-            <a:endParaRPr lang="en-GB"/>
-          </a:p>
-          <a:p>
-            <a:endParaRPr lang="en-GB"/>
+            <a:r>
+              <a:rPr sz="2800" b="1">
+                <a:solidFill>
+                  <a:srgbClr val="0E2841"/>
+                </a:solidFill>
+                <a:latin typeface="Aptos Display"/>
+              </a:rPr>
+              <a:t>Operationalising Uncertainty: The Triage Policy</a:t>
+            </a:r>
+            <a:endParaRPr lang="en-GB" sz="4200"/>
           </a:p>
         </p:txBody>
       </p:sp>
@@ -4377,8 +5377,8 @@
         </p:blipFill>
         <p:spPr>
           <a:xfrm>
-            <a:off x="6400800" y="1188720"/>
-            <a:ext cx="5303520" cy="3977640"/>
+            <a:off x="6455914" y="1690688"/>
+            <a:ext cx="5165821" cy="3874366"/>
           </a:xfrm>
           <a:prstGeom prst="rect">
             <a:avLst/>
@@ -4393,8 +5393,8 @@
         </p:nvSpPr>
         <p:spPr>
           <a:xfrm>
-            <a:off x="548640" y="1188720"/>
-            <a:ext cx="5669280" cy="5303520"/>
+            <a:off x="371662" y="1857314"/>
+            <a:ext cx="5911151" cy="4001095"/>
           </a:xfrm>
           <a:prstGeom prst="rect">
             <a:avLst/>
@@ -4413,9 +5413,6 @@
             <a:r>
               <a:rPr lang="en-GB" sz="1800" b="1" dirty="0">
                 <a:latin typeface="Aptos"/>
-                <a:solidFill>
-                  <a:srgbClr val="0E2841"/>
-                </a:solidFill>
               </a:rPr>
               <a:t>Three-way decision (not binary):</a:t>
             </a:r>
@@ -4424,12 +5421,9 @@
             <a:pPr>
               <a:buNone/>
             </a:pPr>
-            <a:r>
-              <a:rPr lang="en-GB" sz="600" b="0" dirty="0">
-                <a:latin typeface="Aptos"/>
-              </a:rPr>
-              <a:t/>
-            </a:r>
+            <a:endParaRPr lang="en-GB" sz="1800" b="1" dirty="0">
+              <a:latin typeface="Aptos"/>
+            </a:endParaRPr>
           </a:p>
           <a:p>
             <a:pPr lvl="1">
@@ -4442,9 +5436,6 @@
             <a:r>
               <a:rPr lang="en-GB" sz="1700" b="1" dirty="0">
                 <a:latin typeface="Aptos"/>
-                <a:solidFill>
-                  <a:srgbClr val="196B24"/>
-                </a:solidFill>
               </a:rPr>
               <a:t>AUTO-CONTAIN</a:t>
             </a:r>
@@ -4483,12 +5474,9 @@
             <a:pPr>
               <a:buNone/>
             </a:pPr>
-            <a:r>
-              <a:rPr lang="en-GB" sz="500" b="0" dirty="0">
-                <a:latin typeface="Aptos"/>
-              </a:rPr>
-              <a:t/>
-            </a:r>
+            <a:endParaRPr lang="en-GB" sz="1500" b="0" dirty="0">
+              <a:latin typeface="Aptos"/>
+            </a:endParaRPr>
           </a:p>
           <a:p>
             <a:pPr lvl="1">
@@ -4501,9 +5489,6 @@
             <a:r>
               <a:rPr lang="en-GB" sz="1700" b="1" dirty="0">
                 <a:latin typeface="Aptos"/>
-                <a:solidFill>
-                  <a:srgbClr val="E97132"/>
-                </a:solidFill>
               </a:rPr>
               <a:t>ESCALATE</a:t>
             </a:r>
@@ -4557,12 +5542,9 @@
             <a:pPr>
               <a:buNone/>
             </a:pPr>
-            <a:r>
-              <a:rPr lang="en-GB" sz="500" b="0" dirty="0">
-                <a:latin typeface="Aptos"/>
-              </a:rPr>
-              <a:t/>
-            </a:r>
+            <a:endParaRPr lang="en-GB" sz="1500" b="0" dirty="0">
+              <a:latin typeface="Aptos"/>
+            </a:endParaRPr>
           </a:p>
           <a:p>
             <a:pPr lvl="1">
@@ -4575,9 +5557,6 @@
             <a:r>
               <a:rPr lang="en-GB" sz="1700" b="1" dirty="0">
                 <a:latin typeface="Aptos"/>
-                <a:solidFill>
-                  <a:srgbClr val="156082"/>
-                </a:solidFill>
               </a:rPr>
               <a:t>ALLOW</a:t>
             </a:r>
@@ -4601,12 +5580,9 @@
             <a:pPr>
               <a:buNone/>
             </a:pPr>
-            <a:r>
-              <a:rPr lang="en-GB" sz="800" b="0" dirty="0">
-                <a:latin typeface="Aptos"/>
-              </a:rPr>
-              <a:t/>
-            </a:r>
+            <a:endParaRPr lang="en-GB" sz="1500" b="0" dirty="0">
+              <a:latin typeface="Aptos"/>
+            </a:endParaRPr>
           </a:p>
           <a:p>
             <a:pPr>
@@ -4615,9 +5591,6 @@
             <a:r>
               <a:rPr lang="en-GB" sz="1600" b="1" dirty="0">
                 <a:latin typeface="Aptos"/>
-                <a:solidFill>
-                  <a:srgbClr val="1E293B"/>
-                </a:solidFill>
               </a:rPr>
               <a:t>Key insight: uncertainty gates automation —</a:t>
             </a:r>
@@ -4629,9 +5602,6 @@
             <a:r>
               <a:rPr lang="en-GB" sz="1600" b="1" dirty="0">
                 <a:latin typeface="Aptos"/>
-                <a:solidFill>
-                  <a:srgbClr val="1E293B"/>
-                </a:solidFill>
               </a:rPr>
               <a:t>the system knows when NOT to act autonomously</a:t>
             </a:r>
@@ -4651,7 +5621,7 @@
 </p:sld>
 </file>
 
-<file path=ppt/slides/slide5.xml><?xml version="1.0" encoding="utf-8"?>
+<file path=ppt/slides/slide7.xml><?xml version="1.0" encoding="utf-8"?>
 <p:sld xmlns:a="http://schemas.openxmlformats.org/drawingml/2006/main" xmlns:r="http://schemas.openxmlformats.org/officeDocument/2006/relationships" xmlns:p="http://schemas.openxmlformats.org/presentationml/2006/main">
   <p:cSld>
     <p:spTree>
@@ -4692,7 +5662,7 @@
         </p:spPr>
         <p:txBody>
           <a:bodyPr>
-            <a:normAutofit fontScale="90000"/>
+            <a:normAutofit/>
           </a:bodyPr>
           <a:lstStyle/>
           <a:p>
@@ -4983,30 +5953,6 @@
           </a:p>
         </p:txBody>
       </p:sp>
-      <p:pic>
-        <p:nvPicPr>
-          <p:cNvPr id="6" name="Picture 5" descr="ROC_all_agents.png"/>
-          <p:cNvPicPr>
-            <a:picLocks noChangeAspect="1"/>
-          </p:cNvPicPr>
-          <p:nvPr/>
-        </p:nvPicPr>
-        <p:blipFill>
-          <a:blip r:embed="rId2"/>
-          <a:stretch>
-            <a:fillRect/>
-          </a:stretch>
-        </p:blipFill>
-        <p:spPr>
-          <a:xfrm>
-            <a:off x="6217920" y="1188720"/>
-            <a:ext cx="5486400" cy="4702629"/>
-          </a:xfrm>
-          <a:prstGeom prst="rect">
-            <a:avLst/>
-          </a:prstGeom>
-        </p:spPr>
-      </p:pic>
       <p:sp>
         <p:nvSpPr>
           <p:cNvPr id="7" name="TextBox 6"/>
@@ -5015,8 +5961,8 @@
         </p:nvSpPr>
         <p:spPr>
           <a:xfrm>
-            <a:off x="548640" y="1188720"/>
-            <a:ext cx="5486400" cy="5303520"/>
+            <a:off x="713158" y="1825625"/>
+            <a:ext cx="6307073" cy="4495574"/>
           </a:xfrm>
           <a:prstGeom prst="rect">
             <a:avLst/>
@@ -5035,9 +5981,6 @@
             <a:r>
               <a:rPr lang="en-GB" sz="1700" b="1" dirty="0">
                 <a:latin typeface="Aptos"/>
-                <a:solidFill>
-                  <a:srgbClr val="0E2841"/>
-                </a:solidFill>
               </a:rPr>
               <a:t>Semantic setting (RDset — 138K PE files):</a:t>
             </a:r>
@@ -5076,12 +6019,9 @@
             <a:pPr>
               <a:buNone/>
             </a:pPr>
-            <a:r>
-              <a:rPr lang="en-GB" sz="600" b="0" dirty="0">
-                <a:latin typeface="Aptos"/>
-              </a:rPr>
-              <a:t/>
-            </a:r>
+            <a:endParaRPr lang="en-GB" sz="1600" b="0" dirty="0">
+              <a:latin typeface="Aptos"/>
+            </a:endParaRPr>
           </a:p>
           <a:p>
             <a:pPr>
@@ -5090,9 +6030,6 @@
             <a:r>
               <a:rPr lang="en-GB" sz="1700" b="1" dirty="0">
                 <a:latin typeface="Aptos"/>
-                <a:solidFill>
-                  <a:srgbClr val="0E2841"/>
-                </a:solidFill>
               </a:rPr>
               <a:t>Behavioural setting (RanSMAP — 35,857 windows, 15 hardware configs):</a:t>
             </a:r>
@@ -5146,12 +6083,9 @@
             <a:pPr>
               <a:buNone/>
             </a:pPr>
-            <a:r>
-              <a:rPr lang="en-GB" sz="600" b="0" dirty="0">
-                <a:latin typeface="Aptos"/>
-              </a:rPr>
-              <a:t/>
-            </a:r>
+            <a:endParaRPr lang="en-GB" sz="1600" b="0" dirty="0">
+              <a:latin typeface="Aptos"/>
+            </a:endParaRPr>
           </a:p>
           <a:p>
             <a:pPr>
@@ -5160,9 +6094,6 @@
             <a:r>
               <a:rPr lang="en-GB" sz="1700" b="1" dirty="0">
                 <a:latin typeface="Aptos"/>
-                <a:solidFill>
-                  <a:srgbClr val="E97132"/>
-                </a:solidFill>
               </a:rPr>
               <a:t>Why does this matter?</a:t>
             </a:r>
@@ -5216,12 +6147,9 @@
             <a:pPr>
               <a:buNone/>
             </a:pPr>
-            <a:r>
-              <a:rPr lang="en-GB" sz="600" b="0" dirty="0">
-                <a:latin typeface="Aptos"/>
-              </a:rPr>
-              <a:t/>
-            </a:r>
+            <a:endParaRPr lang="en-GB" sz="1600" b="0" dirty="0">
+              <a:latin typeface="Aptos"/>
+            </a:endParaRPr>
           </a:p>
           <a:p>
             <a:pPr>
@@ -5230,9 +6158,6 @@
             <a:r>
               <a:rPr lang="en-GB" sz="1600" b="1" dirty="0">
                 <a:latin typeface="Aptos"/>
-                <a:solidFill>
-                  <a:srgbClr val="156082"/>
-                </a:solidFill>
               </a:rPr>
               <a:t>The gap between settings is not a failure — it is informative</a:t>
             </a:r>
@@ -5252,7 +6177,7 @@
 </p:sld>
 </file>
 
-<file path=ppt/slides/slide6.xml><?xml version="1.0" encoding="utf-8"?>
+<file path=ppt/slides/slide8.xml><?xml version="1.0" encoding="utf-8"?>
 <p:sld xmlns:a="http://schemas.openxmlformats.org/drawingml/2006/main" xmlns:r="http://schemas.openxmlformats.org/officeDocument/2006/relationships" xmlns:p="http://schemas.openxmlformats.org/presentationml/2006/main">
   <p:cSld>
     <p:spTree>
@@ -5287,8 +6212,8 @@
         </p:nvSpPr>
         <p:spPr>
           <a:xfrm>
-            <a:off x="838199" y="365125"/>
-            <a:ext cx="11191043" cy="1325563"/>
+            <a:off x="838199" y="250232"/>
+            <a:ext cx="11191043" cy="1066830"/>
           </a:xfrm>
         </p:spPr>
         <p:txBody>
@@ -5298,7 +6223,7 @@
           <a:lstStyle/>
           <a:p>
             <a:r>
-              <a:rPr sz="2800" b="1">
+              <a:rPr sz="2800" b="1" dirty="0">
                 <a:solidFill>
                   <a:srgbClr val="0E2841"/>
                 </a:solidFill>
@@ -5306,7 +6231,7 @@
               </a:rPr>
               <a:t>Explainability: Making Decisions Auditable</a:t>
             </a:r>
-            <a:endParaRPr lang="en-GB" sz="4200"/>
+            <a:endParaRPr lang="en-GB" sz="4200" dirty="0"/>
           </a:p>
         </p:txBody>
       </p:sp>
@@ -5349,6 +6274,844 @@
             <a:extLst>
               <a:ext uri="{FF2B5EF4-FFF2-40B4-BE49-F238E27FC236}">
                 <a16:creationId xmlns:a16="http://schemas.microsoft.com/office/drawing/2014/main" id="{5B64D6CC-6420-9E00-377D-AFF39E392739}"/>
+              </a:ext>
+            </a:extLst>
+          </p:cNvPr>
+          <p:cNvCxnSpPr/>
+          <p:nvPr/>
+        </p:nvCxnSpPr>
+        <p:spPr>
+          <a:xfrm>
+            <a:off x="196788" y="1050318"/>
+            <a:ext cx="11798423" cy="0"/>
+          </a:xfrm>
+          <a:prstGeom prst="line">
+            <a:avLst/>
+          </a:prstGeom>
+        </p:spPr>
+        <p:style>
+          <a:lnRef idx="2">
+            <a:schemeClr val="accent1"/>
+          </a:lnRef>
+          <a:fillRef idx="0">
+            <a:schemeClr val="accent1"/>
+          </a:fillRef>
+          <a:effectRef idx="1">
+            <a:schemeClr val="accent1"/>
+          </a:effectRef>
+          <a:fontRef idx="minor">
+            <a:schemeClr val="tx1"/>
+          </a:fontRef>
+        </p:style>
+      </p:cxnSp>
+      <p:sp>
+        <p:nvSpPr>
+          <p:cNvPr id="5" name="Content Placeholder 1">
+            <a:extLst>
+              <a:ext uri="{FF2B5EF4-FFF2-40B4-BE49-F238E27FC236}">
+                <a16:creationId xmlns:a16="http://schemas.microsoft.com/office/drawing/2014/main" id="{974B2A6A-D7F9-68BE-2B47-56B70BC4D578}"/>
+              </a:ext>
+            </a:extLst>
+          </p:cNvPr>
+          <p:cNvSpPr>
+            <a:spLocks noGrp="1"/>
+          </p:cNvSpPr>
+          <p:nvPr/>
+        </p:nvSpPr>
+        <p:spPr>
+          <a:xfrm>
+            <a:off x="6204936" y="2160000"/>
+            <a:ext cx="4967890" cy="3935999"/>
+          </a:xfrm>
+          <a:prstGeom prst="rect">
+            <a:avLst/>
+          </a:prstGeom>
+        </p:spPr>
+        <p:txBody>
+          <a:bodyPr vert="horz" lIns="91440" tIns="45720" rIns="91440" bIns="45720" rtlCol="0">
+            <a:normAutofit/>
+          </a:bodyPr>
+          <a:lstStyle>
+            <a:lvl1pPr marL="180000" indent="-180000" algn="l" defTabSz="914377" rtl="0" eaLnBrk="1" latinLnBrk="0" hangingPunct="1">
+              <a:lnSpc>
+                <a:spcPct val="100000"/>
+              </a:lnSpc>
+              <a:spcBef>
+                <a:spcPts val="0"/>
+              </a:spcBef>
+              <a:spcAft>
+                <a:spcPts val="0"/>
+              </a:spcAft>
+              <a:buFont typeface="+mj-lt"/>
+              <a:buNone/>
+              <a:defRPr sz="1800" kern="1200">
+                <a:solidFill>
+                  <a:srgbClr val="000000"/>
+                </a:solidFill>
+                <a:latin typeface="+mn-lt"/>
+                <a:ea typeface="+mn-ea"/>
+                <a:cs typeface="+mn-cs"/>
+              </a:defRPr>
+            </a:lvl1pPr>
+            <a:lvl2pPr marL="360000" indent="-180000" algn="l" defTabSz="914377" rtl="0" eaLnBrk="1" latinLnBrk="0" hangingPunct="1">
+              <a:lnSpc>
+                <a:spcPct val="100000"/>
+              </a:lnSpc>
+              <a:spcBef>
+                <a:spcPts val="0"/>
+              </a:spcBef>
+              <a:buFont typeface="Arial" panose="020B0604020202020204" pitchFamily="34" charset="0"/>
+              <a:buChar char="•"/>
+              <a:defRPr sz="1600" kern="1200">
+                <a:solidFill>
+                  <a:srgbClr val="000000"/>
+                </a:solidFill>
+                <a:latin typeface="+mn-lt"/>
+                <a:ea typeface="+mn-ea"/>
+                <a:cs typeface="+mn-cs"/>
+              </a:defRPr>
+            </a:lvl2pPr>
+            <a:lvl3pPr marL="540000" indent="-180000" algn="l" defTabSz="914377" rtl="0" eaLnBrk="1" latinLnBrk="0" hangingPunct="1">
+              <a:lnSpc>
+                <a:spcPct val="100000"/>
+              </a:lnSpc>
+              <a:spcBef>
+                <a:spcPts val="0"/>
+              </a:spcBef>
+              <a:buFont typeface="Arial" panose="020B0604020202020204" pitchFamily="34" charset="0"/>
+              <a:buChar char="•"/>
+              <a:defRPr sz="1400" kern="1200">
+                <a:solidFill>
+                  <a:srgbClr val="000000"/>
+                </a:solidFill>
+                <a:latin typeface="+mn-lt"/>
+                <a:ea typeface="+mn-ea"/>
+                <a:cs typeface="+mn-cs"/>
+              </a:defRPr>
+            </a:lvl3pPr>
+            <a:lvl4pPr marL="720000" indent="-180000" algn="l" defTabSz="914377" rtl="0" eaLnBrk="1" latinLnBrk="0" hangingPunct="1">
+              <a:lnSpc>
+                <a:spcPct val="100000"/>
+              </a:lnSpc>
+              <a:spcBef>
+                <a:spcPts val="0"/>
+              </a:spcBef>
+              <a:buFont typeface="Arial" panose="020B0604020202020204" pitchFamily="34" charset="0"/>
+              <a:buChar char="•"/>
+              <a:defRPr sz="1400" kern="1200">
+                <a:solidFill>
+                  <a:srgbClr val="000000"/>
+                </a:solidFill>
+                <a:latin typeface="+mn-lt"/>
+                <a:ea typeface="+mn-ea"/>
+                <a:cs typeface="+mn-cs"/>
+              </a:defRPr>
+            </a:lvl4pPr>
+            <a:lvl5pPr marL="900000" indent="-180000" algn="l" defTabSz="914377" rtl="0" eaLnBrk="1" latinLnBrk="0" hangingPunct="1">
+              <a:lnSpc>
+                <a:spcPct val="100000"/>
+              </a:lnSpc>
+              <a:spcBef>
+                <a:spcPts val="0"/>
+              </a:spcBef>
+              <a:buFont typeface="Arial" panose="020B0604020202020204" pitchFamily="34" charset="0"/>
+              <a:buChar char="•"/>
+              <a:defRPr sz="1400" kern="1200">
+                <a:solidFill>
+                  <a:srgbClr val="000000"/>
+                </a:solidFill>
+                <a:latin typeface="+mn-lt"/>
+                <a:ea typeface="+mn-ea"/>
+                <a:cs typeface="+mn-cs"/>
+              </a:defRPr>
+            </a:lvl5pPr>
+            <a:lvl6pPr marL="2514537" indent="-228594" algn="l" defTabSz="914377" rtl="0" eaLnBrk="1" latinLnBrk="0" hangingPunct="1">
+              <a:lnSpc>
+                <a:spcPct val="90000"/>
+              </a:lnSpc>
+              <a:spcBef>
+                <a:spcPts val="500"/>
+              </a:spcBef>
+              <a:buFont typeface="Arial" panose="020B0604020202020204" pitchFamily="34" charset="0"/>
+              <a:buChar char="•"/>
+              <a:defRPr sz="1800" kern="1200">
+                <a:solidFill>
+                  <a:schemeClr val="tx1"/>
+                </a:solidFill>
+                <a:latin typeface="+mn-lt"/>
+                <a:ea typeface="+mn-ea"/>
+                <a:cs typeface="+mn-cs"/>
+              </a:defRPr>
+            </a:lvl6pPr>
+            <a:lvl7pPr marL="2971726" indent="-228594" algn="l" defTabSz="914377" rtl="0" eaLnBrk="1" latinLnBrk="0" hangingPunct="1">
+              <a:lnSpc>
+                <a:spcPct val="90000"/>
+              </a:lnSpc>
+              <a:spcBef>
+                <a:spcPts val="500"/>
+              </a:spcBef>
+              <a:buFont typeface="Arial" panose="020B0604020202020204" pitchFamily="34" charset="0"/>
+              <a:buChar char="•"/>
+              <a:defRPr sz="1800" kern="1200">
+                <a:solidFill>
+                  <a:schemeClr val="tx1"/>
+                </a:solidFill>
+                <a:latin typeface="+mn-lt"/>
+                <a:ea typeface="+mn-ea"/>
+                <a:cs typeface="+mn-cs"/>
+              </a:defRPr>
+            </a:lvl7pPr>
+            <a:lvl8pPr marL="3428914" indent="-228594" algn="l" defTabSz="914377" rtl="0" eaLnBrk="1" latinLnBrk="0" hangingPunct="1">
+              <a:lnSpc>
+                <a:spcPct val="90000"/>
+              </a:lnSpc>
+              <a:spcBef>
+                <a:spcPts val="500"/>
+              </a:spcBef>
+              <a:buFont typeface="Arial" panose="020B0604020202020204" pitchFamily="34" charset="0"/>
+              <a:buChar char="•"/>
+              <a:defRPr sz="1800" kern="1200">
+                <a:solidFill>
+                  <a:schemeClr val="tx1"/>
+                </a:solidFill>
+                <a:latin typeface="+mn-lt"/>
+                <a:ea typeface="+mn-ea"/>
+                <a:cs typeface="+mn-cs"/>
+              </a:defRPr>
+            </a:lvl8pPr>
+            <a:lvl9pPr marL="3886103" indent="-228594" algn="l" defTabSz="914377" rtl="0" eaLnBrk="1" latinLnBrk="0" hangingPunct="1">
+              <a:lnSpc>
+                <a:spcPct val="90000"/>
+              </a:lnSpc>
+              <a:spcBef>
+                <a:spcPts val="500"/>
+              </a:spcBef>
+              <a:buFont typeface="Arial" panose="020B0604020202020204" pitchFamily="34" charset="0"/>
+              <a:buChar char="•"/>
+              <a:defRPr sz="1800" kern="1200">
+                <a:solidFill>
+                  <a:schemeClr val="tx1"/>
+                </a:solidFill>
+                <a:latin typeface="+mn-lt"/>
+                <a:ea typeface="+mn-ea"/>
+                <a:cs typeface="+mn-cs"/>
+              </a:defRPr>
+            </a:lvl9pPr>
+          </a:lstStyle>
+          <a:p>
+            <a:endParaRPr lang="en-US"/>
+          </a:p>
+          <a:p>
+            <a:endParaRPr lang="en-IN"/>
+          </a:p>
+        </p:txBody>
+      </p:sp>
+      <p:sp>
+        <p:nvSpPr>
+          <p:cNvPr id="6" name="Content Placeholder 3">
+            <a:extLst>
+              <a:ext uri="{FF2B5EF4-FFF2-40B4-BE49-F238E27FC236}">
+                <a16:creationId xmlns:a16="http://schemas.microsoft.com/office/drawing/2014/main" id="{D08253C5-5C60-EAD9-A631-71B42907A588}"/>
+              </a:ext>
+            </a:extLst>
+          </p:cNvPr>
+          <p:cNvSpPr>
+            <a:spLocks noGrp="1"/>
+          </p:cNvSpPr>
+          <p:nvPr/>
+        </p:nvSpPr>
+        <p:spPr>
+          <a:xfrm>
+            <a:off x="828000" y="3038621"/>
+            <a:ext cx="4967889" cy="3057377"/>
+          </a:xfrm>
+          <a:prstGeom prst="rect">
+            <a:avLst/>
+          </a:prstGeom>
+        </p:spPr>
+        <p:txBody>
+          <a:bodyPr vert="horz" lIns="0" tIns="0" rIns="0" bIns="0" rtlCol="0">
+            <a:noAutofit/>
+          </a:bodyPr>
+          <a:lstStyle>
+            <a:lvl1pPr marL="180000" indent="-180000" algn="l" defTabSz="914377" rtl="0" eaLnBrk="1" latinLnBrk="0" hangingPunct="1">
+              <a:lnSpc>
+                <a:spcPct val="100000"/>
+              </a:lnSpc>
+              <a:spcBef>
+                <a:spcPts val="0"/>
+              </a:spcBef>
+              <a:spcAft>
+                <a:spcPts val="0"/>
+              </a:spcAft>
+              <a:buFont typeface="Arial" panose="020B0604020202020204" pitchFamily="34" charset="0"/>
+              <a:buChar char="•"/>
+              <a:defRPr sz="2000" kern="1200">
+                <a:solidFill>
+                  <a:srgbClr val="000000"/>
+                </a:solidFill>
+                <a:latin typeface="+mn-lt"/>
+                <a:ea typeface="+mn-ea"/>
+                <a:cs typeface="+mn-cs"/>
+              </a:defRPr>
+            </a:lvl1pPr>
+            <a:lvl2pPr marL="360000" indent="-180000" algn="l" defTabSz="914377" rtl="0" eaLnBrk="1" latinLnBrk="0" hangingPunct="1">
+              <a:lnSpc>
+                <a:spcPct val="100000"/>
+              </a:lnSpc>
+              <a:spcBef>
+                <a:spcPts val="0"/>
+              </a:spcBef>
+              <a:buFont typeface="Arial" panose="020B0604020202020204" pitchFamily="34" charset="0"/>
+              <a:buChar char="•"/>
+              <a:defRPr sz="1800" kern="1200">
+                <a:solidFill>
+                  <a:srgbClr val="000000"/>
+                </a:solidFill>
+                <a:latin typeface="+mn-lt"/>
+                <a:ea typeface="+mn-ea"/>
+                <a:cs typeface="+mn-cs"/>
+              </a:defRPr>
+            </a:lvl2pPr>
+            <a:lvl3pPr marL="540000" indent="-180000" algn="l" defTabSz="914377" rtl="0" eaLnBrk="1" latinLnBrk="0" hangingPunct="1">
+              <a:lnSpc>
+                <a:spcPct val="100000"/>
+              </a:lnSpc>
+              <a:spcBef>
+                <a:spcPts val="0"/>
+              </a:spcBef>
+              <a:buFont typeface="Arial" panose="020B0604020202020204" pitchFamily="34" charset="0"/>
+              <a:buChar char="•"/>
+              <a:defRPr sz="1600" kern="1200">
+                <a:solidFill>
+                  <a:srgbClr val="000000"/>
+                </a:solidFill>
+                <a:latin typeface="+mn-lt"/>
+                <a:ea typeface="+mn-ea"/>
+                <a:cs typeface="+mn-cs"/>
+              </a:defRPr>
+            </a:lvl3pPr>
+            <a:lvl4pPr marL="720000" indent="-180000" algn="l" defTabSz="914377" rtl="0" eaLnBrk="1" latinLnBrk="0" hangingPunct="1">
+              <a:lnSpc>
+                <a:spcPct val="100000"/>
+              </a:lnSpc>
+              <a:spcBef>
+                <a:spcPts val="0"/>
+              </a:spcBef>
+              <a:buFont typeface="Arial" panose="020B0604020202020204" pitchFamily="34" charset="0"/>
+              <a:buChar char="•"/>
+              <a:defRPr sz="1400" kern="1200">
+                <a:solidFill>
+                  <a:srgbClr val="000000"/>
+                </a:solidFill>
+                <a:latin typeface="+mn-lt"/>
+                <a:ea typeface="+mn-ea"/>
+                <a:cs typeface="+mn-cs"/>
+              </a:defRPr>
+            </a:lvl4pPr>
+            <a:lvl5pPr marL="900000" indent="-180000" algn="l" defTabSz="914377" rtl="0" eaLnBrk="1" latinLnBrk="0" hangingPunct="1">
+              <a:lnSpc>
+                <a:spcPct val="100000"/>
+              </a:lnSpc>
+              <a:spcBef>
+                <a:spcPts val="0"/>
+              </a:spcBef>
+              <a:buFont typeface="Arial" panose="020B0604020202020204" pitchFamily="34" charset="0"/>
+              <a:buChar char="•"/>
+              <a:defRPr sz="1400" kern="1200">
+                <a:solidFill>
+                  <a:srgbClr val="000000"/>
+                </a:solidFill>
+                <a:latin typeface="+mn-lt"/>
+                <a:ea typeface="+mn-ea"/>
+                <a:cs typeface="+mn-cs"/>
+              </a:defRPr>
+            </a:lvl5pPr>
+            <a:lvl6pPr marL="2514537" indent="-228594" algn="l" defTabSz="914377" rtl="0" eaLnBrk="1" latinLnBrk="0" hangingPunct="1">
+              <a:lnSpc>
+                <a:spcPct val="90000"/>
+              </a:lnSpc>
+              <a:spcBef>
+                <a:spcPts val="500"/>
+              </a:spcBef>
+              <a:buFont typeface="Arial" panose="020B0604020202020204" pitchFamily="34" charset="0"/>
+              <a:buChar char="•"/>
+              <a:defRPr sz="1800" kern="1200">
+                <a:solidFill>
+                  <a:schemeClr val="tx1"/>
+                </a:solidFill>
+                <a:latin typeface="+mn-lt"/>
+                <a:ea typeface="+mn-ea"/>
+                <a:cs typeface="+mn-cs"/>
+              </a:defRPr>
+            </a:lvl6pPr>
+            <a:lvl7pPr marL="2971726" indent="-228594" algn="l" defTabSz="914377" rtl="0" eaLnBrk="1" latinLnBrk="0" hangingPunct="1">
+              <a:lnSpc>
+                <a:spcPct val="90000"/>
+              </a:lnSpc>
+              <a:spcBef>
+                <a:spcPts val="500"/>
+              </a:spcBef>
+              <a:buFont typeface="Arial" panose="020B0604020202020204" pitchFamily="34" charset="0"/>
+              <a:buChar char="•"/>
+              <a:defRPr sz="1800" kern="1200">
+                <a:solidFill>
+                  <a:schemeClr val="tx1"/>
+                </a:solidFill>
+                <a:latin typeface="+mn-lt"/>
+                <a:ea typeface="+mn-ea"/>
+                <a:cs typeface="+mn-cs"/>
+              </a:defRPr>
+            </a:lvl7pPr>
+            <a:lvl8pPr marL="3428914" indent="-228594" algn="l" defTabSz="914377" rtl="0" eaLnBrk="1" latinLnBrk="0" hangingPunct="1">
+              <a:lnSpc>
+                <a:spcPct val="90000"/>
+              </a:lnSpc>
+              <a:spcBef>
+                <a:spcPts val="500"/>
+              </a:spcBef>
+              <a:buFont typeface="Arial" panose="020B0604020202020204" pitchFamily="34" charset="0"/>
+              <a:buChar char="•"/>
+              <a:defRPr sz="1800" kern="1200">
+                <a:solidFill>
+                  <a:schemeClr val="tx1"/>
+                </a:solidFill>
+                <a:latin typeface="+mn-lt"/>
+                <a:ea typeface="+mn-ea"/>
+                <a:cs typeface="+mn-cs"/>
+              </a:defRPr>
+            </a:lvl8pPr>
+            <a:lvl9pPr marL="3886103" indent="-228594" algn="l" defTabSz="914377" rtl="0" eaLnBrk="1" latinLnBrk="0" hangingPunct="1">
+              <a:lnSpc>
+                <a:spcPct val="90000"/>
+              </a:lnSpc>
+              <a:spcBef>
+                <a:spcPts val="500"/>
+              </a:spcBef>
+              <a:buFont typeface="Arial" panose="020B0604020202020204" pitchFamily="34" charset="0"/>
+              <a:buChar char="•"/>
+              <a:defRPr sz="1800" kern="1200">
+                <a:solidFill>
+                  <a:schemeClr val="tx1"/>
+                </a:solidFill>
+                <a:latin typeface="+mn-lt"/>
+                <a:ea typeface="+mn-ea"/>
+                <a:cs typeface="+mn-cs"/>
+              </a:defRPr>
+            </a:lvl9pPr>
+          </a:lstStyle>
+          <a:p>
+            <a:endParaRPr lang="en-US"/>
+          </a:p>
+          <a:p>
+            <a:endParaRPr lang="en-IN"/>
+          </a:p>
+        </p:txBody>
+      </p:sp>
+      <p:pic>
+        <p:nvPicPr>
+          <p:cNvPr id="7" name="Picture 6" descr="Behaviour_feature_importance.png"/>
+          <p:cNvPicPr>
+            <a:picLocks noChangeAspect="1"/>
+          </p:cNvPicPr>
+          <p:nvPr/>
+        </p:nvPicPr>
+        <p:blipFill>
+          <a:blip r:embed="rId2"/>
+          <a:stretch>
+            <a:fillRect/>
+          </a:stretch>
+        </p:blipFill>
+        <p:spPr>
+          <a:xfrm>
+            <a:off x="6754762" y="1364942"/>
+            <a:ext cx="5165359" cy="2582680"/>
+          </a:xfrm>
+          <a:prstGeom prst="rect">
+            <a:avLst/>
+          </a:prstGeom>
+        </p:spPr>
+      </p:pic>
+      <p:sp>
+        <p:nvSpPr>
+          <p:cNvPr id="8" name="TextBox 7"/>
+          <p:cNvSpPr txBox="1"/>
+          <p:nvPr/>
+        </p:nvSpPr>
+        <p:spPr>
+          <a:xfrm>
+            <a:off x="211301" y="1185254"/>
+            <a:ext cx="6659863" cy="3935999"/>
+          </a:xfrm>
+          <a:prstGeom prst="rect">
+            <a:avLst/>
+          </a:prstGeom>
+          <a:noFill/>
+        </p:spPr>
+        <p:txBody>
+          <a:bodyPr wrap="square">
+            <a:spAutoFit/>
+          </a:bodyPr>
+          <a:lstStyle/>
+          <a:p>
+            <a:pPr>
+              <a:buNone/>
+            </a:pPr>
+            <a:r>
+              <a:rPr lang="en-GB" sz="1700" b="1" dirty="0">
+                <a:latin typeface="Aptos"/>
+              </a:rPr>
+              <a:t>Behavioural — Permutation Feature Importance:</a:t>
+            </a:r>
+          </a:p>
+          <a:p>
+            <a:pPr lvl="1">
+              <a:buClr>
+                <a:srgbClr val="E97132"/>
+              </a:buClr>
+              <a:buFont typeface="Arial"/>
+              <a:buChar char="▸"/>
+            </a:pPr>
+            <a:r>
+              <a:rPr lang="en-GB" sz="1600" b="0" dirty="0">
+                <a:latin typeface="Aptos"/>
+              </a:rPr>
+              <a:t>write_entropy_mean: top driver — ransomware encrypts → max entropy</a:t>
+            </a:r>
+          </a:p>
+          <a:p>
+            <a:pPr lvl="1">
+              <a:buClr>
+                <a:srgbClr val="E97132"/>
+              </a:buClr>
+              <a:buFont typeface="Arial"/>
+              <a:buChar char="▸"/>
+            </a:pPr>
+            <a:r>
+              <a:rPr lang="en-GB" sz="1600" b="0" dirty="0">
+                <a:latin typeface="Aptos"/>
+              </a:rPr>
+              <a:t>write_LBA_variance: sequential writes across entire disk</a:t>
+            </a:r>
+          </a:p>
+          <a:p>
+            <a:pPr lvl="1">
+              <a:buClr>
+                <a:srgbClr val="E97132"/>
+              </a:buClr>
+              <a:buFont typeface="Arial"/>
+              <a:buChar char="▸"/>
+            </a:pPr>
+            <a:r>
+              <a:rPr lang="en-GB" sz="1600" b="0" dirty="0">
+                <a:latin typeface="Aptos"/>
+              </a:rPr>
+              <a:t>mem_write_GPA_variance: broad memory pages written uniformly</a:t>
+            </a:r>
+          </a:p>
+          <a:p>
+            <a:pPr>
+              <a:buNone/>
+            </a:pPr>
+            <a:endParaRPr lang="en-GB" sz="1600" b="0" dirty="0">
+              <a:latin typeface="Aptos"/>
+            </a:endParaRPr>
+          </a:p>
+          <a:p>
+            <a:pPr>
+              <a:buNone/>
+            </a:pPr>
+            <a:r>
+              <a:rPr lang="en-GB" sz="1700" b="1" dirty="0">
+                <a:latin typeface="Aptos"/>
+              </a:rPr>
+              <a:t>Semantic — Counterfactual Diagnostics:</a:t>
+            </a:r>
+          </a:p>
+          <a:p>
+            <a:pPr lvl="1">
+              <a:buClr>
+                <a:srgbClr val="E97132"/>
+              </a:buClr>
+              <a:buFont typeface="Arial"/>
+              <a:buChar char="▸"/>
+            </a:pPr>
+            <a:r>
+              <a:rPr lang="en-GB" sz="1600" b="0" dirty="0">
+                <a:latin typeface="Aptos"/>
+              </a:rPr>
+              <a:t>For borderline PE files: minimal embedding shift to flip verdict</a:t>
+            </a:r>
+          </a:p>
+          <a:p>
+            <a:pPr lvl="1">
+              <a:buClr>
+                <a:srgbClr val="E97132"/>
+              </a:buClr>
+              <a:buFont typeface="Arial"/>
+              <a:buChar char="▸"/>
+            </a:pPr>
+            <a:r>
+              <a:rPr lang="en-GB" sz="1600" b="0" dirty="0">
+                <a:latin typeface="Aptos"/>
+              </a:rPr>
+              <a:t>Short L₂ distance → closer to decision boundary → escalate</a:t>
+            </a:r>
+          </a:p>
+          <a:p>
+            <a:pPr lvl="1">
+              <a:buClr>
+                <a:srgbClr val="E97132"/>
+              </a:buClr>
+              <a:buFont typeface="Arial"/>
+              <a:buChar char="▸"/>
+            </a:pPr>
+            <a:r>
+              <a:rPr lang="en-GB" sz="1600" b="0" dirty="0">
+                <a:latin typeface="Aptos"/>
+              </a:rPr>
+              <a:t>Supports audit: 'why was this file flagged?’</a:t>
+            </a:r>
+          </a:p>
+          <a:p>
+            <a:pPr>
+              <a:buNone/>
+            </a:pPr>
+            <a:endParaRPr lang="en-GB" sz="1600" b="0" dirty="0">
+              <a:latin typeface="Aptos"/>
+            </a:endParaRPr>
+          </a:p>
+          <a:p>
+            <a:pPr>
+              <a:buNone/>
+            </a:pPr>
+            <a:r>
+              <a:rPr lang="en-GB" sz="1700" b="1" dirty="0">
+                <a:latin typeface="Aptos"/>
+              </a:rPr>
+              <a:t>Current operational practice:</a:t>
+            </a:r>
+          </a:p>
+          <a:p>
+            <a:pPr lvl="1">
+              <a:buClr>
+                <a:srgbClr val="E97132"/>
+              </a:buClr>
+              <a:buFont typeface="Arial"/>
+              <a:buChar char="▸"/>
+            </a:pPr>
+            <a:r>
+              <a:rPr lang="en-GB" sz="1600" b="0" dirty="0">
+                <a:latin typeface="Aptos"/>
+              </a:rPr>
+              <a:t>Antivirus/EDR: threshold-based scores, no principled uncertainty</a:t>
+            </a:r>
+          </a:p>
+          <a:p>
+            <a:pPr lvl="1">
+              <a:buClr>
+                <a:srgbClr val="E97132"/>
+              </a:buClr>
+              <a:buFont typeface="Arial"/>
+              <a:buChar char="▸"/>
+            </a:pPr>
+            <a:r>
+              <a:rPr lang="en-GB" sz="1600" b="0" dirty="0">
+                <a:latin typeface="Aptos"/>
+              </a:rPr>
+              <a:t>SABRE adds: σ as a first-class decision variable + XAI audit trail</a:t>
+            </a:r>
+          </a:p>
+          <a:p>
+            <a:pPr lvl="1">
+              <a:buClr>
+                <a:srgbClr val="E97132"/>
+              </a:buClr>
+              <a:buFont typeface="Arial"/>
+              <a:buChar char="▸"/>
+            </a:pPr>
+            <a:r>
+              <a:rPr lang="en-GB" sz="1600" b="0" dirty="0">
+                <a:latin typeface="Aptos"/>
+              </a:rPr>
+              <a:t>Analyst can see WHY a sample was escalated, not just THAT it was</a:t>
+            </a:r>
+          </a:p>
+        </p:txBody>
+      </p:sp>
+      <p:pic>
+        <p:nvPicPr>
+          <p:cNvPr id="9" name="Picture 8" descr="fig_semantic_cf_p0_vs_l2.png">
+            <a:extLst>
+              <a:ext uri="{FF2B5EF4-FFF2-40B4-BE49-F238E27FC236}">
+                <a16:creationId xmlns:a16="http://schemas.microsoft.com/office/drawing/2014/main" id="{64BEBB3D-83C1-4FFF-D060-202B242DDA07}"/>
+              </a:ext>
+            </a:extLst>
+          </p:cNvPr>
+          <p:cNvPicPr>
+            <a:picLocks noChangeAspect="1"/>
+          </p:cNvPicPr>
+          <p:nvPr/>
+        </p:nvPicPr>
+        <p:blipFill>
+          <a:blip r:embed="rId3"/>
+          <a:stretch>
+            <a:fillRect/>
+          </a:stretch>
+        </p:blipFill>
+        <p:spPr>
+          <a:xfrm>
+            <a:off x="7273552" y="3976614"/>
+            <a:ext cx="4545453" cy="2562861"/>
+          </a:xfrm>
+          <a:prstGeom prst="rect">
+            <a:avLst/>
+          </a:prstGeom>
+        </p:spPr>
+      </p:pic>
+      <p:pic>
+        <p:nvPicPr>
+          <p:cNvPr id="10" name="Picture 9" descr="Rep_Beh_CFs.png">
+            <a:extLst>
+              <a:ext uri="{FF2B5EF4-FFF2-40B4-BE49-F238E27FC236}">
+                <a16:creationId xmlns:a16="http://schemas.microsoft.com/office/drawing/2014/main" id="{482E88EB-45C9-3B74-A55B-9EF69082CF2B}"/>
+              </a:ext>
+            </a:extLst>
+          </p:cNvPr>
+          <p:cNvPicPr>
+            <a:picLocks noChangeAspect="1"/>
+          </p:cNvPicPr>
+          <p:nvPr/>
+        </p:nvPicPr>
+        <p:blipFill>
+          <a:blip r:embed="rId4"/>
+          <a:stretch>
+            <a:fillRect/>
+          </a:stretch>
+        </p:blipFill>
+        <p:spPr>
+          <a:xfrm>
+            <a:off x="214529" y="5051022"/>
+            <a:ext cx="6515036" cy="1713572"/>
+          </a:xfrm>
+          <a:prstGeom prst="rect">
+            <a:avLst/>
+          </a:prstGeom>
+        </p:spPr>
+      </p:pic>
+    </p:spTree>
+    <p:extLst>
+      <p:ext uri="{BB962C8B-B14F-4D97-AF65-F5344CB8AC3E}">
+        <p14:creationId xmlns:p14="http://schemas.microsoft.com/office/powerpoint/2010/main" val="3311130298"/>
+      </p:ext>
+    </p:extLst>
+  </p:cSld>
+  <p:clrMapOvr>
+    <a:masterClrMapping/>
+  </p:clrMapOvr>
+</p:sld>
+</file>
+
+<file path=ppt/slides/slide9.xml><?xml version="1.0" encoding="utf-8"?>
+<p:sld xmlns:a="http://schemas.openxmlformats.org/drawingml/2006/main" xmlns:r="http://schemas.openxmlformats.org/officeDocument/2006/relationships" xmlns:p="http://schemas.openxmlformats.org/presentationml/2006/main">
+  <p:cSld>
+    <p:spTree>
+      <p:nvGrpSpPr>
+        <p:cNvPr id="1" name=""/>
+        <p:cNvGrpSpPr/>
+        <p:nvPr/>
+      </p:nvGrpSpPr>
+      <p:grpSpPr>
+        <a:xfrm>
+          <a:off x="0" y="0"/>
+          <a:ext cx="0" cy="0"/>
+          <a:chOff x="0" y="0"/>
+          <a:chExt cx="0" cy="0"/>
+        </a:xfrm>
+      </p:grpSpPr>
+      <p:sp>
+        <p:nvSpPr>
+          <p:cNvPr id="2" name="Title 1">
+            <a:extLst>
+              <a:ext uri="{FF2B5EF4-FFF2-40B4-BE49-F238E27FC236}">
+                <a16:creationId xmlns:a16="http://schemas.microsoft.com/office/drawing/2014/main" id="{E2B6838D-3177-9967-ECE2-19A2D96CDC18}"/>
+              </a:ext>
+            </a:extLst>
+          </p:cNvPr>
+          <p:cNvSpPr>
+            <a:spLocks noGrp="1"/>
+          </p:cNvSpPr>
+          <p:nvPr>
+            <p:ph type="title"/>
+          </p:nvPr>
+        </p:nvSpPr>
+        <p:spPr>
+          <a:xfrm>
+            <a:off x="838199" y="365125"/>
+            <a:ext cx="11120021" cy="1325563"/>
+          </a:xfrm>
+        </p:spPr>
+        <p:txBody>
+          <a:bodyPr>
+            <a:normAutofit/>
+          </a:bodyPr>
+          <a:lstStyle/>
+          <a:p>
+            <a:r>
+              <a:rPr sz="2800" b="1">
+                <a:solidFill>
+                  <a:srgbClr val="0E2841"/>
+                </a:solidFill>
+                <a:latin typeface="Aptos Display"/>
+              </a:rPr>
+              <a:t>SABRE-II: Learned Fusion &amp; Bayesian Policy</a:t>
+            </a:r>
+            <a:endParaRPr lang="en-GB" sz="4200"/>
+          </a:p>
+        </p:txBody>
+      </p:sp>
+      <p:sp>
+        <p:nvSpPr>
+          <p:cNvPr id="3" name="Content Placeholder 2">
+            <a:extLst>
+              <a:ext uri="{FF2B5EF4-FFF2-40B4-BE49-F238E27FC236}">
+                <a16:creationId xmlns:a16="http://schemas.microsoft.com/office/drawing/2014/main" id="{AD1B32D5-EDE1-CE2B-5F5F-E2F318B09FF4}"/>
+              </a:ext>
+            </a:extLst>
+          </p:cNvPr>
+          <p:cNvSpPr>
+            <a:spLocks noGrp="1"/>
+          </p:cNvSpPr>
+          <p:nvPr>
+            <p:ph idx="1"/>
+          </p:nvPr>
+        </p:nvSpPr>
+        <p:spPr/>
+        <p:txBody>
+          <a:bodyPr vert="horz" lIns="91440" tIns="45720" rIns="91440" bIns="45720" rtlCol="0" anchor="t">
+            <a:normAutofit/>
+          </a:bodyPr>
+          <a:lstStyle/>
+          <a:p>
+            <a:endParaRPr lang="en-GB"/>
+          </a:p>
+          <a:p>
+            <a:endParaRPr lang="en-GB"/>
+          </a:p>
+          <a:p>
+            <a:endParaRPr lang="en-GB"/>
+          </a:p>
+          <a:p>
+            <a:endParaRPr lang="en-GB"/>
+          </a:p>
+        </p:txBody>
+      </p:sp>
+      <p:cxnSp>
+        <p:nvCxnSpPr>
+          <p:cNvPr id="4" name="Straight Connector 3">
+            <a:extLst>
+              <a:ext uri="{FF2B5EF4-FFF2-40B4-BE49-F238E27FC236}">
+                <a16:creationId xmlns:a16="http://schemas.microsoft.com/office/drawing/2014/main" id="{4333511D-D6DF-3772-7670-B9E9490CE5AA}"/>
               </a:ext>
             </a:extLst>
           </p:cNvPr>
@@ -5384,7 +7147,7 @@
           <p:cNvPr id="5" name="Content Placeholder 1">
             <a:extLst>
               <a:ext uri="{FF2B5EF4-FFF2-40B4-BE49-F238E27FC236}">
-                <a16:creationId xmlns:a16="http://schemas.microsoft.com/office/drawing/2014/main" id="{974B2A6A-D7F9-68BE-2B47-56B70BC4D578}"/>
+                <a16:creationId xmlns:a16="http://schemas.microsoft.com/office/drawing/2014/main" id="{C3A7B5B2-1211-DD57-E6BA-0116FDBAEE01}"/>
               </a:ext>
             </a:extLst>
           </p:cNvPr>
@@ -5395,7 +7158,7 @@
         </p:nvSpPr>
         <p:spPr>
           <a:xfrm>
-            <a:off x="6204936" y="2160000"/>
+            <a:off x="6475012" y="2140709"/>
             <a:ext cx="4967890" cy="3935999"/>
           </a:xfrm>
           <a:prstGeom prst="rect">
@@ -5579,14 +7342,17 @@
           <a:p>
             <a:endParaRPr lang="en-IN"/>
           </a:p>
-        </p:txBody>
-      </p:sp>
-      <p:sp>
-        <p:nvSpPr>
-          <p:cNvPr id="6" name="Content Placeholder 3">
-            <a:extLst>
-              <a:ext uri="{FF2B5EF4-FFF2-40B4-BE49-F238E27FC236}">
-                <a16:creationId xmlns:a16="http://schemas.microsoft.com/office/drawing/2014/main" id="{D08253C5-5C60-EAD9-A631-71B42907A588}"/>
+          <a:p>
+            <a:endParaRPr lang="en-IN"/>
+          </a:p>
+        </p:txBody>
+      </p:sp>
+      <p:sp>
+        <p:nvSpPr>
+          <p:cNvPr id="6" name="Text Placeholder 2">
+            <a:extLst>
+              <a:ext uri="{FF2B5EF4-FFF2-40B4-BE49-F238E27FC236}">
+                <a16:creationId xmlns:a16="http://schemas.microsoft.com/office/drawing/2014/main" id="{AA99F53D-FC05-0507-68F3-7F4D4A1F0DEA}"/>
               </a:ext>
             </a:extLst>
           </p:cNvPr>
@@ -5597,7 +7363,212 @@
         </p:nvSpPr>
         <p:spPr>
           <a:xfrm>
-            <a:off x="828000" y="3038621"/>
+            <a:off x="1098076" y="2140709"/>
+            <a:ext cx="4967889" cy="878621"/>
+          </a:xfrm>
+          <a:prstGeom prst="rect">
+            <a:avLst/>
+          </a:prstGeom>
+        </p:spPr>
+        <p:txBody>
+          <a:bodyPr vert="horz" lIns="0" tIns="0" rIns="0" bIns="0" rtlCol="0">
+            <a:noAutofit/>
+          </a:bodyPr>
+          <a:lstStyle>
+            <a:lvl1pPr marL="0" indent="0" algn="l" defTabSz="914377" rtl="0" eaLnBrk="1" latinLnBrk="0" hangingPunct="1">
+              <a:lnSpc>
+                <a:spcPts val="2400"/>
+              </a:lnSpc>
+              <a:spcBef>
+                <a:spcPts val="0"/>
+              </a:spcBef>
+              <a:spcAft>
+                <a:spcPts val="1200"/>
+              </a:spcAft>
+              <a:buFont typeface="Arial" panose="020B0604020202020204" pitchFamily="34" charset="0"/>
+              <a:buNone/>
+              <a:defRPr sz="2000" kern="1200">
+                <a:solidFill>
+                  <a:srgbClr val="000000"/>
+                </a:solidFill>
+                <a:latin typeface="+mn-lt"/>
+                <a:ea typeface="+mn-ea"/>
+                <a:cs typeface="+mn-cs"/>
+              </a:defRPr>
+            </a:lvl1pPr>
+            <a:lvl2pPr marL="360000" indent="-180000" algn="l" defTabSz="914377" rtl="0" eaLnBrk="1" latinLnBrk="0" hangingPunct="1">
+              <a:lnSpc>
+                <a:spcPct val="100000"/>
+              </a:lnSpc>
+              <a:spcBef>
+                <a:spcPts val="0"/>
+              </a:spcBef>
+              <a:buFont typeface="Arial" panose="020B0604020202020204" pitchFamily="34" charset="0"/>
+              <a:buNone/>
+              <a:defRPr sz="1800" kern="1200">
+                <a:solidFill>
+                  <a:srgbClr val="000000"/>
+                </a:solidFill>
+                <a:latin typeface="+mn-lt"/>
+                <a:ea typeface="+mn-ea"/>
+                <a:cs typeface="+mn-cs"/>
+              </a:defRPr>
+            </a:lvl2pPr>
+            <a:lvl3pPr marL="540000" indent="-180000" algn="l" defTabSz="914377" rtl="0" eaLnBrk="1" latinLnBrk="0" hangingPunct="1">
+              <a:lnSpc>
+                <a:spcPct val="100000"/>
+              </a:lnSpc>
+              <a:spcBef>
+                <a:spcPts val="0"/>
+              </a:spcBef>
+              <a:buFont typeface="Arial" panose="020B0604020202020204" pitchFamily="34" charset="0"/>
+              <a:buChar char="•"/>
+              <a:defRPr sz="1600" kern="1200">
+                <a:solidFill>
+                  <a:srgbClr val="000000"/>
+                </a:solidFill>
+                <a:latin typeface="+mn-lt"/>
+                <a:ea typeface="+mn-ea"/>
+                <a:cs typeface="+mn-cs"/>
+              </a:defRPr>
+            </a:lvl3pPr>
+            <a:lvl4pPr marL="720000" indent="-180000" algn="l" defTabSz="914377" rtl="0" eaLnBrk="1" latinLnBrk="0" hangingPunct="1">
+              <a:lnSpc>
+                <a:spcPct val="100000"/>
+              </a:lnSpc>
+              <a:spcBef>
+                <a:spcPts val="0"/>
+              </a:spcBef>
+              <a:buFont typeface="Arial" panose="020B0604020202020204" pitchFamily="34" charset="0"/>
+              <a:buChar char="•"/>
+              <a:defRPr sz="1400" kern="1200">
+                <a:solidFill>
+                  <a:srgbClr val="000000"/>
+                </a:solidFill>
+                <a:latin typeface="+mn-lt"/>
+                <a:ea typeface="+mn-ea"/>
+                <a:cs typeface="+mn-cs"/>
+              </a:defRPr>
+            </a:lvl4pPr>
+            <a:lvl5pPr marL="900000" indent="-180000" algn="l" defTabSz="914377" rtl="0" eaLnBrk="1" latinLnBrk="0" hangingPunct="1">
+              <a:lnSpc>
+                <a:spcPct val="100000"/>
+              </a:lnSpc>
+              <a:spcBef>
+                <a:spcPts val="0"/>
+              </a:spcBef>
+              <a:buFont typeface="Arial" panose="020B0604020202020204" pitchFamily="34" charset="0"/>
+              <a:buChar char="•"/>
+              <a:defRPr sz="1400" kern="1200">
+                <a:solidFill>
+                  <a:srgbClr val="000000"/>
+                </a:solidFill>
+                <a:latin typeface="+mn-lt"/>
+                <a:ea typeface="+mn-ea"/>
+                <a:cs typeface="+mn-cs"/>
+              </a:defRPr>
+            </a:lvl5pPr>
+            <a:lvl6pPr marL="2514537" indent="-228594" algn="l" defTabSz="914377" rtl="0" eaLnBrk="1" latinLnBrk="0" hangingPunct="1">
+              <a:lnSpc>
+                <a:spcPct val="90000"/>
+              </a:lnSpc>
+              <a:spcBef>
+                <a:spcPts val="500"/>
+              </a:spcBef>
+              <a:buFont typeface="Arial" panose="020B0604020202020204" pitchFamily="34" charset="0"/>
+              <a:buChar char="•"/>
+              <a:defRPr sz="1800" kern="1200">
+                <a:solidFill>
+                  <a:schemeClr val="tx1"/>
+                </a:solidFill>
+                <a:latin typeface="+mn-lt"/>
+                <a:ea typeface="+mn-ea"/>
+                <a:cs typeface="+mn-cs"/>
+              </a:defRPr>
+            </a:lvl6pPr>
+            <a:lvl7pPr marL="2971726" indent="-228594" algn="l" defTabSz="914377" rtl="0" eaLnBrk="1" latinLnBrk="0" hangingPunct="1">
+              <a:lnSpc>
+                <a:spcPct val="90000"/>
+              </a:lnSpc>
+              <a:spcBef>
+                <a:spcPts val="500"/>
+              </a:spcBef>
+              <a:buFont typeface="Arial" panose="020B0604020202020204" pitchFamily="34" charset="0"/>
+              <a:buChar char="•"/>
+              <a:defRPr sz="1800" kern="1200">
+                <a:solidFill>
+                  <a:schemeClr val="tx1"/>
+                </a:solidFill>
+                <a:latin typeface="+mn-lt"/>
+                <a:ea typeface="+mn-ea"/>
+                <a:cs typeface="+mn-cs"/>
+              </a:defRPr>
+            </a:lvl7pPr>
+            <a:lvl8pPr marL="3428914" indent="-228594" algn="l" defTabSz="914377" rtl="0" eaLnBrk="1" latinLnBrk="0" hangingPunct="1">
+              <a:lnSpc>
+                <a:spcPct val="90000"/>
+              </a:lnSpc>
+              <a:spcBef>
+                <a:spcPts val="500"/>
+              </a:spcBef>
+              <a:buFont typeface="Arial" panose="020B0604020202020204" pitchFamily="34" charset="0"/>
+              <a:buChar char="•"/>
+              <a:defRPr sz="1800" kern="1200">
+                <a:solidFill>
+                  <a:schemeClr val="tx1"/>
+                </a:solidFill>
+                <a:latin typeface="+mn-lt"/>
+                <a:ea typeface="+mn-ea"/>
+                <a:cs typeface="+mn-cs"/>
+              </a:defRPr>
+            </a:lvl8pPr>
+            <a:lvl9pPr marL="3886103" indent="-228594" algn="l" defTabSz="914377" rtl="0" eaLnBrk="1" latinLnBrk="0" hangingPunct="1">
+              <a:lnSpc>
+                <a:spcPct val="90000"/>
+              </a:lnSpc>
+              <a:spcBef>
+                <a:spcPts val="500"/>
+              </a:spcBef>
+              <a:buFont typeface="Arial" panose="020B0604020202020204" pitchFamily="34" charset="0"/>
+              <a:buChar char="•"/>
+              <a:defRPr sz="1800" kern="1200">
+                <a:solidFill>
+                  <a:schemeClr val="tx1"/>
+                </a:solidFill>
+                <a:latin typeface="+mn-lt"/>
+                <a:ea typeface="+mn-ea"/>
+                <a:cs typeface="+mn-cs"/>
+              </a:defRPr>
+            </a:lvl9pPr>
+          </a:lstStyle>
+          <a:p>
+            <a:endParaRPr lang="en-US"/>
+          </a:p>
+          <a:p>
+            <a:endParaRPr lang="en-IN"/>
+          </a:p>
+          <a:p>
+            <a:endParaRPr lang="en-IN"/>
+          </a:p>
+        </p:txBody>
+      </p:sp>
+      <p:sp>
+        <p:nvSpPr>
+          <p:cNvPr id="7" name="Content Placeholder 3">
+            <a:extLst>
+              <a:ext uri="{FF2B5EF4-FFF2-40B4-BE49-F238E27FC236}">
+                <a16:creationId xmlns:a16="http://schemas.microsoft.com/office/drawing/2014/main" id="{83EF0573-BB2E-99F2-6A68-73CF7D03094C}"/>
+              </a:ext>
+            </a:extLst>
+          </p:cNvPr>
+          <p:cNvSpPr>
+            <a:spLocks noGrp="1"/>
+          </p:cNvSpPr>
+          <p:nvPr/>
+        </p:nvSpPr>
+        <p:spPr>
+          <a:xfrm>
+            <a:off x="1098076" y="3019330"/>
             <a:ext cx="4967889" cy="3057377"/>
           </a:xfrm>
           <a:prstGeom prst="rect">
@@ -5781,970 +7752,6 @@
           <a:p>
             <a:endParaRPr lang="en-IN"/>
           </a:p>
-        </p:txBody>
-      </p:sp>
-      <p:sp>
-        <p:nvSpPr>
-          <p:cNvPr id="7" name="TextBox 6"/>
-          <p:cNvSpPr txBox="1"/>
-          <p:nvPr/>
-        </p:nvSpPr>
-        <p:spPr>
-          <a:xfrm>
-            <a:off x="457200" y="1188720"/>
-            <a:ext cx="5303520" cy="2286000"/>
-          </a:xfrm>
-          <a:prstGeom prst="rect">
-            <a:avLst/>
-          </a:prstGeom>
-          <a:noFill/>
-        </p:spPr>
-        <p:txBody>
-          <a:bodyPr wrap="square">
-            <a:spAutoFit/>
-          </a:bodyPr>
-          <a:lstStyle/>
-          <a:p>
-            <a:pPr>
-              <a:buNone/>
-            </a:pPr>
-            <a:r>
-              <a:rPr lang="en-GB" sz="1500" b="1" dirty="0">
-                <a:latin typeface="Aptos"/>
-                <a:solidFill>
-                  <a:srgbClr val="0E2841"/>
-                </a:solidFill>
-              </a:rPr>
-              <a:t>Feature Importance (Behavioural):</a:t>
-            </a:r>
-          </a:p>
-          <a:p>
-            <a:pPr lvl="1">
-              <a:buClr>
-                <a:srgbClr val="E97132"/>
-              </a:buClr>
-              <a:buFont typeface="Arial"/>
-              <a:buChar char="▸"/>
-            </a:pPr>
-            <a:r>
-              <a:rPr lang="en-GB" sz="1400" b="0" dirty="0">
-                <a:latin typeface="Aptos"/>
-              </a:rPr>
-              <a:t>write_entropy_mean: encryption → max entropy</a:t>
-            </a:r>
-          </a:p>
-          <a:p>
-            <a:pPr lvl="1">
-              <a:buClr>
-                <a:srgbClr val="E97132"/>
-              </a:buClr>
-              <a:buFont typeface="Arial"/>
-              <a:buChar char="▸"/>
-            </a:pPr>
-            <a:r>
-              <a:rPr lang="en-GB" sz="1400" b="0" dirty="0">
-                <a:latin typeface="Aptos"/>
-              </a:rPr>
-              <a:t>write_LBA_variance: sequential full-disk writes</a:t>
-            </a:r>
-          </a:p>
-          <a:p>
-            <a:pPr lvl="1">
-              <a:buClr>
-                <a:srgbClr val="E97132"/>
-              </a:buClr>
-              <a:buFont typeface="Arial"/>
-              <a:buChar char="▸"/>
-            </a:pPr>
-            <a:r>
-              <a:rPr lang="en-GB" sz="1400" b="0" dirty="0">
-                <a:latin typeface="Aptos"/>
-              </a:rPr>
-              <a:t>mem_write_GPA_variance: uniform memory spread</a:t>
-            </a:r>
-          </a:p>
-          <a:p>
-            <a:pPr>
-              <a:buNone/>
-            </a:pPr>
-            <a:r>
-              <a:rPr lang="en-GB" sz="400" b="0" dirty="0">
-                <a:latin typeface="Aptos"/>
-              </a:rPr>
-              <a:t/>
-            </a:r>
-          </a:p>
-          <a:p>
-            <a:pPr>
-              <a:buNone/>
-            </a:pPr>
-            <a:r>
-              <a:rPr lang="en-GB" sz="1500" b="1" dirty="0">
-                <a:latin typeface="Aptos"/>
-                <a:solidFill>
-                  <a:srgbClr val="0E2841"/>
-                </a:solidFill>
-              </a:rPr>
-              <a:t>Counterfactual Explanations:</a:t>
-            </a:r>
-          </a:p>
-          <a:p>
-            <a:pPr lvl="1">
-              <a:buClr>
-                <a:srgbClr val="E97132"/>
-              </a:buClr>
-              <a:buFont typeface="Arial"/>
-              <a:buChar char="▸"/>
-            </a:pPr>
-            <a:r>
-              <a:rPr lang="en-GB" sz="1400" b="0" dirty="0">
-                <a:latin typeface="Aptos"/>
-              </a:rPr>
-              <a:t>Minimal L₂ shift flips verdict → analyst sees exactly WHY</a:t>
-            </a:r>
-          </a:p>
-          <a:p>
-            <a:pPr lvl="1">
-              <a:buClr>
-                <a:srgbClr val="E97132"/>
-              </a:buClr>
-              <a:buFont typeface="Arial"/>
-              <a:buChar char="▸"/>
-            </a:pPr>
-            <a:r>
-              <a:rPr lang="en-GB" sz="1400" b="0" dirty="0">
-                <a:latin typeface="Aptos"/>
-              </a:rPr>
-              <a:t>Short distance → near decision boundary → ESCALATE</a:t>
-            </a:r>
-          </a:p>
-        </p:txBody>
-      </p:sp>
-      <p:pic>
-        <p:nvPicPr>
-          <p:cNvPr id="8" name="Picture 7" descr="Behaviour_feature_importance.png"/>
-          <p:cNvPicPr>
-            <a:picLocks noChangeAspect="1"/>
-          </p:cNvPicPr>
-          <p:nvPr/>
-        </p:nvPicPr>
-        <p:blipFill>
-          <a:blip r:embed="rId2"/>
-          <a:stretch>
-            <a:fillRect/>
-          </a:stretch>
-        </p:blipFill>
-        <p:spPr>
-          <a:xfrm>
-            <a:off x="5852160" y="1143000"/>
-            <a:ext cx="6126480" cy="2377440"/>
-          </a:xfrm>
-          <a:prstGeom prst="rect">
-            <a:avLst/>
-          </a:prstGeom>
-        </p:spPr>
-      </p:pic>
-      <p:pic>
-        <p:nvPicPr>
-          <p:cNvPr id="9" name="Picture 8" descr="Rep_Beh_CFs.png"/>
-          <p:cNvPicPr>
-            <a:picLocks noChangeAspect="1"/>
-          </p:cNvPicPr>
-          <p:nvPr/>
-        </p:nvPicPr>
-        <p:blipFill>
-          <a:blip r:embed="rId3"/>
-          <a:stretch>
-            <a:fillRect/>
-          </a:stretch>
-        </p:blipFill>
-        <p:spPr>
-          <a:xfrm>
-            <a:off x="457200" y="3749039"/>
-            <a:ext cx="5394960" cy="2834640"/>
-          </a:xfrm>
-          <a:prstGeom prst="rect">
-            <a:avLst/>
-          </a:prstGeom>
-        </p:spPr>
-      </p:pic>
-      <p:pic>
-        <p:nvPicPr>
-          <p:cNvPr id="10" name="Picture 9" descr="fig_semantic_cf_p0_vs_l2.png"/>
-          <p:cNvPicPr>
-            <a:picLocks noChangeAspect="1"/>
-          </p:cNvPicPr>
-          <p:nvPr/>
-        </p:nvPicPr>
-        <p:blipFill>
-          <a:blip r:embed="rId4"/>
-          <a:stretch>
-            <a:fillRect/>
-          </a:stretch>
-        </p:blipFill>
-        <p:spPr>
-          <a:xfrm>
-            <a:off x="5852160" y="3749039"/>
-            <a:ext cx="6126480" cy="2834640"/>
-          </a:xfrm>
-          <a:prstGeom prst="rect">
-            <a:avLst/>
-          </a:prstGeom>
-        </p:spPr>
-      </p:pic>
-    </p:spTree>
-    <p:extLst>
-      <p:ext uri="{BB962C8B-B14F-4D97-AF65-F5344CB8AC3E}">
-        <p14:creationId xmlns:p14="http://schemas.microsoft.com/office/powerpoint/2010/main" val="3311130298"/>
-      </p:ext>
-    </p:extLst>
-  </p:cSld>
-  <p:clrMapOvr>
-    <a:masterClrMapping/>
-  </p:clrMapOvr>
-</p:sld>
-</file>
-
-<file path=ppt/slides/slide7.xml><?xml version="1.0" encoding="utf-8"?>
-<p:sld xmlns:a="http://schemas.openxmlformats.org/drawingml/2006/main" xmlns:r="http://schemas.openxmlformats.org/officeDocument/2006/relationships" xmlns:p="http://schemas.openxmlformats.org/presentationml/2006/main">
-  <p:cSld>
-    <p:spTree>
-      <p:nvGrpSpPr>
-        <p:cNvPr id="1" name=""/>
-        <p:cNvGrpSpPr/>
-        <p:nvPr/>
-      </p:nvGrpSpPr>
-      <p:grpSpPr>
-        <a:xfrm>
-          <a:off x="0" y="0"/>
-          <a:ext cx="0" cy="0"/>
-          <a:chOff x="0" y="0"/>
-          <a:chExt cx="0" cy="0"/>
-        </a:xfrm>
-      </p:grpSpPr>
-      <p:sp>
-        <p:nvSpPr>
-          <p:cNvPr id="2" name="Title 1">
-            <a:extLst>
-              <a:ext uri="{FF2B5EF4-FFF2-40B4-BE49-F238E27FC236}">
-                <a16:creationId xmlns:a16="http://schemas.microsoft.com/office/drawing/2014/main" id="{E2B6838D-3177-9967-ECE2-19A2D96CDC18}"/>
-              </a:ext>
-            </a:extLst>
-          </p:cNvPr>
-          <p:cNvSpPr>
-            <a:spLocks noGrp="1"/>
-          </p:cNvSpPr>
-          <p:nvPr>
-            <p:ph type="title"/>
-          </p:nvPr>
-        </p:nvSpPr>
-        <p:spPr>
-          <a:xfrm>
-            <a:off x="838199" y="365125"/>
-            <a:ext cx="11120021" cy="1325563"/>
-          </a:xfrm>
-        </p:spPr>
-        <p:txBody>
-          <a:bodyPr>
-            <a:normAutofit fontScale="90000"/>
-          </a:bodyPr>
-          <a:lstStyle/>
-          <a:p>
-            <a:r>
-              <a:rPr sz="2800" b="1">
-                <a:solidFill>
-                  <a:srgbClr val="0E2841"/>
-                </a:solidFill>
-                <a:latin typeface="Aptos Display"/>
-              </a:rPr>
-              <a:t>SABRE-II: Learned Fusion &amp; Bayesian Policy</a:t>
-            </a:r>
-            <a:endParaRPr lang="en-GB" sz="4200"/>
-          </a:p>
-        </p:txBody>
-      </p:sp>
-      <p:sp>
-        <p:nvSpPr>
-          <p:cNvPr id="3" name="Content Placeholder 2">
-            <a:extLst>
-              <a:ext uri="{FF2B5EF4-FFF2-40B4-BE49-F238E27FC236}">
-                <a16:creationId xmlns:a16="http://schemas.microsoft.com/office/drawing/2014/main" id="{AD1B32D5-EDE1-CE2B-5F5F-E2F318B09FF4}"/>
-              </a:ext>
-            </a:extLst>
-          </p:cNvPr>
-          <p:cNvSpPr>
-            <a:spLocks noGrp="1"/>
-          </p:cNvSpPr>
-          <p:nvPr>
-            <p:ph idx="1"/>
-          </p:nvPr>
-        </p:nvSpPr>
-        <p:spPr/>
-        <p:txBody>
-          <a:bodyPr vert="horz" lIns="91440" tIns="45720" rIns="91440" bIns="45720" rtlCol="0" anchor="t">
-            <a:normAutofit/>
-          </a:bodyPr>
-          <a:lstStyle/>
-          <a:p>
-            <a:endParaRPr lang="en-GB"/>
-          </a:p>
-          <a:p>
-            <a:endParaRPr lang="en-GB"/>
-          </a:p>
-          <a:p>
-            <a:endParaRPr lang="en-GB"/>
-          </a:p>
-          <a:p>
-            <a:endParaRPr lang="en-GB"/>
-          </a:p>
-        </p:txBody>
-      </p:sp>
-      <p:cxnSp>
-        <p:nvCxnSpPr>
-          <p:cNvPr id="4" name="Straight Connector 3">
-            <a:extLst>
-              <a:ext uri="{FF2B5EF4-FFF2-40B4-BE49-F238E27FC236}">
-                <a16:creationId xmlns:a16="http://schemas.microsoft.com/office/drawing/2014/main" id="{4333511D-D6DF-3772-7670-B9E9490CE5AA}"/>
-              </a:ext>
-            </a:extLst>
-          </p:cNvPr>
-          <p:cNvCxnSpPr/>
-          <p:nvPr/>
-        </p:nvCxnSpPr>
-        <p:spPr>
-          <a:xfrm>
-            <a:off x="196788" y="1364942"/>
-            <a:ext cx="11798423" cy="0"/>
-          </a:xfrm>
-          <a:prstGeom prst="line">
-            <a:avLst/>
-          </a:prstGeom>
-        </p:spPr>
-        <p:style>
-          <a:lnRef idx="2">
-            <a:schemeClr val="accent1"/>
-          </a:lnRef>
-          <a:fillRef idx="0">
-            <a:schemeClr val="accent1"/>
-          </a:fillRef>
-          <a:effectRef idx="1">
-            <a:schemeClr val="accent1"/>
-          </a:effectRef>
-          <a:fontRef idx="minor">
-            <a:schemeClr val="tx1"/>
-          </a:fontRef>
-        </p:style>
-      </p:cxnSp>
-      <p:sp>
-        <p:nvSpPr>
-          <p:cNvPr id="5" name="Content Placeholder 1">
-            <a:extLst>
-              <a:ext uri="{FF2B5EF4-FFF2-40B4-BE49-F238E27FC236}">
-                <a16:creationId xmlns:a16="http://schemas.microsoft.com/office/drawing/2014/main" id="{C3A7B5B2-1211-DD57-E6BA-0116FDBAEE01}"/>
-              </a:ext>
-            </a:extLst>
-          </p:cNvPr>
-          <p:cNvSpPr>
-            <a:spLocks noGrp="1"/>
-          </p:cNvSpPr>
-          <p:nvPr/>
-        </p:nvSpPr>
-        <p:spPr>
-          <a:xfrm>
-            <a:off x="6475012" y="2140709"/>
-            <a:ext cx="4967890" cy="3935999"/>
-          </a:xfrm>
-          <a:prstGeom prst="rect">
-            <a:avLst/>
-          </a:prstGeom>
-        </p:spPr>
-        <p:txBody>
-          <a:bodyPr vert="horz" lIns="91440" tIns="45720" rIns="91440" bIns="45720" rtlCol="0">
-            <a:normAutofit/>
-          </a:bodyPr>
-          <a:lstStyle>
-            <a:lvl1pPr marL="180000" indent="-180000" algn="l" defTabSz="914377" rtl="0" eaLnBrk="1" latinLnBrk="0" hangingPunct="1">
-              <a:lnSpc>
-                <a:spcPct val="100000"/>
-              </a:lnSpc>
-              <a:spcBef>
-                <a:spcPts val="0"/>
-              </a:spcBef>
-              <a:spcAft>
-                <a:spcPts val="0"/>
-              </a:spcAft>
-              <a:buFont typeface="+mj-lt"/>
-              <a:buNone/>
-              <a:defRPr sz="1800" kern="1200">
-                <a:solidFill>
-                  <a:srgbClr val="000000"/>
-                </a:solidFill>
-                <a:latin typeface="+mn-lt"/>
-                <a:ea typeface="+mn-ea"/>
-                <a:cs typeface="+mn-cs"/>
-              </a:defRPr>
-            </a:lvl1pPr>
-            <a:lvl2pPr marL="360000" indent="-180000" algn="l" defTabSz="914377" rtl="0" eaLnBrk="1" latinLnBrk="0" hangingPunct="1">
-              <a:lnSpc>
-                <a:spcPct val="100000"/>
-              </a:lnSpc>
-              <a:spcBef>
-                <a:spcPts val="0"/>
-              </a:spcBef>
-              <a:buFont typeface="Arial" panose="020B0604020202020204" pitchFamily="34" charset="0"/>
-              <a:buChar char="•"/>
-              <a:defRPr sz="1600" kern="1200">
-                <a:solidFill>
-                  <a:srgbClr val="000000"/>
-                </a:solidFill>
-                <a:latin typeface="+mn-lt"/>
-                <a:ea typeface="+mn-ea"/>
-                <a:cs typeface="+mn-cs"/>
-              </a:defRPr>
-            </a:lvl2pPr>
-            <a:lvl3pPr marL="540000" indent="-180000" algn="l" defTabSz="914377" rtl="0" eaLnBrk="1" latinLnBrk="0" hangingPunct="1">
-              <a:lnSpc>
-                <a:spcPct val="100000"/>
-              </a:lnSpc>
-              <a:spcBef>
-                <a:spcPts val="0"/>
-              </a:spcBef>
-              <a:buFont typeface="Arial" panose="020B0604020202020204" pitchFamily="34" charset="0"/>
-              <a:buChar char="•"/>
-              <a:defRPr sz="1400" kern="1200">
-                <a:solidFill>
-                  <a:srgbClr val="000000"/>
-                </a:solidFill>
-                <a:latin typeface="+mn-lt"/>
-                <a:ea typeface="+mn-ea"/>
-                <a:cs typeface="+mn-cs"/>
-              </a:defRPr>
-            </a:lvl3pPr>
-            <a:lvl4pPr marL="720000" indent="-180000" algn="l" defTabSz="914377" rtl="0" eaLnBrk="1" latinLnBrk="0" hangingPunct="1">
-              <a:lnSpc>
-                <a:spcPct val="100000"/>
-              </a:lnSpc>
-              <a:spcBef>
-                <a:spcPts val="0"/>
-              </a:spcBef>
-              <a:buFont typeface="Arial" panose="020B0604020202020204" pitchFamily="34" charset="0"/>
-              <a:buChar char="•"/>
-              <a:defRPr sz="1400" kern="1200">
-                <a:solidFill>
-                  <a:srgbClr val="000000"/>
-                </a:solidFill>
-                <a:latin typeface="+mn-lt"/>
-                <a:ea typeface="+mn-ea"/>
-                <a:cs typeface="+mn-cs"/>
-              </a:defRPr>
-            </a:lvl4pPr>
-            <a:lvl5pPr marL="900000" indent="-180000" algn="l" defTabSz="914377" rtl="0" eaLnBrk="1" latinLnBrk="0" hangingPunct="1">
-              <a:lnSpc>
-                <a:spcPct val="100000"/>
-              </a:lnSpc>
-              <a:spcBef>
-                <a:spcPts val="0"/>
-              </a:spcBef>
-              <a:buFont typeface="Arial" panose="020B0604020202020204" pitchFamily="34" charset="0"/>
-              <a:buChar char="•"/>
-              <a:defRPr sz="1400" kern="1200">
-                <a:solidFill>
-                  <a:srgbClr val="000000"/>
-                </a:solidFill>
-                <a:latin typeface="+mn-lt"/>
-                <a:ea typeface="+mn-ea"/>
-                <a:cs typeface="+mn-cs"/>
-              </a:defRPr>
-            </a:lvl5pPr>
-            <a:lvl6pPr marL="2514537" indent="-228594" algn="l" defTabSz="914377" rtl="0" eaLnBrk="1" latinLnBrk="0" hangingPunct="1">
-              <a:lnSpc>
-                <a:spcPct val="90000"/>
-              </a:lnSpc>
-              <a:spcBef>
-                <a:spcPts val="500"/>
-              </a:spcBef>
-              <a:buFont typeface="Arial" panose="020B0604020202020204" pitchFamily="34" charset="0"/>
-              <a:buChar char="•"/>
-              <a:defRPr sz="1800" kern="1200">
-                <a:solidFill>
-                  <a:schemeClr val="tx1"/>
-                </a:solidFill>
-                <a:latin typeface="+mn-lt"/>
-                <a:ea typeface="+mn-ea"/>
-                <a:cs typeface="+mn-cs"/>
-              </a:defRPr>
-            </a:lvl6pPr>
-            <a:lvl7pPr marL="2971726" indent="-228594" algn="l" defTabSz="914377" rtl="0" eaLnBrk="1" latinLnBrk="0" hangingPunct="1">
-              <a:lnSpc>
-                <a:spcPct val="90000"/>
-              </a:lnSpc>
-              <a:spcBef>
-                <a:spcPts val="500"/>
-              </a:spcBef>
-              <a:buFont typeface="Arial" panose="020B0604020202020204" pitchFamily="34" charset="0"/>
-              <a:buChar char="•"/>
-              <a:defRPr sz="1800" kern="1200">
-                <a:solidFill>
-                  <a:schemeClr val="tx1"/>
-                </a:solidFill>
-                <a:latin typeface="+mn-lt"/>
-                <a:ea typeface="+mn-ea"/>
-                <a:cs typeface="+mn-cs"/>
-              </a:defRPr>
-            </a:lvl7pPr>
-            <a:lvl8pPr marL="3428914" indent="-228594" algn="l" defTabSz="914377" rtl="0" eaLnBrk="1" latinLnBrk="0" hangingPunct="1">
-              <a:lnSpc>
-                <a:spcPct val="90000"/>
-              </a:lnSpc>
-              <a:spcBef>
-                <a:spcPts val="500"/>
-              </a:spcBef>
-              <a:buFont typeface="Arial" panose="020B0604020202020204" pitchFamily="34" charset="0"/>
-              <a:buChar char="•"/>
-              <a:defRPr sz="1800" kern="1200">
-                <a:solidFill>
-                  <a:schemeClr val="tx1"/>
-                </a:solidFill>
-                <a:latin typeface="+mn-lt"/>
-                <a:ea typeface="+mn-ea"/>
-                <a:cs typeface="+mn-cs"/>
-              </a:defRPr>
-            </a:lvl8pPr>
-            <a:lvl9pPr marL="3886103" indent="-228594" algn="l" defTabSz="914377" rtl="0" eaLnBrk="1" latinLnBrk="0" hangingPunct="1">
-              <a:lnSpc>
-                <a:spcPct val="90000"/>
-              </a:lnSpc>
-              <a:spcBef>
-                <a:spcPts val="500"/>
-              </a:spcBef>
-              <a:buFont typeface="Arial" panose="020B0604020202020204" pitchFamily="34" charset="0"/>
-              <a:buChar char="•"/>
-              <a:defRPr sz="1800" kern="1200">
-                <a:solidFill>
-                  <a:schemeClr val="tx1"/>
-                </a:solidFill>
-                <a:latin typeface="+mn-lt"/>
-                <a:ea typeface="+mn-ea"/>
-                <a:cs typeface="+mn-cs"/>
-              </a:defRPr>
-            </a:lvl9pPr>
-          </a:lstStyle>
-          <a:p>
-            <a:endParaRPr lang="en-US"/>
-          </a:p>
-          <a:p>
-            <a:endParaRPr lang="en-IN"/>
-          </a:p>
-          <a:p>
-            <a:endParaRPr lang="en-IN"/>
-          </a:p>
-        </p:txBody>
-      </p:sp>
-      <p:sp>
-        <p:nvSpPr>
-          <p:cNvPr id="6" name="Text Placeholder 2">
-            <a:extLst>
-              <a:ext uri="{FF2B5EF4-FFF2-40B4-BE49-F238E27FC236}">
-                <a16:creationId xmlns:a16="http://schemas.microsoft.com/office/drawing/2014/main" id="{AA99F53D-FC05-0507-68F3-7F4D4A1F0DEA}"/>
-              </a:ext>
-            </a:extLst>
-          </p:cNvPr>
-          <p:cNvSpPr>
-            <a:spLocks noGrp="1"/>
-          </p:cNvSpPr>
-          <p:nvPr/>
-        </p:nvSpPr>
-        <p:spPr>
-          <a:xfrm>
-            <a:off x="1098076" y="2140709"/>
-            <a:ext cx="4967889" cy="878621"/>
-          </a:xfrm>
-          <a:prstGeom prst="rect">
-            <a:avLst/>
-          </a:prstGeom>
-        </p:spPr>
-        <p:txBody>
-          <a:bodyPr vert="horz" lIns="0" tIns="0" rIns="0" bIns="0" rtlCol="0">
-            <a:noAutofit/>
-          </a:bodyPr>
-          <a:lstStyle>
-            <a:lvl1pPr marL="0" indent="0" algn="l" defTabSz="914377" rtl="0" eaLnBrk="1" latinLnBrk="0" hangingPunct="1">
-              <a:lnSpc>
-                <a:spcPts val="2400"/>
-              </a:lnSpc>
-              <a:spcBef>
-                <a:spcPts val="0"/>
-              </a:spcBef>
-              <a:spcAft>
-                <a:spcPts val="1200"/>
-              </a:spcAft>
-              <a:buFont typeface="Arial" panose="020B0604020202020204" pitchFamily="34" charset="0"/>
-              <a:buNone/>
-              <a:defRPr sz="2000" kern="1200">
-                <a:solidFill>
-                  <a:srgbClr val="000000"/>
-                </a:solidFill>
-                <a:latin typeface="+mn-lt"/>
-                <a:ea typeface="+mn-ea"/>
-                <a:cs typeface="+mn-cs"/>
-              </a:defRPr>
-            </a:lvl1pPr>
-            <a:lvl2pPr marL="360000" indent="-180000" algn="l" defTabSz="914377" rtl="0" eaLnBrk="1" latinLnBrk="0" hangingPunct="1">
-              <a:lnSpc>
-                <a:spcPct val="100000"/>
-              </a:lnSpc>
-              <a:spcBef>
-                <a:spcPts val="0"/>
-              </a:spcBef>
-              <a:buFont typeface="Arial" panose="020B0604020202020204" pitchFamily="34" charset="0"/>
-              <a:buNone/>
-              <a:defRPr sz="1800" kern="1200">
-                <a:solidFill>
-                  <a:srgbClr val="000000"/>
-                </a:solidFill>
-                <a:latin typeface="+mn-lt"/>
-                <a:ea typeface="+mn-ea"/>
-                <a:cs typeface="+mn-cs"/>
-              </a:defRPr>
-            </a:lvl2pPr>
-            <a:lvl3pPr marL="540000" indent="-180000" algn="l" defTabSz="914377" rtl="0" eaLnBrk="1" latinLnBrk="0" hangingPunct="1">
-              <a:lnSpc>
-                <a:spcPct val="100000"/>
-              </a:lnSpc>
-              <a:spcBef>
-                <a:spcPts val="0"/>
-              </a:spcBef>
-              <a:buFont typeface="Arial" panose="020B0604020202020204" pitchFamily="34" charset="0"/>
-              <a:buChar char="•"/>
-              <a:defRPr sz="1600" kern="1200">
-                <a:solidFill>
-                  <a:srgbClr val="000000"/>
-                </a:solidFill>
-                <a:latin typeface="+mn-lt"/>
-                <a:ea typeface="+mn-ea"/>
-                <a:cs typeface="+mn-cs"/>
-              </a:defRPr>
-            </a:lvl3pPr>
-            <a:lvl4pPr marL="720000" indent="-180000" algn="l" defTabSz="914377" rtl="0" eaLnBrk="1" latinLnBrk="0" hangingPunct="1">
-              <a:lnSpc>
-                <a:spcPct val="100000"/>
-              </a:lnSpc>
-              <a:spcBef>
-                <a:spcPts val="0"/>
-              </a:spcBef>
-              <a:buFont typeface="Arial" panose="020B0604020202020204" pitchFamily="34" charset="0"/>
-              <a:buChar char="•"/>
-              <a:defRPr sz="1400" kern="1200">
-                <a:solidFill>
-                  <a:srgbClr val="000000"/>
-                </a:solidFill>
-                <a:latin typeface="+mn-lt"/>
-                <a:ea typeface="+mn-ea"/>
-                <a:cs typeface="+mn-cs"/>
-              </a:defRPr>
-            </a:lvl4pPr>
-            <a:lvl5pPr marL="900000" indent="-180000" algn="l" defTabSz="914377" rtl="0" eaLnBrk="1" latinLnBrk="0" hangingPunct="1">
-              <a:lnSpc>
-                <a:spcPct val="100000"/>
-              </a:lnSpc>
-              <a:spcBef>
-                <a:spcPts val="0"/>
-              </a:spcBef>
-              <a:buFont typeface="Arial" panose="020B0604020202020204" pitchFamily="34" charset="0"/>
-              <a:buChar char="•"/>
-              <a:defRPr sz="1400" kern="1200">
-                <a:solidFill>
-                  <a:srgbClr val="000000"/>
-                </a:solidFill>
-                <a:latin typeface="+mn-lt"/>
-                <a:ea typeface="+mn-ea"/>
-                <a:cs typeface="+mn-cs"/>
-              </a:defRPr>
-            </a:lvl5pPr>
-            <a:lvl6pPr marL="2514537" indent="-228594" algn="l" defTabSz="914377" rtl="0" eaLnBrk="1" latinLnBrk="0" hangingPunct="1">
-              <a:lnSpc>
-                <a:spcPct val="90000"/>
-              </a:lnSpc>
-              <a:spcBef>
-                <a:spcPts val="500"/>
-              </a:spcBef>
-              <a:buFont typeface="Arial" panose="020B0604020202020204" pitchFamily="34" charset="0"/>
-              <a:buChar char="•"/>
-              <a:defRPr sz="1800" kern="1200">
-                <a:solidFill>
-                  <a:schemeClr val="tx1"/>
-                </a:solidFill>
-                <a:latin typeface="+mn-lt"/>
-                <a:ea typeface="+mn-ea"/>
-                <a:cs typeface="+mn-cs"/>
-              </a:defRPr>
-            </a:lvl6pPr>
-            <a:lvl7pPr marL="2971726" indent="-228594" algn="l" defTabSz="914377" rtl="0" eaLnBrk="1" latinLnBrk="0" hangingPunct="1">
-              <a:lnSpc>
-                <a:spcPct val="90000"/>
-              </a:lnSpc>
-              <a:spcBef>
-                <a:spcPts val="500"/>
-              </a:spcBef>
-              <a:buFont typeface="Arial" panose="020B0604020202020204" pitchFamily="34" charset="0"/>
-              <a:buChar char="•"/>
-              <a:defRPr sz="1800" kern="1200">
-                <a:solidFill>
-                  <a:schemeClr val="tx1"/>
-                </a:solidFill>
-                <a:latin typeface="+mn-lt"/>
-                <a:ea typeface="+mn-ea"/>
-                <a:cs typeface="+mn-cs"/>
-              </a:defRPr>
-            </a:lvl7pPr>
-            <a:lvl8pPr marL="3428914" indent="-228594" algn="l" defTabSz="914377" rtl="0" eaLnBrk="1" latinLnBrk="0" hangingPunct="1">
-              <a:lnSpc>
-                <a:spcPct val="90000"/>
-              </a:lnSpc>
-              <a:spcBef>
-                <a:spcPts val="500"/>
-              </a:spcBef>
-              <a:buFont typeface="Arial" panose="020B0604020202020204" pitchFamily="34" charset="0"/>
-              <a:buChar char="•"/>
-              <a:defRPr sz="1800" kern="1200">
-                <a:solidFill>
-                  <a:schemeClr val="tx1"/>
-                </a:solidFill>
-                <a:latin typeface="+mn-lt"/>
-                <a:ea typeface="+mn-ea"/>
-                <a:cs typeface="+mn-cs"/>
-              </a:defRPr>
-            </a:lvl8pPr>
-            <a:lvl9pPr marL="3886103" indent="-228594" algn="l" defTabSz="914377" rtl="0" eaLnBrk="1" latinLnBrk="0" hangingPunct="1">
-              <a:lnSpc>
-                <a:spcPct val="90000"/>
-              </a:lnSpc>
-              <a:spcBef>
-                <a:spcPts val="500"/>
-              </a:spcBef>
-              <a:buFont typeface="Arial" panose="020B0604020202020204" pitchFamily="34" charset="0"/>
-              <a:buChar char="•"/>
-              <a:defRPr sz="1800" kern="1200">
-                <a:solidFill>
-                  <a:schemeClr val="tx1"/>
-                </a:solidFill>
-                <a:latin typeface="+mn-lt"/>
-                <a:ea typeface="+mn-ea"/>
-                <a:cs typeface="+mn-cs"/>
-              </a:defRPr>
-            </a:lvl9pPr>
-          </a:lstStyle>
-          <a:p>
-            <a:endParaRPr lang="en-US"/>
-          </a:p>
-          <a:p>
-            <a:endParaRPr lang="en-IN"/>
-          </a:p>
-          <a:p>
-            <a:endParaRPr lang="en-IN"/>
-          </a:p>
-        </p:txBody>
-      </p:sp>
-      <p:sp>
-        <p:nvSpPr>
-          <p:cNvPr id="7" name="Content Placeholder 3">
-            <a:extLst>
-              <a:ext uri="{FF2B5EF4-FFF2-40B4-BE49-F238E27FC236}">
-                <a16:creationId xmlns:a16="http://schemas.microsoft.com/office/drawing/2014/main" id="{83EF0573-BB2E-99F2-6A68-73CF7D03094C}"/>
-              </a:ext>
-            </a:extLst>
-          </p:cNvPr>
-          <p:cNvSpPr>
-            <a:spLocks noGrp="1"/>
-          </p:cNvSpPr>
-          <p:nvPr/>
-        </p:nvSpPr>
-        <p:spPr>
-          <a:xfrm>
-            <a:off x="1098076" y="3019330"/>
-            <a:ext cx="4967889" cy="3057377"/>
-          </a:xfrm>
-          <a:prstGeom prst="rect">
-            <a:avLst/>
-          </a:prstGeom>
-        </p:spPr>
-        <p:txBody>
-          <a:bodyPr vert="horz" lIns="0" tIns="0" rIns="0" bIns="0" rtlCol="0">
-            <a:noAutofit/>
-          </a:bodyPr>
-          <a:lstStyle>
-            <a:lvl1pPr marL="180000" indent="-180000" algn="l" defTabSz="914377" rtl="0" eaLnBrk="1" latinLnBrk="0" hangingPunct="1">
-              <a:lnSpc>
-                <a:spcPct val="100000"/>
-              </a:lnSpc>
-              <a:spcBef>
-                <a:spcPts val="0"/>
-              </a:spcBef>
-              <a:spcAft>
-                <a:spcPts val="0"/>
-              </a:spcAft>
-              <a:buFont typeface="Arial" panose="020B0604020202020204" pitchFamily="34" charset="0"/>
-              <a:buChar char="•"/>
-              <a:defRPr sz="2000" kern="1200">
-                <a:solidFill>
-                  <a:srgbClr val="000000"/>
-                </a:solidFill>
-                <a:latin typeface="+mn-lt"/>
-                <a:ea typeface="+mn-ea"/>
-                <a:cs typeface="+mn-cs"/>
-              </a:defRPr>
-            </a:lvl1pPr>
-            <a:lvl2pPr marL="360000" indent="-180000" algn="l" defTabSz="914377" rtl="0" eaLnBrk="1" latinLnBrk="0" hangingPunct="1">
-              <a:lnSpc>
-                <a:spcPct val="100000"/>
-              </a:lnSpc>
-              <a:spcBef>
-                <a:spcPts val="0"/>
-              </a:spcBef>
-              <a:buFont typeface="Arial" panose="020B0604020202020204" pitchFamily="34" charset="0"/>
-              <a:buChar char="•"/>
-              <a:defRPr sz="1800" kern="1200">
-                <a:solidFill>
-                  <a:srgbClr val="000000"/>
-                </a:solidFill>
-                <a:latin typeface="+mn-lt"/>
-                <a:ea typeface="+mn-ea"/>
-                <a:cs typeface="+mn-cs"/>
-              </a:defRPr>
-            </a:lvl2pPr>
-            <a:lvl3pPr marL="540000" indent="-180000" algn="l" defTabSz="914377" rtl="0" eaLnBrk="1" latinLnBrk="0" hangingPunct="1">
-              <a:lnSpc>
-                <a:spcPct val="100000"/>
-              </a:lnSpc>
-              <a:spcBef>
-                <a:spcPts val="0"/>
-              </a:spcBef>
-              <a:buFont typeface="Arial" panose="020B0604020202020204" pitchFamily="34" charset="0"/>
-              <a:buChar char="•"/>
-              <a:defRPr sz="1600" kern="1200">
-                <a:solidFill>
-                  <a:srgbClr val="000000"/>
-                </a:solidFill>
-                <a:latin typeface="+mn-lt"/>
-                <a:ea typeface="+mn-ea"/>
-                <a:cs typeface="+mn-cs"/>
-              </a:defRPr>
-            </a:lvl3pPr>
-            <a:lvl4pPr marL="720000" indent="-180000" algn="l" defTabSz="914377" rtl="0" eaLnBrk="1" latinLnBrk="0" hangingPunct="1">
-              <a:lnSpc>
-                <a:spcPct val="100000"/>
-              </a:lnSpc>
-              <a:spcBef>
-                <a:spcPts val="0"/>
-              </a:spcBef>
-              <a:buFont typeface="Arial" panose="020B0604020202020204" pitchFamily="34" charset="0"/>
-              <a:buChar char="•"/>
-              <a:defRPr sz="1400" kern="1200">
-                <a:solidFill>
-                  <a:srgbClr val="000000"/>
-                </a:solidFill>
-                <a:latin typeface="+mn-lt"/>
-                <a:ea typeface="+mn-ea"/>
-                <a:cs typeface="+mn-cs"/>
-              </a:defRPr>
-            </a:lvl4pPr>
-            <a:lvl5pPr marL="900000" indent="-180000" algn="l" defTabSz="914377" rtl="0" eaLnBrk="1" latinLnBrk="0" hangingPunct="1">
-              <a:lnSpc>
-                <a:spcPct val="100000"/>
-              </a:lnSpc>
-              <a:spcBef>
-                <a:spcPts val="0"/>
-              </a:spcBef>
-              <a:buFont typeface="Arial" panose="020B0604020202020204" pitchFamily="34" charset="0"/>
-              <a:buChar char="•"/>
-              <a:defRPr sz="1400" kern="1200">
-                <a:solidFill>
-                  <a:srgbClr val="000000"/>
-                </a:solidFill>
-                <a:latin typeface="+mn-lt"/>
-                <a:ea typeface="+mn-ea"/>
-                <a:cs typeface="+mn-cs"/>
-              </a:defRPr>
-            </a:lvl5pPr>
-            <a:lvl6pPr marL="2514537" indent="-228594" algn="l" defTabSz="914377" rtl="0" eaLnBrk="1" latinLnBrk="0" hangingPunct="1">
-              <a:lnSpc>
-                <a:spcPct val="90000"/>
-              </a:lnSpc>
-              <a:spcBef>
-                <a:spcPts val="500"/>
-              </a:spcBef>
-              <a:buFont typeface="Arial" panose="020B0604020202020204" pitchFamily="34" charset="0"/>
-              <a:buChar char="•"/>
-              <a:defRPr sz="1800" kern="1200">
-                <a:solidFill>
-                  <a:schemeClr val="tx1"/>
-                </a:solidFill>
-                <a:latin typeface="+mn-lt"/>
-                <a:ea typeface="+mn-ea"/>
-                <a:cs typeface="+mn-cs"/>
-              </a:defRPr>
-            </a:lvl6pPr>
-            <a:lvl7pPr marL="2971726" indent="-228594" algn="l" defTabSz="914377" rtl="0" eaLnBrk="1" latinLnBrk="0" hangingPunct="1">
-              <a:lnSpc>
-                <a:spcPct val="90000"/>
-              </a:lnSpc>
-              <a:spcBef>
-                <a:spcPts val="500"/>
-              </a:spcBef>
-              <a:buFont typeface="Arial" panose="020B0604020202020204" pitchFamily="34" charset="0"/>
-              <a:buChar char="•"/>
-              <a:defRPr sz="1800" kern="1200">
-                <a:solidFill>
-                  <a:schemeClr val="tx1"/>
-                </a:solidFill>
-                <a:latin typeface="+mn-lt"/>
-                <a:ea typeface="+mn-ea"/>
-                <a:cs typeface="+mn-cs"/>
-              </a:defRPr>
-            </a:lvl7pPr>
-            <a:lvl8pPr marL="3428914" indent="-228594" algn="l" defTabSz="914377" rtl="0" eaLnBrk="1" latinLnBrk="0" hangingPunct="1">
-              <a:lnSpc>
-                <a:spcPct val="90000"/>
-              </a:lnSpc>
-              <a:spcBef>
-                <a:spcPts val="500"/>
-              </a:spcBef>
-              <a:buFont typeface="Arial" panose="020B0604020202020204" pitchFamily="34" charset="0"/>
-              <a:buChar char="•"/>
-              <a:defRPr sz="1800" kern="1200">
-                <a:solidFill>
-                  <a:schemeClr val="tx1"/>
-                </a:solidFill>
-                <a:latin typeface="+mn-lt"/>
-                <a:ea typeface="+mn-ea"/>
-                <a:cs typeface="+mn-cs"/>
-              </a:defRPr>
-            </a:lvl8pPr>
-            <a:lvl9pPr marL="3886103" indent="-228594" algn="l" defTabSz="914377" rtl="0" eaLnBrk="1" latinLnBrk="0" hangingPunct="1">
-              <a:lnSpc>
-                <a:spcPct val="90000"/>
-              </a:lnSpc>
-              <a:spcBef>
-                <a:spcPts val="500"/>
-              </a:spcBef>
-              <a:buFont typeface="Arial" panose="020B0604020202020204" pitchFamily="34" charset="0"/>
-              <a:buChar char="•"/>
-              <a:defRPr sz="1800" kern="1200">
-                <a:solidFill>
-                  <a:schemeClr val="tx1"/>
-                </a:solidFill>
-                <a:latin typeface="+mn-lt"/>
-                <a:ea typeface="+mn-ea"/>
-                <a:cs typeface="+mn-cs"/>
-              </a:defRPr>
-            </a:lvl9pPr>
-          </a:lstStyle>
-          <a:p>
-            <a:endParaRPr lang="en-US"/>
-          </a:p>
-          <a:p>
-            <a:endParaRPr lang="en-IN"/>
-          </a:p>
           <a:p>
             <a:endParaRPr lang="en-IN"/>
           </a:p>
@@ -6758,8 +7765,8 @@
         </p:nvSpPr>
         <p:spPr>
           <a:xfrm>
-            <a:off x="457200" y="1188720"/>
-            <a:ext cx="5394960" cy="411480"/>
+            <a:off x="457200" y="1513187"/>
+            <a:ext cx="5029200" cy="411480"/>
           </a:xfrm>
           <a:prstGeom prst="rect">
             <a:avLst/>
@@ -6786,7 +7793,7 @@
           </a:fontRef>
         </p:style>
         <p:txBody>
-          <a:bodyPr rtlCol="0" anchor="ctr" wrap="square"/>
+          <a:bodyPr wrap="square" rtlCol="0" anchor="ctr"/>
           <a:lstStyle/>
           <a:p>
             <a:pPr algn="ctr"/>
@@ -6810,8 +7817,8 @@
         </p:nvSpPr>
         <p:spPr>
           <a:xfrm>
-            <a:off x="457200" y="1645920"/>
-            <a:ext cx="5394960" cy="2560320"/>
+            <a:off x="457199" y="2058876"/>
+            <a:ext cx="5845277" cy="1246495"/>
           </a:xfrm>
           <a:prstGeom prst="rect">
             <a:avLst/>
@@ -6834,9 +7841,6 @@
             <a:r>
               <a:rPr lang="en-GB" sz="1500" b="0" dirty="0">
                 <a:latin typeface="Aptos"/>
-                <a:solidFill>
-                  <a:srgbClr val="1E293B"/>
-                </a:solidFill>
               </a:rPr>
               <a:t>Mean score fusion (equal weights)</a:t>
             </a:r>
@@ -6852,9 +7856,6 @@
             <a:r>
               <a:rPr lang="en-GB" sz="1500" b="0" dirty="0">
                 <a:latin typeface="Aptos"/>
-                <a:solidFill>
-                  <a:srgbClr val="1E293B"/>
-                </a:solidFill>
               </a:rPr>
               <a:t>Fixed hand-tuned triage thresholds τ, κ</a:t>
             </a:r>
@@ -6870,9 +7871,6 @@
             <a:r>
               <a:rPr lang="en-GB" sz="1500" b="0" dirty="0">
                 <a:latin typeface="Aptos"/>
-                <a:solidFill>
-                  <a:srgbClr val="1E293B"/>
-                </a:solidFill>
               </a:rPr>
               <a:t>2 agents: Semantic + Behavioural</a:t>
             </a:r>
@@ -6888,9 +7886,6 @@
             <a:r>
               <a:rPr lang="en-GB" sz="1500" b="0" dirty="0">
                 <a:latin typeface="Aptos"/>
-                <a:solidFill>
-                  <a:srgbClr val="1E293B"/>
-                </a:solidFill>
               </a:rPr>
               <a:t>MC Dropout uncertainty per agent</a:t>
             </a:r>
@@ -6906,9 +7901,6 @@
             <a:r>
               <a:rPr lang="en-GB" sz="1500" b="0" dirty="0">
                 <a:latin typeface="Aptos"/>
-                <a:solidFill>
-                  <a:srgbClr val="1E293B"/>
-                </a:solidFill>
               </a:rPr>
               <a:t>AUROC 0.963 (random), 0.706 (family holdout)</a:t>
             </a:r>
@@ -6923,8 +7915,8 @@
         </p:nvSpPr>
         <p:spPr>
           <a:xfrm>
-            <a:off x="6126480" y="1188720"/>
-            <a:ext cx="5577840" cy="411480"/>
+            <a:off x="6302476" y="1473856"/>
+            <a:ext cx="5401844" cy="411480"/>
           </a:xfrm>
           <a:prstGeom prst="rect">
             <a:avLst/>
@@ -6951,7 +7943,7 @@
           </a:fontRef>
         </p:style>
         <p:txBody>
-          <a:bodyPr rtlCol="0" anchor="ctr" wrap="square"/>
+          <a:bodyPr wrap="square" rtlCol="0" anchor="ctr"/>
           <a:lstStyle/>
           <a:p>
             <a:pPr algn="ctr"/>
@@ -6975,8 +7967,8 @@
         </p:nvSpPr>
         <p:spPr>
           <a:xfrm>
-            <a:off x="6126480" y="1645920"/>
-            <a:ext cx="5577840" cy="2560320"/>
+            <a:off x="6126480" y="1990054"/>
+            <a:ext cx="5831740" cy="1938992"/>
           </a:xfrm>
           <a:prstGeom prst="rect">
             <a:avLst/>
@@ -6999,9 +7991,6 @@
             <a:r>
               <a:rPr lang="en-GB" sz="1500" b="0" dirty="0">
                 <a:latin typeface="Aptos"/>
-                <a:solidFill>
-                  <a:srgbClr val="1E293B"/>
-                </a:solidFill>
               </a:rPr>
               <a:t>Decision MLP replaces mean fusion</a:t>
             </a:r>
@@ -7032,9 +8021,6 @@
             <a:r>
               <a:rPr lang="en-GB" sz="1500" b="0" dirty="0">
                 <a:latin typeface="Aptos"/>
-                <a:solidFill>
-                  <a:srgbClr val="1E293B"/>
-                </a:solidFill>
               </a:rPr>
               <a:t>CTGAN score-space augmentation</a:t>
             </a:r>
@@ -7050,9 +8036,6 @@
             <a:r>
               <a:rPr lang="en-GB" sz="1500" b="0" dirty="0">
                 <a:latin typeface="Aptos"/>
-                <a:solidFill>
-                  <a:srgbClr val="1E293B"/>
-                </a:solidFill>
               </a:rPr>
               <a:t>Bayesian TPE policy optimisation (300 trials)</a:t>
             </a:r>
@@ -7098,9 +8081,6 @@
             <a:r>
               <a:rPr lang="en-GB" sz="1500" b="0" dirty="0">
                 <a:latin typeface="Aptos"/>
-                <a:solidFill>
-                  <a:srgbClr val="1E293B"/>
-                </a:solidFill>
               </a:rPr>
               <a:t>Peer Consultation: prevents knowledge collapse</a:t>
             </a:r>
@@ -7116,9 +8096,6 @@
             <a:r>
               <a:rPr lang="en-GB" sz="1500" b="0" dirty="0">
                 <a:latin typeface="Aptos"/>
-                <a:solidFill>
-                  <a:srgbClr val="1E293B"/>
-                </a:solidFill>
               </a:rPr>
               <a:t>AUROC 0.975 (random), 0.980 (temporal)</a:t>
             </a:r>
@@ -7133,7 +8110,7 @@
         </p:nvSpPr>
         <p:spPr>
           <a:xfrm>
-            <a:off x="5486400" y="1691640"/>
+            <a:off x="5692880" y="2753524"/>
             <a:ext cx="594360" cy="320040"/>
           </a:xfrm>
           <a:prstGeom prst="rect">
@@ -7161,12 +8138,12 @@
           </a:fontRef>
         </p:style>
         <p:txBody>
-          <a:bodyPr rtlCol="0" anchor="ctr" wrap="square"/>
+          <a:bodyPr wrap="square" rtlCol="0" anchor="ctr"/>
           <a:lstStyle/>
           <a:p>
             <a:pPr algn="ctr"/>
             <a:r>
-              <a:rPr sz="2000" b="1">
+              <a:rPr sz="2000" b="1" dirty="0">
                 <a:solidFill>
                   <a:srgbClr val="FFFFFF"/>
                 </a:solidFill>
@@ -7193,8 +8170,8 @@
         </p:blipFill>
         <p:spPr>
           <a:xfrm>
-            <a:off x="457200" y="4251960"/>
-            <a:ext cx="11247120" cy="2286000"/>
+            <a:off x="1163114" y="4060082"/>
+            <a:ext cx="9943896" cy="2547189"/>
           </a:xfrm>
           <a:prstGeom prst="rect">
             <a:avLst/>
@@ -7207,877 +8184,6 @@
         <p14:creationId xmlns:p14="http://schemas.microsoft.com/office/powerpoint/2010/main" val="2140214897"/>
       </p:ext>
     </p:extLst>
-  </p:cSld>
-  <p:clrMapOvr>
-    <a:masterClrMapping/>
-  </p:clrMapOvr>
-</p:sld>
-</file>
-
-<file path=ppt/slides/slide8.xml><?xml version="1.0" encoding="utf-8"?>
-<p:sld xmlns:a="http://schemas.openxmlformats.org/drawingml/2006/main" xmlns:r="http://schemas.openxmlformats.org/officeDocument/2006/relationships" xmlns:p="http://schemas.openxmlformats.org/presentationml/2006/main">
-  <p:cSld>
-    <p:spTree>
-      <p:nvGrpSpPr>
-        <p:cNvPr id="1" name=""/>
-        <p:cNvGrpSpPr/>
-        <p:nvPr/>
-      </p:nvGrpSpPr>
-      <p:grpSpPr>
-        <a:xfrm>
-          <a:off x="0" y="0"/>
-          <a:ext cx="0" cy="0"/>
-          <a:chOff x="0" y="0"/>
-          <a:chExt cx="0" cy="0"/>
-        </a:xfrm>
-      </p:grpSpPr>
-      <p:sp>
-        <p:nvSpPr>
-          <p:cNvPr id="2" name="Title 1">
-            <a:extLst>
-              <a:ext uri="{FF2B5EF4-FFF2-40B4-BE49-F238E27FC236}">
-                <a16:creationId xmlns:a16="http://schemas.microsoft.com/office/drawing/2014/main" id="{8678956E-CFF4-0DC3-78D1-CCFA8FD13376}"/>
-              </a:ext>
-            </a:extLst>
-          </p:cNvPr>
-          <p:cNvSpPr>
-            <a:spLocks noGrp="1"/>
-          </p:cNvSpPr>
-          <p:nvPr>
-            <p:ph type="title"/>
-          </p:nvPr>
-        </p:nvSpPr>
-        <p:spPr/>
-        <p:txBody>
-          <a:bodyPr>
-            <a:normAutofit fontScale="90000"/>
-          </a:bodyPr>
-          <a:lstStyle/>
-          <a:p>
-            <a:r>
-              <a:rPr sz="2800" b="1">
-                <a:solidFill>
-                  <a:srgbClr val="0E2841"/>
-                </a:solidFill>
-                <a:latin typeface="Aptos Display"/>
-              </a:rPr>
-              <a:t>Conclusions</a:t>
-            </a:r>
-            <a:endParaRPr lang="en-GB"/>
-          </a:p>
-        </p:txBody>
-      </p:sp>
-      <p:sp>
-        <p:nvSpPr>
-          <p:cNvPr id="3" name="Content Placeholder 2">
-            <a:extLst>
-              <a:ext uri="{FF2B5EF4-FFF2-40B4-BE49-F238E27FC236}">
-                <a16:creationId xmlns:a16="http://schemas.microsoft.com/office/drawing/2014/main" id="{26D07290-1A10-9B48-B272-9FBE0AD24910}"/>
-              </a:ext>
-            </a:extLst>
-          </p:cNvPr>
-          <p:cNvSpPr>
-            <a:spLocks noGrp="1"/>
-          </p:cNvSpPr>
-          <p:nvPr>
-            <p:ph idx="1"/>
-          </p:nvPr>
-        </p:nvSpPr>
-        <p:spPr/>
-        <p:txBody>
-          <a:bodyPr vert="horz" lIns="91440" tIns="45720" rIns="91440" bIns="45720" rtlCol="0" anchor="t">
-            <a:normAutofit/>
-          </a:bodyPr>
-          <a:lstStyle/>
-          <a:p>
-            <a:pPr>
-              <a:spcAft>
-                <a:spcPts val="200"/>
-              </a:spcAft>
-              <a:buNone/>
-            </a:pPr>
-            <a:r>
-              <a:rPr lang="en-GB" sz="1900" b="1" dirty="0">
-                <a:latin typeface="Aptos"/>
-                <a:solidFill>
-                  <a:srgbClr val="0E2841"/>
-                </a:solidFill>
-              </a:rPr>
-              <a:t>SABRE makes uncertainty operational — not merely descriptive</a:t>
-            </a:r>
-          </a:p>
-          <a:p>
-            <a:pPr>
-              <a:buNone/>
-            </a:pPr>
-            <a:r>
-              <a:rPr lang="en-GB" sz="600" b="0" dirty="0">
-                <a:latin typeface="Aptos"/>
-              </a:rPr>
-              <a:t/>
-            </a:r>
-          </a:p>
-          <a:p>
-            <a:pPr lvl="1">
-              <a:buClr>
-                <a:srgbClr val="E97132"/>
-              </a:buClr>
-              <a:buFont typeface="Arial"/>
-              <a:buChar char="▸"/>
-            </a:pPr>
-            <a:r>
-              <a:rPr lang="en-GB" sz="1700" b="0" dirty="0">
-                <a:latin typeface="Aptos"/>
-              </a:rPr>
-              <a:t>Triage converts (p̂, σ) → actionable decision: automate vs escalate vs allow</a:t>
-            </a:r>
-          </a:p>
-          <a:p>
-            <a:pPr lvl="1">
-              <a:buClr>
-                <a:srgbClr val="E97132"/>
-              </a:buClr>
-              <a:buFont typeface="Arial"/>
-              <a:buChar char="▸"/>
-            </a:pPr>
-            <a:r>
-              <a:rPr lang="en-GB" sz="1700" b="0" dirty="0">
-                <a:latin typeface="Aptos"/>
-              </a:rPr>
-              <a:t>Uncertainty correctly identifies hardest cases: novel families, concurrent execution</a:t>
-            </a:r>
-          </a:p>
-          <a:p>
-            <a:pPr lvl="1">
-              <a:buClr>
-                <a:srgbClr val="E97132"/>
-              </a:buClr>
-              <a:buFont typeface="Arial"/>
-              <a:buChar char="▸"/>
-            </a:pPr>
-            <a:r>
-              <a:rPr lang="en-GB" sz="1700" b="0" dirty="0">
-                <a:latin typeface="Aptos"/>
-              </a:rPr>
-              <a:t>XAI (feature importance, counterfactuals) supports analyst audit</a:t>
-            </a:r>
-          </a:p>
-          <a:p>
-            <a:pPr lvl="1">
-              <a:buClr>
-                <a:srgbClr val="E97132"/>
-              </a:buClr>
-              <a:buFont typeface="Arial"/>
-              <a:buChar char="▸"/>
-            </a:pPr>
-            <a:r>
-              <a:rPr lang="en-GB" sz="1700" b="0" dirty="0">
-                <a:latin typeface="Aptos"/>
-              </a:rPr>
-              <a:t>SABRE-II: learned fusion + Bayesian policy reduces unnecessary escalation by 70%</a:t>
-            </a:r>
-          </a:p>
-          <a:p>
-            <a:pPr>
-              <a:buNone/>
-            </a:pPr>
-            <a:r>
-              <a:rPr lang="en-GB" sz="800" b="0" dirty="0">
-                <a:latin typeface="Aptos"/>
-              </a:rPr>
-              <a:t/>
-            </a:r>
-          </a:p>
-          <a:p>
-            <a:pPr>
-              <a:buNone/>
-            </a:pPr>
-            <a:r>
-              <a:rPr lang="en-GB" sz="1700" b="1" dirty="0">
-                <a:latin typeface="Aptos"/>
-                <a:solidFill>
-                  <a:srgbClr val="156082"/>
-                </a:solidFill>
-              </a:rPr>
-              <a:t>Publications:</a:t>
-            </a:r>
-          </a:p>
-          <a:p>
-            <a:pPr lvl="1">
-              <a:buClr>
-                <a:srgbClr val="E97132"/>
-              </a:buClr>
-              <a:buFont typeface="Arial"/>
-              <a:buChar char="▸"/>
-            </a:pPr>
-            <a:r>
-              <a:rPr lang="en-GB" sz="1600" b="0" dirty="0">
-                <a:latin typeface="Aptos"/>
-              </a:rPr>
-              <a:t>ESWA (Expert Systems With Applications) — under review, 2nd revision</a:t>
-            </a:r>
-          </a:p>
-          <a:p>
-            <a:pPr lvl="1">
-              <a:buClr>
-                <a:srgbClr val="E97132"/>
-              </a:buClr>
-              <a:buFont typeface="Arial"/>
-              <a:buChar char="▸"/>
-            </a:pPr>
-            <a:r>
-              <a:rPr lang="en-GB" sz="1600" b="0" dirty="0">
-                <a:latin typeface="Aptos"/>
-              </a:rPr>
-              <a:t>IEEE TIFS — SABRE+ submitted; SABRE-II in preparation</a:t>
-            </a:r>
-          </a:p>
-          <a:p>
-            <a:pPr>
-              <a:buNone/>
-            </a:pPr>
-            <a:r>
-              <a:rPr lang="en-GB" sz="800" b="0" dirty="0">
-                <a:latin typeface="Aptos"/>
-              </a:rPr>
-              <a:t/>
-            </a:r>
-          </a:p>
-          <a:p>
-            <a:pPr>
-              <a:buNone/>
-            </a:pPr>
-            <a:r>
-              <a:rPr lang="en-GB" sz="1600" b="1" dirty="0">
-                <a:latin typeface="Aptos"/>
-                <a:solidFill>
-                  <a:srgbClr val="E97132"/>
-                </a:solidFill>
-              </a:rPr>
-              <a:t>Questions welcome on:</a:t>
-            </a:r>
-          </a:p>
-          <a:p>
-            <a:pPr lvl="1">
-              <a:buClr>
-                <a:srgbClr val="E97132"/>
-              </a:buClr>
-              <a:buFont typeface="Arial"/>
-              <a:buChar char="▸"/>
-            </a:pPr>
-            <a:r>
-              <a:rPr lang="en-GB" sz="1500" b="0" dirty="0">
-                <a:latin typeface="Aptos"/>
-              </a:rPr>
-              <a:t>Triage threshold design and cost-sensitivity</a:t>
-            </a:r>
-          </a:p>
-          <a:p>
-            <a:pPr lvl="1">
-              <a:buClr>
-                <a:srgbClr val="E97132"/>
-              </a:buClr>
-              <a:buFont typeface="Arial"/>
-              <a:buChar char="▸"/>
-            </a:pPr>
-            <a:r>
-              <a:rPr lang="en-GB" sz="1500" b="0" dirty="0">
-                <a:latin typeface="Aptos"/>
-              </a:rPr>
-              <a:t>Generalisation to unseen ransomware families (family holdout results)</a:t>
-            </a:r>
-          </a:p>
-          <a:p>
-            <a:pPr lvl="1">
-              <a:buClr>
-                <a:srgbClr val="E97132"/>
-              </a:buClr>
-              <a:buFont typeface="Arial"/>
-              <a:buChar char="▸"/>
-            </a:pPr>
-            <a:r>
-              <a:rPr lang="en-GB" sz="1500" b="0" dirty="0">
-                <a:latin typeface="Aptos"/>
-              </a:rPr>
-              <a:t>Comparison with operational EDR/AV uncertainty practices</a:t>
-            </a:r>
-          </a:p>
-        </p:txBody>
-      </p:sp>
-      <p:cxnSp>
-        <p:nvCxnSpPr>
-          <p:cNvPr id="4" name="Straight Connector 3">
-            <a:extLst>
-              <a:ext uri="{FF2B5EF4-FFF2-40B4-BE49-F238E27FC236}">
-                <a16:creationId xmlns:a16="http://schemas.microsoft.com/office/drawing/2014/main" id="{72342D31-2E0B-0EB4-FF9C-60730B50339B}"/>
-              </a:ext>
-            </a:extLst>
-          </p:cNvPr>
-          <p:cNvCxnSpPr/>
-          <p:nvPr/>
-        </p:nvCxnSpPr>
-        <p:spPr>
-          <a:xfrm>
-            <a:off x="196788" y="1364942"/>
-            <a:ext cx="11798423" cy="0"/>
-          </a:xfrm>
-          <a:prstGeom prst="line">
-            <a:avLst/>
-          </a:prstGeom>
-        </p:spPr>
-        <p:style>
-          <a:lnRef idx="2">
-            <a:schemeClr val="accent1"/>
-          </a:lnRef>
-          <a:fillRef idx="0">
-            <a:schemeClr val="accent1"/>
-          </a:fillRef>
-          <a:effectRef idx="1">
-            <a:schemeClr val="accent1"/>
-          </a:effectRef>
-          <a:fontRef idx="minor">
-            <a:schemeClr val="tx1"/>
-          </a:fontRef>
-        </p:style>
-      </p:cxnSp>
-      <p:sp>
-        <p:nvSpPr>
-          <p:cNvPr id="9" name="Text Placeholder 3">
-            <a:extLst>
-              <a:ext uri="{FF2B5EF4-FFF2-40B4-BE49-F238E27FC236}">
-                <a16:creationId xmlns:a16="http://schemas.microsoft.com/office/drawing/2014/main" id="{01978E70-3595-504B-8650-4404453B4ACB}"/>
-              </a:ext>
-            </a:extLst>
-          </p:cNvPr>
-          <p:cNvSpPr>
-            <a:spLocks noGrp="1"/>
-          </p:cNvSpPr>
-          <p:nvPr/>
-        </p:nvSpPr>
-        <p:spPr>
-          <a:xfrm>
-            <a:off x="383109" y="1577615"/>
-            <a:ext cx="11425462" cy="4857744"/>
-          </a:xfrm>
-          <a:prstGeom prst="rect">
-            <a:avLst/>
-          </a:prstGeom>
-        </p:spPr>
-        <p:txBody>
-          <a:bodyPr vert="horz" lIns="0" tIns="0" rIns="0" bIns="0" rtlCol="0" anchor="t">
-            <a:noAutofit/>
-          </a:bodyPr>
-          <a:lstStyle>
-            <a:lvl1pPr marL="0" indent="0" algn="l" defTabSz="914377" rtl="0" eaLnBrk="1" latinLnBrk="0" hangingPunct="1">
-              <a:lnSpc>
-                <a:spcPts val="2400"/>
-              </a:lnSpc>
-              <a:spcBef>
-                <a:spcPts val="0"/>
-              </a:spcBef>
-              <a:spcAft>
-                <a:spcPts val="1200"/>
-              </a:spcAft>
-              <a:buFont typeface="Arial" panose="020B0604020202020204" pitchFamily="34" charset="0"/>
-              <a:buNone/>
-              <a:defRPr sz="2000" kern="1200">
-                <a:solidFill>
-                  <a:srgbClr val="000000"/>
-                </a:solidFill>
-                <a:latin typeface="+mn-lt"/>
-                <a:ea typeface="+mn-ea"/>
-                <a:cs typeface="+mn-cs"/>
-              </a:defRPr>
-            </a:lvl1pPr>
-            <a:lvl2pPr marL="360000" indent="-180000" algn="l" defTabSz="914377" rtl="0" eaLnBrk="1" latinLnBrk="0" hangingPunct="1">
-              <a:lnSpc>
-                <a:spcPct val="100000"/>
-              </a:lnSpc>
-              <a:spcBef>
-                <a:spcPts val="0"/>
-              </a:spcBef>
-              <a:buFont typeface="Arial" panose="020B0604020202020204" pitchFamily="34" charset="0"/>
-              <a:buNone/>
-              <a:defRPr sz="1800" kern="1200">
-                <a:solidFill>
-                  <a:srgbClr val="000000"/>
-                </a:solidFill>
-                <a:latin typeface="+mn-lt"/>
-                <a:ea typeface="+mn-ea"/>
-                <a:cs typeface="+mn-cs"/>
-              </a:defRPr>
-            </a:lvl2pPr>
-            <a:lvl3pPr marL="540000" indent="-180000" algn="l" defTabSz="914377" rtl="0" eaLnBrk="1" latinLnBrk="0" hangingPunct="1">
-              <a:lnSpc>
-                <a:spcPct val="100000"/>
-              </a:lnSpc>
-              <a:spcBef>
-                <a:spcPts val="0"/>
-              </a:spcBef>
-              <a:buFont typeface="Arial" panose="020B0604020202020204" pitchFamily="34" charset="0"/>
-              <a:buChar char="•"/>
-              <a:defRPr sz="1600" kern="1200">
-                <a:solidFill>
-                  <a:srgbClr val="000000"/>
-                </a:solidFill>
-                <a:latin typeface="+mn-lt"/>
-                <a:ea typeface="+mn-ea"/>
-                <a:cs typeface="+mn-cs"/>
-              </a:defRPr>
-            </a:lvl3pPr>
-            <a:lvl4pPr marL="720000" indent="-180000" algn="l" defTabSz="914377" rtl="0" eaLnBrk="1" latinLnBrk="0" hangingPunct="1">
-              <a:lnSpc>
-                <a:spcPct val="100000"/>
-              </a:lnSpc>
-              <a:spcBef>
-                <a:spcPts val="0"/>
-              </a:spcBef>
-              <a:buFont typeface="Arial" panose="020B0604020202020204" pitchFamily="34" charset="0"/>
-              <a:buChar char="•"/>
-              <a:defRPr sz="1400" kern="1200">
-                <a:solidFill>
-                  <a:srgbClr val="000000"/>
-                </a:solidFill>
-                <a:latin typeface="+mn-lt"/>
-                <a:ea typeface="+mn-ea"/>
-                <a:cs typeface="+mn-cs"/>
-              </a:defRPr>
-            </a:lvl4pPr>
-            <a:lvl5pPr marL="900000" indent="-180000" algn="l" defTabSz="914377" rtl="0" eaLnBrk="1" latinLnBrk="0" hangingPunct="1">
-              <a:lnSpc>
-                <a:spcPct val="100000"/>
-              </a:lnSpc>
-              <a:spcBef>
-                <a:spcPts val="0"/>
-              </a:spcBef>
-              <a:buFont typeface="Arial" panose="020B0604020202020204" pitchFamily="34" charset="0"/>
-              <a:buChar char="•"/>
-              <a:defRPr sz="1400" kern="1200">
-                <a:solidFill>
-                  <a:srgbClr val="000000"/>
-                </a:solidFill>
-                <a:latin typeface="+mn-lt"/>
-                <a:ea typeface="+mn-ea"/>
-                <a:cs typeface="+mn-cs"/>
-              </a:defRPr>
-            </a:lvl5pPr>
-            <a:lvl6pPr marL="2514537" indent="-228594" algn="l" defTabSz="914377" rtl="0" eaLnBrk="1" latinLnBrk="0" hangingPunct="1">
-              <a:lnSpc>
-                <a:spcPct val="90000"/>
-              </a:lnSpc>
-              <a:spcBef>
-                <a:spcPts val="500"/>
-              </a:spcBef>
-              <a:buFont typeface="Arial" panose="020B0604020202020204" pitchFamily="34" charset="0"/>
-              <a:buChar char="•"/>
-              <a:defRPr sz="1800" kern="1200">
-                <a:solidFill>
-                  <a:schemeClr val="tx1"/>
-                </a:solidFill>
-                <a:latin typeface="+mn-lt"/>
-                <a:ea typeface="+mn-ea"/>
-                <a:cs typeface="+mn-cs"/>
-              </a:defRPr>
-            </a:lvl6pPr>
-            <a:lvl7pPr marL="2971726" indent="-228594" algn="l" defTabSz="914377" rtl="0" eaLnBrk="1" latinLnBrk="0" hangingPunct="1">
-              <a:lnSpc>
-                <a:spcPct val="90000"/>
-              </a:lnSpc>
-              <a:spcBef>
-                <a:spcPts val="500"/>
-              </a:spcBef>
-              <a:buFont typeface="Arial" panose="020B0604020202020204" pitchFamily="34" charset="0"/>
-              <a:buChar char="•"/>
-              <a:defRPr sz="1800" kern="1200">
-                <a:solidFill>
-                  <a:schemeClr val="tx1"/>
-                </a:solidFill>
-                <a:latin typeface="+mn-lt"/>
-                <a:ea typeface="+mn-ea"/>
-                <a:cs typeface="+mn-cs"/>
-              </a:defRPr>
-            </a:lvl7pPr>
-            <a:lvl8pPr marL="3428914" indent="-228594" algn="l" defTabSz="914377" rtl="0" eaLnBrk="1" latinLnBrk="0" hangingPunct="1">
-              <a:lnSpc>
-                <a:spcPct val="90000"/>
-              </a:lnSpc>
-              <a:spcBef>
-                <a:spcPts val="500"/>
-              </a:spcBef>
-              <a:buFont typeface="Arial" panose="020B0604020202020204" pitchFamily="34" charset="0"/>
-              <a:buChar char="•"/>
-              <a:defRPr sz="1800" kern="1200">
-                <a:solidFill>
-                  <a:schemeClr val="tx1"/>
-                </a:solidFill>
-                <a:latin typeface="+mn-lt"/>
-                <a:ea typeface="+mn-ea"/>
-                <a:cs typeface="+mn-cs"/>
-              </a:defRPr>
-            </a:lvl8pPr>
-            <a:lvl9pPr marL="3886103" indent="-228594" algn="l" defTabSz="914377" rtl="0" eaLnBrk="1" latinLnBrk="0" hangingPunct="1">
-              <a:lnSpc>
-                <a:spcPct val="90000"/>
-              </a:lnSpc>
-              <a:spcBef>
-                <a:spcPts val="500"/>
-              </a:spcBef>
-              <a:buFont typeface="Arial" panose="020B0604020202020204" pitchFamily="34" charset="0"/>
-              <a:buChar char="•"/>
-              <a:defRPr sz="1800" kern="1200">
-                <a:solidFill>
-                  <a:schemeClr val="tx1"/>
-                </a:solidFill>
-                <a:latin typeface="+mn-lt"/>
-                <a:ea typeface="+mn-ea"/>
-                <a:cs typeface="+mn-cs"/>
-              </a:defRPr>
-            </a:lvl9pPr>
-          </a:lstStyle>
-          <a:p>
-            <a:pPr marL="342900" indent="-342900">
-              <a:lnSpc>
-                <a:spcPct val="100000"/>
-              </a:lnSpc>
-              <a:spcBef>
-                <a:spcPts val="1200"/>
-              </a:spcBef>
-              <a:spcAft>
-                <a:spcPts val="600"/>
-              </a:spcAft>
-              <a:buFont typeface="Wingdings" panose="05000000000000000000" pitchFamily="2" charset="2"/>
-              <a:buChar char="q"/>
-            </a:pPr>
-            <a:endParaRPr lang="en-IN" sz="2800">
-              <a:latin typeface="Candara" panose="020E0502030303020204" pitchFamily="34" charset="0"/>
-            </a:endParaRPr>
-          </a:p>
-        </p:txBody>
-      </p:sp>
-    </p:spTree>
-    <p:extLst>
-      <p:ext uri="{BB962C8B-B14F-4D97-AF65-F5344CB8AC3E}">
-        <p14:creationId xmlns:p14="http://schemas.microsoft.com/office/powerpoint/2010/main" val="1970056675"/>
-      </p:ext>
-    </p:extLst>
-  </p:cSld>
-  <p:clrMapOvr>
-    <a:masterClrMapping/>
-  </p:clrMapOvr>
-</p:sld>
-</file>
-
-<file path=ppt/slides/slide9.xml><?xml version="1.0" encoding="utf-8"?>
-<p:sld xmlns:a="http://schemas.openxmlformats.org/drawingml/2006/main" xmlns:p="http://schemas.openxmlformats.org/presentationml/2006/main" xmlns:r="http://schemas.openxmlformats.org/officeDocument/2006/relationships">
-  <p:cSld>
-    <p:spTree>
-      <p:nvGrpSpPr>
-        <p:cNvPr id="1" name=""/>
-        <p:cNvGrpSpPr/>
-        <p:nvPr/>
-      </p:nvGrpSpPr>
-      <p:grpSpPr/>
-      <p:cxnSp>
-        <p:nvCxnSpPr>
-          <p:cNvPr id="4" name="Straight Connector 3">
-            <a:extLst>
-              <a:ext uri="{FF2B5EF4-FFF2-40B4-BE49-F238E27FC236}">
-                <a16:creationId xmlns:a16="http://schemas.microsoft.com/office/drawing/2014/main" id="{F04E40D7-BE15-03B3-6F32-D4894228A3A0}"/>
-              </a:ext>
-            </a:extLst>
-          </p:cNvPr>
-          <p:cNvCxnSpPr/>
-          <p:nvPr/>
-        </p:nvCxnSpPr>
-        <p:spPr>
-          <a:xfrm>
-            <a:off x="196788" y="1364942"/>
-            <a:ext cx="11798423" cy="0"/>
-          </a:xfrm>
-          <a:prstGeom prst="line">
-            <a:avLst/>
-          </a:prstGeom>
-        </p:spPr>
-        <p:style>
-          <a:lnRef idx="2">
-            <a:schemeClr val="accent1"/>
-          </a:lnRef>
-          <a:fillRef idx="0">
-            <a:schemeClr val="accent1"/>
-          </a:fillRef>
-          <a:effectRef idx="1">
-            <a:schemeClr val="accent1"/>
-          </a:effectRef>
-          <a:fontRef idx="minor">
-            <a:schemeClr val="tx1"/>
-          </a:fontRef>
-        </p:style>
-      </p:cxnSp>
-      <p:sp>
-        <p:nvSpPr>
-          <p:cNvPr id="3" name="Content Placeholder 2">
-            <a:extLst>
-              <a:ext uri="{FF2B5EF4-FFF2-40B4-BE49-F238E27FC236}">
-                <a16:creationId xmlns:a16="http://schemas.microsoft.com/office/drawing/2014/main" id="{BA919012-1158-CC85-7281-8334EED33B59}"/>
-              </a:ext>
-            </a:extLst>
-          </p:cNvPr>
-          <p:cNvSpPr>
-            <a:spLocks noGrp="1"/>
-          </p:cNvSpPr>
-          <p:nvPr>
-            <p:ph idx="1"/>
-          </p:nvPr>
-        </p:nvSpPr>
-        <p:spPr/>
-        <p:txBody>
-          <a:bodyPr vert="horz" lIns="91440" tIns="45720" rIns="91440" bIns="45720" rtlCol="0" anchor="t">
-            <a:normAutofit/>
-          </a:bodyPr>
-          <a:lstStyle/>
-          <a:p>
-            <a:pPr lvl="1">
-              <a:spcBef>
-                <a:spcPts val="400"/>
-              </a:spcBef>
-              <a:buClr>
-                <a:srgbClr val="E97132"/>
-              </a:buClr>
-              <a:buFont typeface="Arial"/>
-              <a:buChar char="▸"/>
-            </a:pPr>
-            <a:r>
-              <a:rPr lang="en-GB" sz="1800" b="0" dirty="0">
-                <a:latin typeface="Aptos"/>
-                <a:solidFill>
-                  <a:srgbClr val="0E2841"/>
-                </a:solidFill>
-              </a:rPr>
-              <a:t>The Problem — why binary detection fails in practice</a:t>
-            </a:r>
-          </a:p>
-          <a:p>
-            <a:pPr lvl="1">
-              <a:spcBef>
-                <a:spcPts val="400"/>
-              </a:spcBef>
-              <a:buClr>
-                <a:srgbClr val="E97132"/>
-              </a:buClr>
-              <a:buFont typeface="Arial"/>
-              <a:buChar char="▸"/>
-            </a:pPr>
-            <a:r>
-              <a:rPr lang="en-GB" sz="1800" b="0" dirty="0">
-                <a:latin typeface="Aptos"/>
-                <a:solidFill>
-                  <a:srgbClr val="0E2841"/>
-                </a:solidFill>
-              </a:rPr>
-              <a:t>SABRE Architecture — two complementary detection agents</a:t>
-            </a:r>
-          </a:p>
-          <a:p>
-            <a:pPr lvl="1">
-              <a:spcBef>
-                <a:spcPts val="400"/>
-              </a:spcBef>
-              <a:buClr>
-                <a:srgbClr val="E97132"/>
-              </a:buClr>
-              <a:buFont typeface="Arial"/>
-              <a:buChar char="▸"/>
-            </a:pPr>
-            <a:r>
-              <a:rPr lang="en-GB" sz="1800" b="0" dirty="0">
-                <a:latin typeface="Aptos"/>
-                <a:solidFill>
-                  <a:srgbClr val="0E2841"/>
-                </a:solidFill>
-              </a:rPr>
-              <a:t>Triage Policy — operationalising uncertainty as a control variable</a:t>
-            </a:r>
-          </a:p>
-          <a:p>
-            <a:pPr lvl="1">
-              <a:spcBef>
-                <a:spcPts val="400"/>
-              </a:spcBef>
-              <a:buClr>
-                <a:srgbClr val="E97132"/>
-              </a:buClr>
-              <a:buFont typeface="Arial"/>
-              <a:buChar char="▸"/>
-            </a:pPr>
-            <a:r>
-              <a:rPr lang="en-GB" sz="1800" b="0" dirty="0">
-                <a:latin typeface="Aptos"/>
-                <a:solidFill>
-                  <a:srgbClr val="0E2841"/>
-                </a:solidFill>
-              </a:rPr>
-              <a:t>Results — where SABRE works and where it struggles</a:t>
-            </a:r>
-          </a:p>
-          <a:p>
-            <a:pPr lvl="1">
-              <a:spcBef>
-                <a:spcPts val="400"/>
-              </a:spcBef>
-              <a:buClr>
-                <a:srgbClr val="E97132"/>
-              </a:buClr>
-              <a:buFont typeface="Arial"/>
-              <a:buChar char="▸"/>
-            </a:pPr>
-            <a:r>
-              <a:rPr lang="en-GB" sz="1800" b="0" dirty="0">
-                <a:latin typeface="Aptos"/>
-                <a:solidFill>
-                  <a:srgbClr val="0E2841"/>
-                </a:solidFill>
-              </a:rPr>
-              <a:t>Explainability — making decisions auditable</a:t>
-            </a:r>
-          </a:p>
-          <a:p>
-            <a:pPr lvl="1">
-              <a:spcBef>
-                <a:spcPts val="400"/>
-              </a:spcBef>
-              <a:buClr>
-                <a:srgbClr val="E97132"/>
-              </a:buClr>
-              <a:buFont typeface="Arial"/>
-              <a:buChar char="▸"/>
-            </a:pPr>
-            <a:r>
-              <a:rPr lang="en-GB" sz="1800" b="0" dirty="0">
-                <a:latin typeface="Aptos"/>
-                <a:solidFill>
-                  <a:srgbClr val="0E2841"/>
-                </a:solidFill>
-              </a:rPr>
-              <a:t>SABRE-II — learned fusion and Bayesian policy optimisation</a:t>
-            </a:r>
-          </a:p>
-          <a:p>
-            <a:pPr lvl="1">
-              <a:spcBef>
-                <a:spcPts val="400"/>
-              </a:spcBef>
-              <a:buClr>
-                <a:srgbClr val="E97132"/>
-              </a:buClr>
-              <a:buFont typeface="Arial"/>
-              <a:buChar char="▸"/>
-            </a:pPr>
-            <a:r>
-              <a:rPr lang="en-GB" sz="1800" b="0" dirty="0">
-                <a:latin typeface="Aptos"/>
-                <a:solidFill>
-                  <a:srgbClr val="0E2841"/>
-                </a:solidFill>
-              </a:rPr>
-              <a:t>Conclusions &amp; Discussion</a:t>
-            </a:r>
-          </a:p>
-          <a:p>
-            <a:pPr>
-              <a:buNone/>
-            </a:pPr>
-            <a:r>
-              <a:rPr lang="en-GB" sz="600" b="0" dirty="0">
-                <a:latin typeface="Aptos"/>
-              </a:rPr>
-              <a:t/>
-            </a:r>
-          </a:p>
-          <a:p>
-            <a:pPr algn="ctr">
-              <a:buNone/>
-            </a:pPr>
-            <a:r>
-              <a:rPr lang="en-GB" sz="1500" b="0" dirty="0">
-                <a:latin typeface="Aptos"/>
-                <a:solidFill>
-                  <a:srgbClr val="156082"/>
-                </a:solidFill>
-              </a:rPr>
-              <a:t>15 min talk · 5 min Q&amp;A</a:t>
-            </a:r>
-          </a:p>
-        </p:txBody>
-      </p:sp>
-      <p:sp>
-        <p:nvSpPr>
-          <p:cNvPr id="2" name="Title 1">
-            <a:extLst>
-              <a:ext uri="{FF2B5EF4-FFF2-40B4-BE49-F238E27FC236}">
-                <a16:creationId xmlns:a16="http://schemas.microsoft.com/office/drawing/2014/main" id="{8C7BA404-C596-C471-3B59-87E69A4BB8A7}"/>
-              </a:ext>
-            </a:extLst>
-          </p:cNvPr>
-          <p:cNvSpPr>
-            <a:spLocks noGrp="1"/>
-          </p:cNvSpPr>
-          <p:nvPr>
-            <p:ph type="title"/>
-          </p:nvPr>
-        </p:nvSpPr>
-        <p:spPr/>
-        <p:txBody>
-          <a:bodyPr/>
-          <a:lstStyle/>
-          <a:p>
-            <a:r>
-              <a:rPr sz="2800" b="1">
-                <a:solidFill>
-                  <a:srgbClr val="0E2841"/>
-                </a:solidFill>
-                <a:latin typeface="Aptos Display"/>
-              </a:rPr>
-              <a:t>Agenda</a:t>
-            </a:r>
-            <a:endParaRPr lang="en-GB" err="1"/>
-          </a:p>
-        </p:txBody>
-      </p:sp>
-      <p:sp>
-        <p:nvSpPr>
-          <p:cNvPr id="2" name="Title 1"/>
-          <p:cNvSpPr>
-            <a:spLocks noGrp="1"/>
-          </p:cNvSpPr>
-          <p:nvPr>
-            <p:ph type="title"/>
-          </p:nvPr>
-        </p:nvSpPr>
-        <p:spPr/>
-        <p:txBody>
-          <a:bodyPr/>
-          <a:lstStyle/>
-          <a:p/>
-        </p:txBody>
-      </p:sp>
-      <p:sp>
-        <p:nvSpPr>
-          <p:cNvPr id="3" name="Content Placeholder 2"/>
-          <p:cNvSpPr>
-            <a:spLocks noGrp="1"/>
-          </p:cNvSpPr>
-          <p:nvPr>
-            <p:ph idx="1"/>
-          </p:nvPr>
-        </p:nvSpPr>
-        <p:spPr/>
-        <p:txBody>
-          <a:bodyPr/>
-          <a:lstStyle/>
-          <a:p/>
-        </p:txBody>
-      </p:sp>
-    </p:spTree>
   </p:cSld>
   <p:clrMapOvr>
     <a:masterClrMapping/>
